--- a/frontend/public/downloads/RMS_Estate_and_Language_Review.pptx
+++ b/frontend/public/downloads/RMS_Estate_and_Language_Review.pptx
@@ -58,6 +58,7 @@
     <p:sldId id="306" r:id="rId57"/>
     <p:sldId id="307" r:id="rId58"/>
     <p:sldId id="308" r:id="rId59"/>
+    <p:sldId id="309" r:id="rId60"/>
   </p:sldIdLst>
   <p:sldSz cx="12191695" cy="6858000" type="screen4x3"/>
   <p:notesSz cx="6858000" cy="9144000"/>
@@ -5056,7 +5057,7 @@
                 </a:solidFill>
                 <a:latin typeface="Cambria"/>
               </a:rPr>
-              <a:t>RMS estate: what is held, what it costs, what to do first</a:t>
+              <a:t>Estate-wide intelligence: cut, fix and prepare first</a:t>
             </a:r>
           </a:p>
         </p:txBody>
@@ -5091,7 +5092,7 @@
                 </a:solidFill>
                 <a:latin typeface="Calibri"/>
               </a:rPr>
-              <a:t>Estate-wide census of databases, object store and file shares, with product priorities</a:t>
+              <a:t>Databases, object store, file shares and language holdings, for one owner decision</a:t>
             </a:r>
           </a:p>
         </p:txBody>
@@ -5283,7 +5284,7 @@
                 </a:solidFill>
                 <a:latin typeface="Calibri"/>
               </a:rPr>
-              <a:t>EXACT SOURCES</a:t>
+              <a:t>EXACT SOURCES UNDER REVIEW</a:t>
             </a:r>
           </a:p>
         </p:txBody>
@@ -5318,7 +5319,7 @@
                 </a:solidFill>
                 <a:latin typeface="Cambria"/>
               </a:rPr>
-              <a:t>Named buckets, tables and shares are under review, each with a proposed destination</a:t>
+              <a:t>Cold buckets, duplicate candidates and unreadable buckets define the review list</a:t>
             </a:r>
           </a:p>
         </p:txBody>
@@ -5388,7 +5389,7 @@
                 </a:solidFill>
                 <a:latin typeface="Calibri"/>
               </a:rPr>
-              <a:t>41.9 TiB of the object store, across 43 buckets, has not been written for over a year. That shows write inactivity, not absence of reads.</a:t>
+              <a:t>41.9 TiB of the object store has not been written for over a year, across 43 buckets. No-write age is not read demand.</a:t>
             </a:r>
           </a:p>
         </p:txBody>
@@ -5493,7 +5494,7 @@
                 </a:solidFill>
                 <a:latin typeface="Calibri"/>
               </a:rPr>
-              <a:t>7.7 TiB, about 5.0% of objects, are duplicate candidates and need a content hash before any removal.</a:t>
+              <a:t>7.7 TiB, 5.0% of objects, are duplicate candidates, not yet confirmed by content hash.</a:t>
             </a:r>
           </a:p>
         </p:txBody>
@@ -5703,7 +5704,7 @@
                 </a:solidFill>
                 <a:latin typeface="Calibri"/>
               </a:rPr>
-              <a:t>File shares are sized and dated but not fingerprinted. Every destination in the tables is a proposal; nothing has moved.</a:t>
+              <a:t>Database strategy bytes are strategy totals, not table sizes. File-share duplication is unmeasured.</a:t>
             </a:r>
           </a:p>
         </p:txBody>
@@ -16205,7 +16206,7 @@
                 </a:solidFill>
                 <a:latin typeface="Cambria"/>
               </a:rPr>
-              <a:t>Object storage holds most of the estate, so archive tiering is the first saving to test</a:t>
+              <a:t>Most of the priced saving sits in cold object storage, not in the databases</a:t>
             </a:r>
           </a:p>
         </p:txBody>
@@ -16275,7 +16276,7 @@
                 </a:solidFill>
                 <a:latin typeface="Calibri"/>
               </a:rPr>
-              <a:t>The census covers 20 databases, an object store, file shares, a staged audio corpus and written-word archives. The whole estate holds 174.3 TiB. Object storage is 74.8% of it and file shares are 25.0%. Databases are only 0.2%.</a:t>
+              <a:t>The estate holds 174.3 TiB: 130.3 TiB in the object store, 43.6 TiB in file shares and 351.3 GiB in 20 databases and 1006 tables. The owner has declared every right to use the data established, so the questions are cost, condition and preparation.</a:t>
             </a:r>
           </a:p>
         </p:txBody>
@@ -16380,7 +16381,7 @@
                 </a:solidFill>
                 <a:latin typeface="Calibri"/>
               </a:rPr>
-              <a:t>41.9 TiB of the object store has not been written for over a year, and 7.7 TiB are duplicate candidates. The saving is priced at no more than 1,174.4 USD a month at reference list prices, which is not the owner's invoice. 40 of 106 buckets could not be read, and database condition is uneven.</a:t>
+              <a:t>Priced strategies bound the monthly saving at 1,174.4 USD at list prices, but most of it rests on cold-looking object buckets whose read use was not measured. 40 of 106 buckets could not be read, and database ratios rest on 638 measured tables out of 1006.</a:t>
             </a:r>
           </a:p>
         </p:txBody>
@@ -16485,7 +16486,7 @@
                 </a:solidFill>
                 <a:latin typeface="Calibri"/>
               </a:rPr>
-              <a:t>What should the owner do first, given how certain each saving and each product preparation step is?</a:t>
+              <a:t>What should the owner do first to reduce carrying cost and stand up the first data products?</a:t>
             </a:r>
           </a:p>
         </p:txBody>
@@ -16590,7 +16591,7 @@
                 </a:solidFill>
                 <a:latin typeface="Calibri"/>
               </a:rPr>
-              <a:t>Validate before moving anything. Check read patterns and retrieval fees on the write-inactive buckets, confirm duplicates by content hash, and reconcile the unreadable buckets. In parallel, prepare one bounded product from the shortlist. Rights are settled, so product preparation means de-identification or aggregation, not rights clearance.</a:t>
+              <a:t>Verify and tier the cold buckets first, with an upper bound of 986.5 USD a month. Hash the duplicate candidates before removing anything. Reconcile the unreadable buckets. Then prepare reference data and the content catalogue, using de-identification or aggregation as a preparation step.</a:t>
             </a:r>
           </a:p>
         </p:txBody>
@@ -16791,7 +16792,7 @@
                 </a:solidFill>
                 <a:latin typeface="Cambria"/>
               </a:rPr>
-              <a:t>Cost of bytes nobody writes to</a:t>
+              <a:t>Where cost can fall</a:t>
             </a:r>
           </a:p>
         </p:txBody>
@@ -16852,7 +16853,7 @@
                 </a:solidFill>
                 <a:latin typeface="Calibri"/>
               </a:rPr>
-              <a:t>COST STRATEGIES</a:t>
+              <a:t>RECLAIMABLE BYTES BY STRATEGY</a:t>
             </a:r>
           </a:p>
         </p:txBody>
@@ -16887,7 +16888,7 @@
                 </a:solidFill>
                 <a:latin typeface="Cambria"/>
               </a:rPr>
-              <a:t>Object-store tiering and duplicate reconciliation dominate the addressable bytes</a:t>
+              <a:t>Two object-store moves address nearly all reclaimable bytes; database moves are marginal</a:t>
             </a:r>
           </a:p>
         </p:txBody>
@@ -16940,7 +16941,7 @@
                 </a:solidFill>
                 <a:latin typeface="Calibri"/>
               </a:rPr>
-              <a:t>The three largest strategies address 100.0% of the bytes all strategies reach, but these are estimates and the strategies may overlap.</a:t>
+              <a:t>The three largest strategies address 100.0% of the 50,799.8 GiB that all strategies reach, and archive-class tiering is a cheaper tier, not deletion.</a:t>
             </a:r>
           </a:p>
         </p:txBody>
@@ -17176,7 +17177,7 @@
                 </a:solidFill>
                 <a:latin typeface="Cambria"/>
               </a:rPr>
-              <a:t>The three priced moves differ sharply in size and in the checks each needs first</a:t>
+              <a:t>The three priced moves differ sharply in size and in the check each needs</a:t>
             </a:r>
           </a:p>
         </p:txBody>
@@ -17521,7 +17522,7 @@
                 </a:solidFill>
                 <a:latin typeface="Calibri"/>
               </a:rPr>
-              <a:t>Archive tiering is the largest priced move, duplicate reconciliation needs hash confirmation, and table cold storage is small; the priced total is at most 1,174.4 USD a month.</a:t>
+              <a:t>Monthly upper bounds at list prices are 986.5, 180.3 and 5.9 USD; each needs its own verification before action.</a:t>
             </a:r>
           </a:p>
         </p:txBody>
@@ -17853,7 +17854,7 @@
                 </a:solidFill>
                 <a:latin typeface="Cambria"/>
               </a:rPr>
-              <a:t>Completeness and personal-data markers, not exact duplicates, are the main preparation burden</a:t>
+              <a:t>Empty fields and damage, not duplication, are the main condition problems in the rows</a:t>
             </a:r>
           </a:p>
         </p:txBody>
@@ -17906,7 +17907,7 @@
                 </a:solidFill>
                 <a:latin typeface="Calibri"/>
               </a:rPr>
-              <a:t>These ratios overlap and use different samples, so read each on its own and do not add them.</a:t>
+              <a:t>Completeness is the main repair task: 81.7% of rows carry empty required-looking fields against 1.5% exact duplicates; the bases differ, so the shares must not be added.</a:t>
             </a:r>
           </a:p>
         </p:txBody>
@@ -18107,7 +18108,7 @@
                 </a:solidFill>
                 <a:latin typeface="Calibri"/>
               </a:rPr>
-              <a:t>DATABASE FOOTPRINT</a:t>
+              <a:t>DATABASE CONCENTRATION</a:t>
             </a:r>
           </a:p>
         </p:txBody>
@@ -18142,7 +18143,7 @@
                 </a:solidFill>
                 <a:latin typeface="Cambria"/>
               </a:rPr>
-              <a:t>One staging database holds nearly all database bytes, so cleanup is a narrow workstream</a:t>
+              <a:t>A few large databases hold nearly all database bytes, so cleanup should start there</a:t>
             </a:r>
           </a:p>
         </p:txBody>
@@ -18195,7 +18196,7 @@
                 </a:solidFill>
                 <a:latin typeface="Calibri"/>
               </a:rPr>
-              <a:t>The largest databases hold 99.7% of database bytes. Concentration of bytes does not show that the same database has the worst quality.</a:t>
+              <a:t>The largest databases hold 99.7% of the 351.3 GiB; treat this as a map for effort, not proof that one database causes every condition finding.</a:t>
             </a:r>
           </a:p>
         </p:txBody>
@@ -18431,7 +18432,7 @@
                 </a:solidFill>
                 <a:latin typeface="Cambria"/>
               </a:rPr>
-              <a:t>Degradation, gaps and personal-data markers are common, so prepare before release</a:t>
+              <a:t>Rows need completeness repair and de-identification or aggregation before products use them</a:t>
             </a:r>
           </a:p>
         </p:txBody>
@@ -18501,7 +18502,7 @@
                 </a:solidFill>
                 <a:latin typeface="Calibri"/>
               </a:rPr>
-              <a:t>Exact duplicate rows are only 1.5%, but 23.0% of rows are degraded and 81.7% carry empty required-looking fields.</a:t>
+              <a:t>Exact duplicates are an estimated 1.5% of rows; degraded rows are an estimated 23.0%.</a:t>
             </a:r>
           </a:p>
         </p:txBody>
@@ -18606,7 +18607,7 @@
                 </a:solidFill>
                 <a:latin typeface="Calibri"/>
               </a:rPr>
-              <a:t>71.8% of 1.0m sampled rows carry personal-data markers. Prepare by de-identification or aggregation; this is not a rights question.</a:t>
+              <a:t>81.7% of rows carry empty required-looking fields. These are heuristic flags, so decide per product which matter.</a:t>
             </a:r>
           </a:p>
         </p:txBody>
@@ -18711,7 +18712,7 @@
                 </a:solidFill>
                 <a:latin typeface="Calibri"/>
               </a:rPr>
-              <a:t>15.4% of database bytes have not been written for over a year, and 368 tables are empty.</a:t>
+              <a:t>71.8% of 1.0m sampled rows carry personal-data markers: a de-identification or aggregation task, not a rights question.</a:t>
             </a:r>
           </a:p>
         </p:txBody>
@@ -18816,7 +18817,7 @@
                 </a:solidFill>
                 <a:latin typeface="Calibri"/>
               </a:rPr>
-              <a:t>About 15.2 GiB, or 4.3% of bytes, looks reclaimable in the databases before pricing, far narrower than the estate-wide strategies.</a:t>
+              <a:t>15.4% of bytes are unwritten for over a year; dead columns are 13.0% of measured columns.</a:t>
             </a:r>
           </a:p>
         </p:txBody>
@@ -19052,7 +19053,7 @@
                 </a:solidFill>
                 <a:latin typeface="Cambria"/>
               </a:rPr>
-              <a:t>Speech audio by language</a:t>
+              <a:t>Language audio</a:t>
             </a:r>
           </a:p>
         </p:txBody>
@@ -19113,7 +19114,7 @@
                 </a:solidFill>
                 <a:latin typeface="Calibri"/>
               </a:rPr>
-              <a:t>SPEECH BY LANGUAGE</a:t>
+              <a:t>SPEECH BY LANGUAGE FOLDER</a:t>
             </a:r>
           </a:p>
         </p:txBody>
@@ -19148,7 +19149,7 @@
                 </a:solidFill>
                 <a:latin typeface="Cambria"/>
               </a:rPr>
-              <a:t>Estimated speech hours are concentrated in six language folders; two others hold little</a:t>
+              <a:t>An estimated 421.4 speech hours sit in 8 language folders once music is removed</a:t>
             </a:r>
           </a:p>
         </p:txBody>
@@ -19201,7 +19202,7 @@
                 </a:solidFill>
                 <a:latin typeface="Calibri"/>
               </a:rPr>
-              <a:t>Speech hours are estimates after music removal, so use them to scope language preparation, not as a verified corpus.</a:t>
+              <a:t>Six larger folders carry most of the speech; the two smallest folders hold too little to support a pilot on their own.</a:t>
             </a:r>
           </a:p>
         </p:txBody>
@@ -19437,7 +19438,7 @@
                 </a:solidFill>
                 <a:latin typeface="Cambria"/>
               </a:rPr>
-              <a:t>Agreement with the folder language varies by folder and is weakest in the smallest</a:t>
+              <a:t>Folder-language agreement varies by folder, so language checks must precede any packaging</a:t>
             </a:r>
           </a:p>
         </p:txBody>
@@ -19490,7 +19491,7 @@
                 </a:solidFill>
                 <a:latin typeface="Calibri"/>
               </a:rPr>
-              <a:t>Agreement is a model reading on labelled windows, so aim human validation at the folders where it is lowest.</a:t>
+              <a:t>Overall 82.3% of judged windows agree with the folder; the model declined to label 10.7%. These are model readings, not human verification.</a:t>
             </a:r>
           </a:p>
         </p:txBody>
@@ -20522,7 +20523,7 @@
                 </a:solidFill>
                 <a:latin typeface="Calibri"/>
               </a:rPr>
-              <a:t>AUDIO</a:t>
+              <a:t>AUDIO IN THE STAGED CORPUS</a:t>
             </a:r>
           </a:p>
         </p:txBody>
@@ -20557,7 +20558,7 @@
                 </a:solidFill>
                 <a:latin typeface="Cambria"/>
               </a:rPr>
-              <a:t>The staged corpus holds 529.5 recorded hours, of which about 421.4 are speech</a:t>
+              <a:t>The estate holds 529.5 recorded audio hours, of which an estimated 421.4 are speech</a:t>
             </a:r>
           </a:p>
         </p:txBody>
@@ -20627,7 +20628,7 @@
                 </a:solidFill>
                 <a:latin typeface="Calibri"/>
               </a:rPr>
-              <a:t>529.5 hours were recorded across 3958 files in 8 language folders: an estimated 421.4 hours of speech and 108.2 hours of music.</a:t>
+              <a:t>The staged audio is 529.5 hours in 3958 files; an estimated 421.4 hours are speech and 108.2 hours music.</a:t>
             </a:r>
           </a:p>
         </p:txBody>
@@ -20732,7 +20733,7 @@
                 </a:solidFill>
                 <a:latin typeface="Calibri"/>
               </a:rPr>
-              <a:t>The detector called 20.4% of windows music. Music is the majority in 539 files, which are filter candidates.</a:t>
+              <a:t>Music is the majority in 539 files; filter these before any speech product.</a:t>
             </a:r>
           </a:p>
         </p:txBody>
@@ -20837,7 +20838,7 @@
                 </a:solidFill>
                 <a:latin typeface="Calibri"/>
               </a:rPr>
-              <a:t>82.3% of labelled windows agree with the folder language, and the model declined to label 10.7% of speech windows.</a:t>
+              <a:t>82.3% of judged windows agree with the folder language, but folders differ; check language before packaging.</a:t>
             </a:r>
           </a:p>
         </p:txBody>
@@ -20942,7 +20943,7 @@
                 </a:solidFill>
                 <a:latin typeface="Calibri"/>
               </a:rPr>
-              <a:t>Noise and intelligibility were not scored, so filter music and validate language before packaging.</a:t>
+              <a:t>Noise and intelligibility were not scored; take a human listening sample first.</a:t>
             </a:r>
           </a:p>
         </p:txBody>
@@ -24508,7 +24509,7 @@
                 </a:solidFill>
                 <a:latin typeface="Cambria"/>
               </a:rPr>
-              <a:t>Written text by language</a:t>
+              <a:t>Written text</a:t>
             </a:r>
           </a:p>
         </p:txBody>
@@ -24569,7 +24570,7 @@
                 </a:solidFill>
                 <a:latin typeface="Calibri"/>
               </a:rPr>
-              <a:t>NEWS SCRIPTS</a:t>
+              <a:t>NEWS SCRIPTS BY STATION</a:t>
             </a:r>
           </a:p>
         </p:txBody>
@@ -24604,7 +24605,7 @@
                 </a:solidFill>
                 <a:latin typeface="Cambria"/>
               </a:rPr>
-              <a:t>The news archive is substantial and spread across many stations, but not evenly</a:t>
+              <a:t>News script holdings are uneven across stations, so coverage differs by language</a:t>
             </a:r>
           </a:p>
         </p:txBody>
@@ -24657,7 +24658,7 @@
                 </a:solidFill>
                 <a:latin typeface="Calibri"/>
               </a:rPr>
-              <a:t>248841 live scripts come from 13 stations. Language is the station's broadcast language, since the script text was not read.</a:t>
+              <a:t>Holdings total 248841 scripts from 13 stations; the language shown is the station's broadcast language, not a reading of each script.</a:t>
             </a:r>
           </a:p>
         </p:txBody>
@@ -24858,7 +24859,7 @@
                 </a:solidFill>
                 <a:latin typeface="Calibri"/>
               </a:rPr>
-              <a:t>BULLETIN COVERAGE</a:t>
+              <a:t>BULLETIN-HOUR COVERAGE</a:t>
             </a:r>
           </a:p>
         </p:txBody>
@@ -24893,7 +24894,7 @@
                 </a:solidFill>
                 <a:latin typeface="Cambria"/>
               </a:rPr>
-              <a:t>No station averages a full day of bulletin hours on the days it has scripts</a:t>
+              <a:t>Even on scripted days, no station averages a full day of bulletin hours</a:t>
             </a:r>
           </a:p>
         </p:txBody>
@@ -24946,7 +24947,7 @@
                 </a:solidFill>
                 <a:latin typeface="Calibri"/>
               </a:rPr>
-              <a:t>The measure counts distinct scripted hour slots on scripted days, not continuous coverage or broadcast duration.</a:t>
+              <a:t>Scripts exist on only 226 dates across 1432 days (15.8%), so coverage cannot be assumed continuous; the day-level tables show exactly which hours exist.</a:t>
             </a:r>
           </a:p>
         </p:txBody>
@@ -25147,7 +25148,7 @@
                 </a:solidFill>
                 <a:latin typeface="Calibri"/>
               </a:rPr>
-              <a:t>WRITTEN TEXT</a:t>
+              <a:t>THREE SEPARATE TEXT INVENTORIES</a:t>
             </a:r>
           </a:p>
         </p:txBody>
@@ -25182,7 +25183,7 @@
                 </a:solidFill>
                 <a:latin typeface="Cambria"/>
               </a:rPr>
-              <a:t>Three separate text inventories exist and should be prepared separately, not added together</a:t>
+              <a:t>News scripts, transcripts and the workbench are separate inventories, never added together</a:t>
             </a:r>
           </a:p>
         </p:txBody>
@@ -25252,7 +25253,7 @@
                 </a:solidFill>
                 <a:latin typeface="Calibri"/>
               </a:rPr>
-              <a:t>The news archive holds 248841 live scripts from 13 stations on 226 dates across 1432 days, which is 15.8% of days.</a:t>
+              <a:t>News scripts: 248841 live scripts from 13 stations, on 226 dates across 1432 days (15.8%).</a:t>
             </a:r>
           </a:p>
         </p:txBody>
@@ -25357,7 +25358,7 @@
                 </a:solidFill>
                 <a:latin typeface="Calibri"/>
               </a:rPr>
-              <a:t>38.0% of script rows are revisions, leaving 159100 distinct texts (63.9% of live rows). 10206 rows are marked deleted.</a:t>
+              <a:t>38.0% of script rows are revisions; 159100 distinct texts remain (63.9%). Deduplicate before use.</a:t>
             </a:r>
           </a:p>
         </p:txBody>
@@ -25462,7 +25463,7 @@
                 </a:solidFill>
                 <a:latin typeface="Calibri"/>
               </a:rPr>
-              <a:t>The text model read 399 transcripts; 99.6% of passages agree with the folder language. 3540 transcripts were not reached.</a:t>
+              <a:t>The text model read 2245 transcripts; 99.4% of passages match the folder language; 1694 were not reached.</a:t>
             </a:r>
           </a:p>
         </p:txBody>
@@ -25567,7 +25568,7 @@
                 </a:solidFill>
                 <a:latin typeface="Calibri"/>
               </a:rPr>
-              <a:t>The workbench registers 83014 recordings and 12,290.6 hours. It may overlap the staged corpus, so the two are not added.</a:t>
+              <a:t>The workbench registers 83014 recordings and 12,290.6 hours, and may overlap the staged corpus.</a:t>
             </a:r>
           </a:p>
         </p:txBody>
@@ -29030,7 +29031,7 @@
         </p:nvGraphicFramePr>
         <p:xfrm>
           <a:off x="594360" y="1920240"/>
-          <a:ext cx="11002971" cy="768096"/>
+          <a:ext cx="11002971" cy="3017520"/>
         </p:xfrm>
         <a:graphic>
           <a:graphicData uri="http://schemas.openxmlformats.org/drawingml/2006/table">
@@ -29046,7 +29047,7 @@
                 <a:gridCol w="1850967"/>
                 <a:gridCol w="2982114"/>
               </a:tblGrid>
-              <a:tr h="384048">
+              <a:tr h="377190">
                 <a:tc>
                   <a:txBody>
                     <a:bodyPr wrap="square"/>
@@ -29054,7 +29055,7 @@
                     <a:p>
                       <a:pPr algn="l"/>
                       <a:r>
-                        <a:rPr sz="1200" b="1">
+                        <a:rPr sz="1100" b="1">
                           <a:solidFill>
                             <a:srgbClr val="14324A"/>
                           </a:solidFill>
@@ -29077,7 +29078,7 @@
                     <a:p>
                       <a:pPr algn="l"/>
                       <a:r>
-                        <a:rPr sz="1200" b="1">
+                        <a:rPr sz="1100" b="1">
                           <a:solidFill>
                             <a:srgbClr val="14324A"/>
                           </a:solidFill>
@@ -29100,7 +29101,7 @@
                     <a:p>
                       <a:pPr algn="l"/>
                       <a:r>
-                        <a:rPr sz="1200" b="1">
+                        <a:rPr sz="1100" b="1">
                           <a:solidFill>
                             <a:srgbClr val="14324A"/>
                           </a:solidFill>
@@ -29123,7 +29124,7 @@
                     <a:p>
                       <a:pPr algn="l"/>
                       <a:r>
-                        <a:rPr sz="1200" b="1">
+                        <a:rPr sz="1100" b="1">
                           <a:solidFill>
                             <a:srgbClr val="14324A"/>
                           </a:solidFill>
@@ -29146,7 +29147,7 @@
                     <a:p>
                       <a:pPr algn="l"/>
                       <a:r>
-                        <a:rPr sz="1200" b="1">
+                        <a:rPr sz="1100" b="1">
                           <a:solidFill>
                             <a:srgbClr val="14324A"/>
                           </a:solidFill>
@@ -29169,7 +29170,7 @@
                     <a:p>
                       <a:pPr algn="l"/>
                       <a:r>
-                        <a:rPr sz="1200" b="1">
+                        <a:rPr sz="1100" b="1">
                           <a:solidFill>
                             <a:srgbClr val="14324A"/>
                           </a:solidFill>
@@ -29186,7 +29187,7 @@
                   </a:tcPr>
                 </a:tc>
               </a:tr>
-              <a:tr h="384048">
+              <a:tr h="377190">
                 <a:tc>
                   <a:txBody>
                     <a:bodyPr wrap="square"/>
@@ -29194,7 +29195,7 @@
                     <a:p>
                       <a:pPr algn="l"/>
                       <a:r>
-                        <a:rPr sz="1200" b="0">
+                        <a:rPr sz="1100" b="0">
                           <a:solidFill>
                             <a:srgbClr val="14324A"/>
                           </a:solidFill>
@@ -29217,13 +29218,13 @@
                     <a:p>
                       <a:pPr algn="r"/>
                       <a:r>
-                        <a:rPr sz="1200" b="0">
+                        <a:rPr sz="1100" b="0">
                           <a:solidFill>
                             <a:srgbClr val="14324A"/>
                           </a:solidFill>
                           <a:latin typeface="Courier New"/>
                         </a:rPr>
-                        <a:t>399</a:t>
+                        <a:t>698</a:t>
                       </a:r>
                     </a:p>
                   </a:txBody>
@@ -29240,13 +29241,13 @@
                     <a:p>
                       <a:pPr algn="r"/>
                       <a:r>
-                        <a:rPr sz="1200" b="0">
+                        <a:rPr sz="1100" b="0">
                           <a:solidFill>
                             <a:srgbClr val="14324A"/>
                           </a:solidFill>
                           <a:latin typeface="Courier New"/>
                         </a:rPr>
-                        <a:t>2694168</a:t>
+                        <a:t>4474462</a:t>
                       </a:r>
                     </a:p>
                   </a:txBody>
@@ -29263,13 +29264,13 @@
                     <a:p>
                       <a:pPr algn="r"/>
                       <a:r>
-                        <a:rPr sz="1200" b="0">
+                        <a:rPr sz="1100" b="0">
                           <a:solidFill>
                             <a:srgbClr val="14324A"/>
                           </a:solidFill>
                           <a:latin typeface="Courier New"/>
                         </a:rPr>
-                        <a:t>385453</a:t>
+                        <a:t>638478</a:t>
                       </a:r>
                     </a:p>
                   </a:txBody>
@@ -29286,7 +29287,7 @@
                     <a:p>
                       <a:pPr algn="r"/>
                       <a:r>
-                        <a:rPr sz="1200" b="0">
+                        <a:rPr sz="1100" b="0">
                           <a:solidFill>
                             <a:srgbClr val="14324A"/>
                           </a:solidFill>
@@ -29309,13 +29310,853 @@
                     <a:p>
                       <a:pPr algn="r"/>
                       <a:r>
-                        <a:rPr sz="1200" b="0">
+                        <a:rPr sz="1100" b="0">
                           <a:solidFill>
                             <a:srgbClr val="14324A"/>
                           </a:solidFill>
                           <a:latin typeface="Courier New"/>
                         </a:rPr>
-                        <a:t>399</a:t>
+                        <a:t>697</a:t>
+                      </a:r>
+                    </a:p>
+                  </a:txBody>
+                  <a:tcPr marL="54864" marR="54864" marT="27432" marB="27432">
+                    <a:solidFill>
+                      <a:srgbClr val="FFFFFF"/>
+                    </a:solidFill>
+                  </a:tcPr>
+                </a:tc>
+              </a:tr>
+              <a:tr h="377190">
+                <a:tc>
+                  <a:txBody>
+                    <a:bodyPr wrap="square"/>
+                    <a:lstStyle/>
+                    <a:p>
+                      <a:pPr algn="l"/>
+                      <a:r>
+                        <a:rPr sz="1100" b="0">
+                          <a:solidFill>
+                            <a:srgbClr val="14324A"/>
+                          </a:solidFill>
+                          <a:latin typeface="Calibri"/>
+                        </a:rPr>
+                        <a:t>Gikuyu (Kikuyu)</a:t>
+                      </a:r>
+                    </a:p>
+                  </a:txBody>
+                  <a:tcPr marL="54864" marR="54864" marT="27432" marB="27432">
+                    <a:solidFill>
+                      <a:srgbClr val="FFFFFF"/>
+                    </a:solidFill>
+                  </a:tcPr>
+                </a:tc>
+                <a:tc>
+                  <a:txBody>
+                    <a:bodyPr wrap="square"/>
+                    <a:lstStyle/>
+                    <a:p>
+                      <a:pPr algn="r"/>
+                      <a:r>
+                        <a:rPr sz="1100" b="0">
+                          <a:solidFill>
+                            <a:srgbClr val="14324A"/>
+                          </a:solidFill>
+                          <a:latin typeface="Courier New"/>
+                        </a:rPr>
+                        <a:t>298</a:t>
+                      </a:r>
+                    </a:p>
+                  </a:txBody>
+                  <a:tcPr marL="54864" marR="54864" marT="27432" marB="27432">
+                    <a:solidFill>
+                      <a:srgbClr val="FFFFFF"/>
+                    </a:solidFill>
+                  </a:tcPr>
+                </a:tc>
+                <a:tc>
+                  <a:txBody>
+                    <a:bodyPr wrap="square"/>
+                    <a:lstStyle/>
+                    <a:p>
+                      <a:pPr algn="r"/>
+                      <a:r>
+                        <a:rPr sz="1100" b="0">
+                          <a:solidFill>
+                            <a:srgbClr val="14324A"/>
+                          </a:solidFill>
+                          <a:latin typeface="Courier New"/>
+                        </a:rPr>
+                        <a:t>1767236</a:t>
+                      </a:r>
+                    </a:p>
+                  </a:txBody>
+                  <a:tcPr marL="54864" marR="54864" marT="27432" marB="27432">
+                    <a:solidFill>
+                      <a:srgbClr val="FFFFFF"/>
+                    </a:solidFill>
+                  </a:tcPr>
+                </a:tc>
+                <a:tc>
+                  <a:txBody>
+                    <a:bodyPr wrap="square"/>
+                    <a:lstStyle/>
+                    <a:p>
+                      <a:pPr algn="r"/>
+                      <a:r>
+                        <a:rPr sz="1100" b="0">
+                          <a:solidFill>
+                            <a:srgbClr val="14324A"/>
+                          </a:solidFill>
+                          <a:latin typeface="Courier New"/>
+                        </a:rPr>
+                        <a:t>272741</a:t>
+                      </a:r>
+                    </a:p>
+                  </a:txBody>
+                  <a:tcPr marL="54864" marR="54864" marT="27432" marB="27432">
+                    <a:solidFill>
+                      <a:srgbClr val="FFFFFF"/>
+                    </a:solidFill>
+                  </a:tcPr>
+                </a:tc>
+                <a:tc>
+                  <a:txBody>
+                    <a:bodyPr wrap="square"/>
+                    <a:lstStyle/>
+                    <a:p>
+                      <a:pPr algn="r"/>
+                      <a:r>
+                        <a:rPr sz="1100" b="0">
+                          <a:solidFill>
+                            <a:srgbClr val="14324A"/>
+                          </a:solidFill>
+                          <a:latin typeface="Courier New"/>
+                        </a:rPr>
+                        <a:t>99.3%</a:t>
+                      </a:r>
+                    </a:p>
+                  </a:txBody>
+                  <a:tcPr marL="54864" marR="54864" marT="27432" marB="27432">
+                    <a:solidFill>
+                      <a:srgbClr val="FFFFFF"/>
+                    </a:solidFill>
+                  </a:tcPr>
+                </a:tc>
+                <a:tc>
+                  <a:txBody>
+                    <a:bodyPr wrap="square"/>
+                    <a:lstStyle/>
+                    <a:p>
+                      <a:pPr algn="r"/>
+                      <a:r>
+                        <a:rPr sz="1100" b="0">
+                          <a:solidFill>
+                            <a:srgbClr val="14324A"/>
+                          </a:solidFill>
+                          <a:latin typeface="Courier New"/>
+                        </a:rPr>
+                        <a:t>296</a:t>
+                      </a:r>
+                    </a:p>
+                  </a:txBody>
+                  <a:tcPr marL="54864" marR="54864" marT="27432" marB="27432">
+                    <a:solidFill>
+                      <a:srgbClr val="FFFFFF"/>
+                    </a:solidFill>
+                  </a:tcPr>
+                </a:tc>
+              </a:tr>
+              <a:tr h="377190">
+                <a:tc>
+                  <a:txBody>
+                    <a:bodyPr wrap="square"/>
+                    <a:lstStyle/>
+                    <a:p>
+                      <a:pPr algn="l"/>
+                      <a:r>
+                        <a:rPr sz="1100" b="0">
+                          <a:solidFill>
+                            <a:srgbClr val="14324A"/>
+                          </a:solidFill>
+                          <a:latin typeface="Calibri"/>
+                        </a:rPr>
+                        <a:t>Dholuo (Luo)</a:t>
+                      </a:r>
+                    </a:p>
+                  </a:txBody>
+                  <a:tcPr marL="54864" marR="54864" marT="27432" marB="27432">
+                    <a:solidFill>
+                      <a:srgbClr val="FFFFFF"/>
+                    </a:solidFill>
+                  </a:tcPr>
+                </a:tc>
+                <a:tc>
+                  <a:txBody>
+                    <a:bodyPr wrap="square"/>
+                    <a:lstStyle/>
+                    <a:p>
+                      <a:pPr algn="r"/>
+                      <a:r>
+                        <a:rPr sz="1100" b="0">
+                          <a:solidFill>
+                            <a:srgbClr val="14324A"/>
+                          </a:solidFill>
+                          <a:latin typeface="Courier New"/>
+                        </a:rPr>
+                        <a:t>298</a:t>
+                      </a:r>
+                    </a:p>
+                  </a:txBody>
+                  <a:tcPr marL="54864" marR="54864" marT="27432" marB="27432">
+                    <a:solidFill>
+                      <a:srgbClr val="FFFFFF"/>
+                    </a:solidFill>
+                  </a:tcPr>
+                </a:tc>
+                <a:tc>
+                  <a:txBody>
+                    <a:bodyPr wrap="square"/>
+                    <a:lstStyle/>
+                    <a:p>
+                      <a:pPr algn="r"/>
+                      <a:r>
+                        <a:rPr sz="1100" b="0">
+                          <a:solidFill>
+                            <a:srgbClr val="14324A"/>
+                          </a:solidFill>
+                          <a:latin typeface="Courier New"/>
+                        </a:rPr>
+                        <a:t>2347383</a:t>
+                      </a:r>
+                    </a:p>
+                  </a:txBody>
+                  <a:tcPr marL="54864" marR="54864" marT="27432" marB="27432">
+                    <a:solidFill>
+                      <a:srgbClr val="FFFFFF"/>
+                    </a:solidFill>
+                  </a:tcPr>
+                </a:tc>
+                <a:tc>
+                  <a:txBody>
+                    <a:bodyPr wrap="square"/>
+                    <a:lstStyle/>
+                    <a:p>
+                      <a:pPr algn="r"/>
+                      <a:r>
+                        <a:rPr sz="1100" b="0">
+                          <a:solidFill>
+                            <a:srgbClr val="14324A"/>
+                          </a:solidFill>
+                          <a:latin typeface="Courier New"/>
+                        </a:rPr>
+                        <a:t>417575</a:t>
+                      </a:r>
+                    </a:p>
+                  </a:txBody>
+                  <a:tcPr marL="54864" marR="54864" marT="27432" marB="27432">
+                    <a:solidFill>
+                      <a:srgbClr val="FFFFFF"/>
+                    </a:solidFill>
+                  </a:tcPr>
+                </a:tc>
+                <a:tc>
+                  <a:txBody>
+                    <a:bodyPr wrap="square"/>
+                    <a:lstStyle/>
+                    <a:p>
+                      <a:pPr algn="r"/>
+                      <a:r>
+                        <a:rPr sz="1100" b="0">
+                          <a:solidFill>
+                            <a:srgbClr val="14324A"/>
+                          </a:solidFill>
+                          <a:latin typeface="Courier New"/>
+                        </a:rPr>
+                        <a:t>99.9%</a:t>
+                      </a:r>
+                    </a:p>
+                  </a:txBody>
+                  <a:tcPr marL="54864" marR="54864" marT="27432" marB="27432">
+                    <a:solidFill>
+                      <a:srgbClr val="FFFFFF"/>
+                    </a:solidFill>
+                  </a:tcPr>
+                </a:tc>
+                <a:tc>
+                  <a:txBody>
+                    <a:bodyPr wrap="square"/>
+                    <a:lstStyle/>
+                    <a:p>
+                      <a:pPr algn="r"/>
+                      <a:r>
+                        <a:rPr sz="1100" b="0">
+                          <a:solidFill>
+                            <a:srgbClr val="14324A"/>
+                          </a:solidFill>
+                          <a:latin typeface="Courier New"/>
+                        </a:rPr>
+                        <a:t>298</a:t>
+                      </a:r>
+                    </a:p>
+                  </a:txBody>
+                  <a:tcPr marL="54864" marR="54864" marT="27432" marB="27432">
+                    <a:solidFill>
+                      <a:srgbClr val="FFFFFF"/>
+                    </a:solidFill>
+                  </a:tcPr>
+                </a:tc>
+              </a:tr>
+              <a:tr h="377190">
+                <a:tc>
+                  <a:txBody>
+                    <a:bodyPr wrap="square"/>
+                    <a:lstStyle/>
+                    <a:p>
+                      <a:pPr algn="l"/>
+                      <a:r>
+                        <a:rPr sz="1100" b="0">
+                          <a:solidFill>
+                            <a:srgbClr val="14324A"/>
+                          </a:solidFill>
+                          <a:latin typeface="Calibri"/>
+                        </a:rPr>
+                        <a:t>Kiswahili</a:t>
+                      </a:r>
+                    </a:p>
+                  </a:txBody>
+                  <a:tcPr marL="54864" marR="54864" marT="27432" marB="27432">
+                    <a:solidFill>
+                      <a:srgbClr val="FFFFFF"/>
+                    </a:solidFill>
+                  </a:tcPr>
+                </a:tc>
+                <a:tc>
+                  <a:txBody>
+                    <a:bodyPr wrap="square"/>
+                    <a:lstStyle/>
+                    <a:p>
+                      <a:pPr algn="r"/>
+                      <a:r>
+                        <a:rPr sz="1100" b="0">
+                          <a:solidFill>
+                            <a:srgbClr val="14324A"/>
+                          </a:solidFill>
+                          <a:latin typeface="Courier New"/>
+                        </a:rPr>
+                        <a:t>298</a:t>
+                      </a:r>
+                    </a:p>
+                  </a:txBody>
+                  <a:tcPr marL="54864" marR="54864" marT="27432" marB="27432">
+                    <a:solidFill>
+                      <a:srgbClr val="FFFFFF"/>
+                    </a:solidFill>
+                  </a:tcPr>
+                </a:tc>
+                <a:tc>
+                  <a:txBody>
+                    <a:bodyPr wrap="square"/>
+                    <a:lstStyle/>
+                    <a:p>
+                      <a:pPr algn="r"/>
+                      <a:r>
+                        <a:rPr sz="1100" b="0">
+                          <a:solidFill>
+                            <a:srgbClr val="14324A"/>
+                          </a:solidFill>
+                          <a:latin typeface="Courier New"/>
+                        </a:rPr>
+                        <a:t>2599230</a:t>
+                      </a:r>
+                    </a:p>
+                  </a:txBody>
+                  <a:tcPr marL="54864" marR="54864" marT="27432" marB="27432">
+                    <a:solidFill>
+                      <a:srgbClr val="FFFFFF"/>
+                    </a:solidFill>
+                  </a:tcPr>
+                </a:tc>
+                <a:tc>
+                  <a:txBody>
+                    <a:bodyPr wrap="square"/>
+                    <a:lstStyle/>
+                    <a:p>
+                      <a:pPr algn="r"/>
+                      <a:r>
+                        <a:rPr sz="1100" b="0">
+                          <a:solidFill>
+                            <a:srgbClr val="14324A"/>
+                          </a:solidFill>
+                          <a:latin typeface="Courier New"/>
+                        </a:rPr>
+                        <a:t>411682</a:t>
+                      </a:r>
+                    </a:p>
+                  </a:txBody>
+                  <a:tcPr marL="54864" marR="54864" marT="27432" marB="27432">
+                    <a:solidFill>
+                      <a:srgbClr val="FFFFFF"/>
+                    </a:solidFill>
+                  </a:tcPr>
+                </a:tc>
+                <a:tc>
+                  <a:txBody>
+                    <a:bodyPr wrap="square"/>
+                    <a:lstStyle/>
+                    <a:p>
+                      <a:pPr algn="r"/>
+                      <a:r>
+                        <a:rPr sz="1100" b="0">
+                          <a:solidFill>
+                            <a:srgbClr val="14324A"/>
+                          </a:solidFill>
+                          <a:latin typeface="Courier New"/>
+                        </a:rPr>
+                        <a:t>99.6%</a:t>
+                      </a:r>
+                    </a:p>
+                  </a:txBody>
+                  <a:tcPr marL="54864" marR="54864" marT="27432" marB="27432">
+                    <a:solidFill>
+                      <a:srgbClr val="FFFFFF"/>
+                    </a:solidFill>
+                  </a:tcPr>
+                </a:tc>
+                <a:tc>
+                  <a:txBody>
+                    <a:bodyPr wrap="square"/>
+                    <a:lstStyle/>
+                    <a:p>
+                      <a:pPr algn="r"/>
+                      <a:r>
+                        <a:rPr sz="1100" b="0">
+                          <a:solidFill>
+                            <a:srgbClr val="14324A"/>
+                          </a:solidFill>
+                          <a:latin typeface="Courier New"/>
+                        </a:rPr>
+                        <a:t>298</a:t>
+                      </a:r>
+                    </a:p>
+                  </a:txBody>
+                  <a:tcPr marL="54864" marR="54864" marT="27432" marB="27432">
+                    <a:solidFill>
+                      <a:srgbClr val="FFFFFF"/>
+                    </a:solidFill>
+                  </a:tcPr>
+                </a:tc>
+              </a:tr>
+              <a:tr h="377190">
+                <a:tc>
+                  <a:txBody>
+                    <a:bodyPr wrap="square"/>
+                    <a:lstStyle/>
+                    <a:p>
+                      <a:pPr algn="l"/>
+                      <a:r>
+                        <a:rPr sz="1100" b="0">
+                          <a:solidFill>
+                            <a:srgbClr val="14324A"/>
+                          </a:solidFill>
+                          <a:latin typeface="Calibri"/>
+                        </a:rPr>
+                        <a:t>Kikamba (Kamba)</a:t>
+                      </a:r>
+                    </a:p>
+                  </a:txBody>
+                  <a:tcPr marL="54864" marR="54864" marT="27432" marB="27432">
+                    <a:solidFill>
+                      <a:srgbClr val="FFFFFF"/>
+                    </a:solidFill>
+                  </a:tcPr>
+                </a:tc>
+                <a:tc>
+                  <a:txBody>
+                    <a:bodyPr wrap="square"/>
+                    <a:lstStyle/>
+                    <a:p>
+                      <a:pPr algn="r"/>
+                      <a:r>
+                        <a:rPr sz="1100" b="0">
+                          <a:solidFill>
+                            <a:srgbClr val="14324A"/>
+                          </a:solidFill>
+                          <a:latin typeface="Courier New"/>
+                        </a:rPr>
+                        <a:t>298</a:t>
+                      </a:r>
+                    </a:p>
+                  </a:txBody>
+                  <a:tcPr marL="54864" marR="54864" marT="27432" marB="27432">
+                    <a:solidFill>
+                      <a:srgbClr val="FFFFFF"/>
+                    </a:solidFill>
+                  </a:tcPr>
+                </a:tc>
+                <a:tc>
+                  <a:txBody>
+                    <a:bodyPr wrap="square"/>
+                    <a:lstStyle/>
+                    <a:p>
+                      <a:pPr algn="r"/>
+                      <a:r>
+                        <a:rPr sz="1100" b="0">
+                          <a:solidFill>
+                            <a:srgbClr val="14324A"/>
+                          </a:solidFill>
+                          <a:latin typeface="Courier New"/>
+                        </a:rPr>
+                        <a:t>1058430</a:t>
+                      </a:r>
+                    </a:p>
+                  </a:txBody>
+                  <a:tcPr marL="54864" marR="54864" marT="27432" marB="27432">
+                    <a:solidFill>
+                      <a:srgbClr val="FFFFFF"/>
+                    </a:solidFill>
+                  </a:tcPr>
+                </a:tc>
+                <a:tc>
+                  <a:txBody>
+                    <a:bodyPr wrap="square"/>
+                    <a:lstStyle/>
+                    <a:p>
+                      <a:pPr algn="r"/>
+                      <a:r>
+                        <a:rPr sz="1100" b="0">
+                          <a:solidFill>
+                            <a:srgbClr val="14324A"/>
+                          </a:solidFill>
+                          <a:latin typeface="Courier New"/>
+                        </a:rPr>
+                        <a:t>173388</a:t>
+                      </a:r>
+                    </a:p>
+                  </a:txBody>
+                  <a:tcPr marL="54864" marR="54864" marT="27432" marB="27432">
+                    <a:solidFill>
+                      <a:srgbClr val="FFFFFF"/>
+                    </a:solidFill>
+                  </a:tcPr>
+                </a:tc>
+                <a:tc>
+                  <a:txBody>
+                    <a:bodyPr wrap="square"/>
+                    <a:lstStyle/>
+                    <a:p>
+                      <a:pPr algn="r"/>
+                      <a:r>
+                        <a:rPr sz="1100" b="0">
+                          <a:solidFill>
+                            <a:srgbClr val="14324A"/>
+                          </a:solidFill>
+                          <a:latin typeface="Courier New"/>
+                        </a:rPr>
+                        <a:t>99.7%</a:t>
+                      </a:r>
+                    </a:p>
+                  </a:txBody>
+                  <a:tcPr marL="54864" marR="54864" marT="27432" marB="27432">
+                    <a:solidFill>
+                      <a:srgbClr val="FFFFFF"/>
+                    </a:solidFill>
+                  </a:tcPr>
+                </a:tc>
+                <a:tc>
+                  <a:txBody>
+                    <a:bodyPr wrap="square"/>
+                    <a:lstStyle/>
+                    <a:p>
+                      <a:pPr algn="r"/>
+                      <a:r>
+                        <a:rPr sz="1100" b="0">
+                          <a:solidFill>
+                            <a:srgbClr val="14324A"/>
+                          </a:solidFill>
+                          <a:latin typeface="Courier New"/>
+                        </a:rPr>
+                        <a:t>298</a:t>
+                      </a:r>
+                    </a:p>
+                  </a:txBody>
+                  <a:tcPr marL="54864" marR="54864" marT="27432" marB="27432">
+                    <a:solidFill>
+                      <a:srgbClr val="FFFFFF"/>
+                    </a:solidFill>
+                  </a:tcPr>
+                </a:tc>
+              </a:tr>
+              <a:tr h="377190">
+                <a:tc>
+                  <a:txBody>
+                    <a:bodyPr wrap="square"/>
+                    <a:lstStyle/>
+                    <a:p>
+                      <a:pPr algn="l"/>
+                      <a:r>
+                        <a:rPr sz="1100" b="0">
+                          <a:solidFill>
+                            <a:srgbClr val="14324A"/>
+                          </a:solidFill>
+                          <a:latin typeface="Calibri"/>
+                        </a:rPr>
+                        <a:t>Kalenjin</a:t>
+                      </a:r>
+                    </a:p>
+                  </a:txBody>
+                  <a:tcPr marL="54864" marR="54864" marT="27432" marB="27432">
+                    <a:solidFill>
+                      <a:srgbClr val="FFFFFF"/>
+                    </a:solidFill>
+                  </a:tcPr>
+                </a:tc>
+                <a:tc>
+                  <a:txBody>
+                    <a:bodyPr wrap="square"/>
+                    <a:lstStyle/>
+                    <a:p>
+                      <a:pPr algn="r"/>
+                      <a:r>
+                        <a:rPr sz="1100" b="0">
+                          <a:solidFill>
+                            <a:srgbClr val="14324A"/>
+                          </a:solidFill>
+                          <a:latin typeface="Courier New"/>
+                        </a:rPr>
+                        <a:t>295</a:t>
+                      </a:r>
+                    </a:p>
+                  </a:txBody>
+                  <a:tcPr marL="54864" marR="54864" marT="27432" marB="27432">
+                    <a:solidFill>
+                      <a:srgbClr val="FFFFFF"/>
+                    </a:solidFill>
+                  </a:tcPr>
+                </a:tc>
+                <a:tc>
+                  <a:txBody>
+                    <a:bodyPr wrap="square"/>
+                    <a:lstStyle/>
+                    <a:p>
+                      <a:pPr algn="r"/>
+                      <a:r>
+                        <a:rPr sz="1100" b="0">
+                          <a:solidFill>
+                            <a:srgbClr val="14324A"/>
+                          </a:solidFill>
+                          <a:latin typeface="Courier New"/>
+                        </a:rPr>
+                        <a:t>4674494</a:t>
+                      </a:r>
+                    </a:p>
+                  </a:txBody>
+                  <a:tcPr marL="54864" marR="54864" marT="27432" marB="27432">
+                    <a:solidFill>
+                      <a:srgbClr val="FFFFFF"/>
+                    </a:solidFill>
+                  </a:tcPr>
+                </a:tc>
+                <a:tc>
+                  <a:txBody>
+                    <a:bodyPr wrap="square"/>
+                    <a:lstStyle/>
+                    <a:p>
+                      <a:pPr algn="r"/>
+                      <a:r>
+                        <a:rPr sz="1100" b="0">
+                          <a:solidFill>
+                            <a:srgbClr val="14324A"/>
+                          </a:solidFill>
+                          <a:latin typeface="Courier New"/>
+                        </a:rPr>
+                        <a:t>747249</a:t>
+                      </a:r>
+                    </a:p>
+                  </a:txBody>
+                  <a:tcPr marL="54864" marR="54864" marT="27432" marB="27432">
+                    <a:solidFill>
+                      <a:srgbClr val="FFFFFF"/>
+                    </a:solidFill>
+                  </a:tcPr>
+                </a:tc>
+                <a:tc>
+                  <a:txBody>
+                    <a:bodyPr wrap="square"/>
+                    <a:lstStyle/>
+                    <a:p>
+                      <a:pPr algn="r"/>
+                      <a:r>
+                        <a:rPr sz="1100" b="0">
+                          <a:solidFill>
+                            <a:srgbClr val="14324A"/>
+                          </a:solidFill>
+                          <a:latin typeface="Courier New"/>
+                        </a:rPr>
+                        <a:t>99.0%</a:t>
+                      </a:r>
+                    </a:p>
+                  </a:txBody>
+                  <a:tcPr marL="54864" marR="54864" marT="27432" marB="27432">
+                    <a:solidFill>
+                      <a:srgbClr val="FFFFFF"/>
+                    </a:solidFill>
+                  </a:tcPr>
+                </a:tc>
+                <a:tc>
+                  <a:txBody>
+                    <a:bodyPr wrap="square"/>
+                    <a:lstStyle/>
+                    <a:p>
+                      <a:pPr algn="r"/>
+                      <a:r>
+                        <a:rPr sz="1100" b="0">
+                          <a:solidFill>
+                            <a:srgbClr val="14324A"/>
+                          </a:solidFill>
+                          <a:latin typeface="Courier New"/>
+                        </a:rPr>
+                        <a:t>290</a:t>
+                      </a:r>
+                    </a:p>
+                  </a:txBody>
+                  <a:tcPr marL="54864" marR="54864" marT="27432" marB="27432">
+                    <a:solidFill>
+                      <a:srgbClr val="FFFFFF"/>
+                    </a:solidFill>
+                  </a:tcPr>
+                </a:tc>
+              </a:tr>
+              <a:tr h="377190">
+                <a:tc>
+                  <a:txBody>
+                    <a:bodyPr wrap="square"/>
+                    <a:lstStyle/>
+                    <a:p>
+                      <a:pPr algn="l"/>
+                      <a:r>
+                        <a:rPr sz="1100" b="0">
+                          <a:solidFill>
+                            <a:srgbClr val="14324A"/>
+                          </a:solidFill>
+                          <a:latin typeface="Calibri"/>
+                        </a:rPr>
+                        <a:t>Wanga (Luhya)</a:t>
+                      </a:r>
+                    </a:p>
+                  </a:txBody>
+                  <a:tcPr marL="54864" marR="54864" marT="27432" marB="27432">
+                    <a:solidFill>
+                      <a:srgbClr val="FFFFFF"/>
+                    </a:solidFill>
+                  </a:tcPr>
+                </a:tc>
+                <a:tc>
+                  <a:txBody>
+                    <a:bodyPr wrap="square"/>
+                    <a:lstStyle/>
+                    <a:p>
+                      <a:pPr algn="r"/>
+                      <a:r>
+                        <a:rPr sz="1100" b="0">
+                          <a:solidFill>
+                            <a:srgbClr val="14324A"/>
+                          </a:solidFill>
+                          <a:latin typeface="Courier New"/>
+                        </a:rPr>
+                        <a:t>60</a:t>
+                      </a:r>
+                    </a:p>
+                  </a:txBody>
+                  <a:tcPr marL="54864" marR="54864" marT="27432" marB="27432">
+                    <a:solidFill>
+                      <a:srgbClr val="FFFFFF"/>
+                    </a:solidFill>
+                  </a:tcPr>
+                </a:tc>
+                <a:tc>
+                  <a:txBody>
+                    <a:bodyPr wrap="square"/>
+                    <a:lstStyle/>
+                    <a:p>
+                      <a:pPr algn="r"/>
+                      <a:r>
+                        <a:rPr sz="1100" b="0">
+                          <a:solidFill>
+                            <a:srgbClr val="14324A"/>
+                          </a:solidFill>
+                          <a:latin typeface="Courier New"/>
+                        </a:rPr>
+                        <a:t>491139</a:t>
+                      </a:r>
+                    </a:p>
+                  </a:txBody>
+                  <a:tcPr marL="54864" marR="54864" marT="27432" marB="27432">
+                    <a:solidFill>
+                      <a:srgbClr val="FFFFFF"/>
+                    </a:solidFill>
+                  </a:tcPr>
+                </a:tc>
+                <a:tc>
+                  <a:txBody>
+                    <a:bodyPr wrap="square"/>
+                    <a:lstStyle/>
+                    <a:p>
+                      <a:pPr algn="r"/>
+                      <a:r>
+                        <a:rPr sz="1100" b="0">
+                          <a:solidFill>
+                            <a:srgbClr val="14324A"/>
+                          </a:solidFill>
+                          <a:latin typeface="Courier New"/>
+                        </a:rPr>
+                        <a:t>73194</a:t>
+                      </a:r>
+                    </a:p>
+                  </a:txBody>
+                  <a:tcPr marL="54864" marR="54864" marT="27432" marB="27432">
+                    <a:solidFill>
+                      <a:srgbClr val="FFFFFF"/>
+                    </a:solidFill>
+                  </a:tcPr>
+                </a:tc>
+                <a:tc>
+                  <a:txBody>
+                    <a:bodyPr wrap="square"/>
+                    <a:lstStyle/>
+                    <a:p>
+                      <a:pPr algn="r"/>
+                      <a:r>
+                        <a:rPr sz="1100" b="0">
+                          <a:solidFill>
+                            <a:srgbClr val="14324A"/>
+                          </a:solidFill>
+                          <a:latin typeface="Courier New"/>
+                        </a:rPr>
+                        <a:t>98.3%</a:t>
+                      </a:r>
+                    </a:p>
+                  </a:txBody>
+                  <a:tcPr marL="54864" marR="54864" marT="27432" marB="27432">
+                    <a:solidFill>
+                      <a:srgbClr val="FFFFFF"/>
+                    </a:solidFill>
+                  </a:tcPr>
+                </a:tc>
+                <a:tc>
+                  <a:txBody>
+                    <a:bodyPr wrap="square"/>
+                    <a:lstStyle/>
+                    <a:p>
+                      <a:pPr algn="r"/>
+                      <a:r>
+                        <a:rPr sz="1100" b="0">
+                          <a:solidFill>
+                            <a:srgbClr val="14324A"/>
+                          </a:solidFill>
+                          <a:latin typeface="Courier New"/>
+                        </a:rPr>
+                        <a:t>59</a:t>
                       </a:r>
                     </a:p>
                   </a:txBody>
@@ -29395,7 +30236,7 @@
                 </a:solidFill>
                 <a:latin typeface="Courier New"/>
               </a:rPr>
-              <a:t>[measured]  Receipt R07: Served text language model m9j-74af7cef0a85 readings of the staged transcripts: jobs m9j-8cf6702f8718 (399 transcripts read, 3939 present)</a:t>
+              <a:t>[measured]  Receipt R07: Served text language model m9j-74af7cef0a85 readings of the staged transcripts: jobs m9j-2d43ed6cf567, m9j-8cf6702f8718 (2,245 transcripts read, 3939 present)</a:t>
             </a:r>
           </a:p>
         </p:txBody>
@@ -33829,7 +34670,7 @@
                 </a:solidFill>
                 <a:latin typeface="Cambria"/>
               </a:rPr>
-              <a:t>Data products to stand up first</a:t>
+              <a:t>First data products</a:t>
             </a:r>
           </a:p>
         </p:txBody>
@@ -33890,7 +34731,7 @@
                 </a:solidFill>
                 <a:latin typeface="Calibri"/>
               </a:rPr>
-              <a:t>PRODUCTS</a:t>
+              <a:t>PRODUCT SHORTLIST</a:t>
             </a:r>
           </a:p>
         </p:txBody>
@@ -33925,7 +34766,7 @@
                 </a:solidFill>
                 <a:latin typeface="Cambria"/>
               </a:rPr>
-              <a:t>Three of 8 candidates are the proposed first specifications, each needing preparation</a:t>
+              <a:t>Reference data and the content catalogue are the proposed first products</a:t>
             </a:r>
           </a:p>
         </p:txBody>
@@ -33995,7 +34836,7 @@
                 </a:solidFill>
                 <a:latin typeface="Calibri"/>
               </a:rPr>
-              <a:t>Reference and master-data licensing is graded C. First task: isolate canonical reference fields and check completeness.</a:t>
+              <a:t>The census scores 8 candidates on dimensional readiness only, which shows neither demand nor revenue.</a:t>
             </a:r>
           </a:p>
         </p:txBody>
@@ -34100,7 +34941,7 @@
                 </a:solidFill>
                 <a:latin typeface="Calibri"/>
               </a:rPr>
-              <a:t>The content catalogue and recommendation corpus is graded C. First task: reconcile catalogue entries and remove identifiers.</a:t>
+              <a:t>Proposed first: reference and master-data licensing, and the content catalogue corpus, each needing canonical keys, completeness checks and de-identification or aggregation.</a:t>
             </a:r>
           </a:p>
         </p:txBody>
@@ -34205,7 +35046,7 @@
                 </a:solidFill>
                 <a:latin typeface="Calibri"/>
               </a:rPr>
-              <a:t>Channel and telco engagement analytics is graded C. First task: aggregate by channel and time, then validate the metrics.</a:t>
+              <a:t>If a buyer leads, aggregated channel engagement analytics is the alternative; the order is a planning judgement needing buyer-side review.</a:t>
             </a:r>
           </a:p>
         </p:txBody>
@@ -34310,7 +35151,7 @@
                 </a:solidFill>
                 <a:latin typeface="Calibri"/>
               </a:rPr>
-              <a:t>This shortlist is a recommendation, not a measured commercial ranking. Each needs a buyer-side fit review; no revenue is implied.</a:t>
+              <a:t>Subscriber segmentation, geospatial and civic panels need cleansing first. Rights are settled and are not a gate.</a:t>
             </a:r>
           </a:p>
         </p:txBody>
@@ -34607,7 +35448,7 @@
                 </a:solidFill>
                 <a:latin typeface="Calibri"/>
               </a:rPr>
-              <a:t>DECISIONS</a:t>
+              <a:t>WHAT THE EXECUTIVE DECIDES</a:t>
             </a:r>
           </a:p>
         </p:txBody>
@@ -34642,7 +35483,7 @@
                 </a:solidFill>
                 <a:latin typeface="Cambria"/>
               </a:rPr>
-              <a:t>Ten decisions are requested, each resting on named evidence and none yet executed</a:t>
+              <a:t>The executive is asked to approve verification and preparation, not migration or deletion</a:t>
             </a:r>
           </a:p>
         </p:txBody>
@@ -34712,7 +35553,7 @@
                 </a:solidFill>
                 <a:latin typeface="Calibri"/>
               </a:rPr>
-              <a:t>Approve validation of tiering for 41.9 TiB of write-inactive object bytes. The benefit is bounded by 1,174.4 USD a month at list prices.</a:t>
+              <a:t>Storage decisions rest on 41.9 TiB of cold object data, 7.7 TiB of duplicate candidates and 40 unreadable buckets.</a:t>
             </a:r>
           </a:p>
         </p:txBody>
@@ -34817,7 +35658,7 @@
                 </a:solidFill>
                 <a:latin typeface="Calibri"/>
               </a:rPr>
-              <a:t>Approve content-hash confirmation of 7.7 TiB of duplicate candidates before any removal.</a:t>
+              <a:t>The benefit is an upper bound of 1,174.4 USD a month at list prices, not current spend.</a:t>
             </a:r>
           </a:p>
         </p:txBody>
@@ -34922,7 +35763,7 @@
                 </a:solidFill>
                 <a:latin typeface="Calibri"/>
               </a:rPr>
-              <a:t>Approve reconciliation of 40 unreadable buckets with the provider.</a:t>
+              <a:t>The audio opportunity is 529.5 recorded hours, of which an estimated 421.4 are speech, to filter and language-check first.</a:t>
             </a:r>
           </a:p>
         </p:txBody>
@@ -35027,7 +35868,7 @@
                 </a:solidFill>
                 <a:latin typeface="Calibri"/>
               </a:rPr>
-              <a:t>Approve preparation of one bounded product, from the 529.5 staged audio hours or a shortlisted database product, with a named role and acceptance check.</a:t>
+              <a:t>Nothing has been moved, deleted or released.</a:t>
             </a:r>
           </a:p>
         </p:txBody>
@@ -37545,7 +38386,7 @@
                 </a:solidFill>
                 <a:latin typeface="Cambria"/>
               </a:rPr>
-              <a:t>What remains unmeasured</a:t>
+              <a:t>What is still unmeasured</a:t>
             </a:r>
           </a:p>
         </p:txBody>
@@ -37606,7 +38447,7 @@
                 </a:solidFill>
                 <a:latin typeface="Calibri"/>
               </a:rPr>
-              <a:t>COVERAGE</a:t>
+              <a:t>COVERAGE BOUNDARY</a:t>
             </a:r>
           </a:p>
         </p:txBody>
@@ -37641,7 +38482,7 @@
                 </a:solidFill>
                 <a:latin typeface="Cambria"/>
               </a:rPr>
-              <a:t>Coverage is bounded, and each gap has a specific task that would close it</a:t>
+              <a:t>Database ratios, unreadable buckets and file-share duplication remain unmeasured</a:t>
             </a:r>
           </a:p>
         </p:txBody>
@@ -37655,7 +38496,7 @@
         <p:spPr>
           <a:xfrm>
             <a:off x="594360" y="1920240"/>
-            <a:ext cx="640080" cy="942975"/>
+            <a:ext cx="640080" cy="754380"/>
           </a:xfrm>
           <a:prstGeom prst="rect">
             <a:avLst/>
@@ -37690,7 +38531,7 @@
         <p:spPr>
           <a:xfrm>
             <a:off x="1417320" y="1993392"/>
-            <a:ext cx="10180015" cy="851535"/>
+            <a:ext cx="10180015" cy="662940"/>
           </a:xfrm>
           <a:prstGeom prst="rect">
             <a:avLst/>
@@ -37711,7 +38552,7 @@
                 </a:solidFill>
                 <a:latin typeface="Calibri"/>
               </a:rPr>
-              <a:t>Only 638 of 1006 tables were measured. A complete-pass census would firm up the sampled ratios; one connection awaits a read grant.</a:t>
+              <a:t>Database measures cover 638 of 1006 tables; a complete-pass census would firm up sampled ratios.</a:t>
             </a:r>
           </a:p>
         </p:txBody>
@@ -37724,7 +38565,7 @@
         </p:nvCxnSpPr>
         <p:spPr>
           <a:xfrm>
-            <a:off x="594360" y="2753487"/>
+            <a:off x="594360" y="2564891"/>
             <a:ext cx="11002975" cy="0"/>
           </a:xfrm>
           <a:prstGeom prst="line">
@@ -37759,8 +38600,8 @@
         </p:nvSpPr>
         <p:spPr>
           <a:xfrm>
-            <a:off x="594360" y="2863215"/>
-            <a:ext cx="640080" cy="942975"/>
+            <a:off x="594360" y="2674620"/>
+            <a:ext cx="640080" cy="754380"/>
           </a:xfrm>
           <a:prstGeom prst="rect">
             <a:avLst/>
@@ -37794,8 +38635,8 @@
         </p:nvSpPr>
         <p:spPr>
           <a:xfrm>
-            <a:off x="1417320" y="2936367"/>
-            <a:ext cx="10180015" cy="851535"/>
+            <a:off x="1417320" y="2747772"/>
+            <a:ext cx="10180015" cy="662940"/>
           </a:xfrm>
           <a:prstGeom prst="rect">
             <a:avLst/>
@@ -37816,7 +38657,7 @@
                 </a:solidFill>
                 <a:latin typeface="Calibri"/>
               </a:rPr>
-              <a:t>40 buckets could not be listed. Reconciling the inventory with the provider closes this.</a:t>
+              <a:t>40 buckets are unreachable; reconcile the inventory with the provider.</a:t>
             </a:r>
           </a:p>
         </p:txBody>
@@ -37829,7 +38670,7 @@
         </p:nvCxnSpPr>
         <p:spPr>
           <a:xfrm>
-            <a:off x="594360" y="3696461"/>
+            <a:off x="594360" y="3319272"/>
             <a:ext cx="11002975" cy="0"/>
           </a:xfrm>
           <a:prstGeom prst="line">
@@ -37864,8 +38705,8 @@
         </p:nvSpPr>
         <p:spPr>
           <a:xfrm>
-            <a:off x="594360" y="3806189"/>
-            <a:ext cx="640080" cy="942975"/>
+            <a:off x="594360" y="3429000"/>
+            <a:ext cx="640080" cy="754380"/>
           </a:xfrm>
           <a:prstGeom prst="rect">
             <a:avLst/>
@@ -37899,8 +38740,8 @@
         </p:nvSpPr>
         <p:spPr>
           <a:xfrm>
-            <a:off x="1417320" y="3879341"/>
-            <a:ext cx="10180015" cy="851535"/>
+            <a:off x="1417320" y="3502152"/>
+            <a:ext cx="10180015" cy="662940"/>
           </a:xfrm>
           <a:prstGeom prst="rect">
             <a:avLst/>
@@ -37921,7 +38762,7 @@
                 </a:solidFill>
                 <a:latin typeface="Calibri"/>
               </a:rPr>
-              <a:t>43.6 TiB of file shares across 1.5m files lack content fingerprints, so duplication needs a fingerprinting pass.</a:t>
+              <a:t>File shares hold 43.6 TiB in 1.5m files, but only sizes and dates were recorded; fingerprinting would measure duplication.</a:t>
             </a:r>
           </a:p>
         </p:txBody>
@@ -37934,7 +38775,7 @@
         </p:nvCxnSpPr>
         <p:spPr>
           <a:xfrm>
-            <a:off x="594360" y="4639437"/>
+            <a:off x="594360" y="4073652"/>
             <a:ext cx="11002975" cy="0"/>
           </a:xfrm>
           <a:prstGeom prst="line">
@@ -37969,8 +38810,8 @@
         </p:nvSpPr>
         <p:spPr>
           <a:xfrm>
-            <a:off x="594360" y="4749165"/>
-            <a:ext cx="640080" cy="942975"/>
+            <a:off x="594360" y="4183379"/>
+            <a:ext cx="640080" cy="754380"/>
           </a:xfrm>
           <a:prstGeom prst="rect">
             <a:avLst/>
@@ -38004,8 +38845,8 @@
         </p:nvSpPr>
         <p:spPr>
           <a:xfrm>
-            <a:off x="1417320" y="4822317"/>
-            <a:ext cx="10180015" cy="851535"/>
+            <a:off x="1417320" y="4256531"/>
+            <a:ext cx="10180015" cy="662940"/>
           </a:xfrm>
           <a:prstGeom prst="rect">
             <a:avLst/>
@@ -38026,7 +38867,7 @@
                 </a:solidFill>
                 <a:latin typeface="Calibri"/>
               </a:rPr>
-              <a:t>3540 transcripts are unread, script language is unassessed, and workbench overlap needs a hash join.</a:t>
+              <a:t>1694 transcripts were unread, script language was not read, and workbench overlap is unjoined.</a:t>
             </a:r>
           </a:p>
         </p:txBody>
@@ -38039,7 +38880,7 @@
         </p:nvCxnSpPr>
         <p:spPr>
           <a:xfrm>
-            <a:off x="594360" y="5582412"/>
+            <a:off x="594360" y="4828031"/>
             <a:ext cx="11002975" cy="0"/>
           </a:xfrm>
           <a:prstGeom prst="line">
@@ -38074,6 +38915,111 @@
         </p:nvSpPr>
         <p:spPr>
           <a:xfrm>
+            <a:off x="594360" y="4937760"/>
+            <a:ext cx="640080" cy="754380"/>
+          </a:xfrm>
+          <a:prstGeom prst="rect">
+            <a:avLst/>
+          </a:prstGeom>
+          <a:noFill/>
+        </p:spPr>
+        <p:txBody>
+          <a:bodyPr wrap="square" lIns="0" rIns="0" tIns="0" bIns="0" anchor="t">
+            <a:spAutoFit/>
+          </a:bodyPr>
+          <a:lstStyle/>
+          <a:p>
+            <a:pPr algn="l"/>
+            <a:r>
+              <a:rPr sz="2600" b="0" i="0">
+                <a:solidFill>
+                  <a:srgbClr val="E8772E"/>
+                </a:solidFill>
+                <a:latin typeface="Courier New"/>
+              </a:rPr>
+              <a:t>05</a:t>
+            </a:r>
+          </a:p>
+        </p:txBody>
+      </p:sp>
+      <p:sp>
+        <p:nvSpPr>
+          <p:cNvPr id="17" name="TextBox 16"/>
+          <p:cNvSpPr txBox="1"/>
+          <p:nvPr/>
+        </p:nvSpPr>
+        <p:spPr>
+          <a:xfrm>
+            <a:off x="1417320" y="5010912"/>
+            <a:ext cx="10180015" cy="662940"/>
+          </a:xfrm>
+          <a:prstGeom prst="rect">
+            <a:avLst/>
+          </a:prstGeom>
+          <a:noFill/>
+        </p:spPr>
+        <p:txBody>
+          <a:bodyPr wrap="square" lIns="0" rIns="0" tIns="0" bIns="0" anchor="t">
+            <a:spAutoFit/>
+          </a:bodyPr>
+          <a:lstStyle/>
+          <a:p>
+            <a:pPr algn="l"/>
+            <a:r>
+              <a:rPr sz="1400" b="0" i="0">
+                <a:solidFill>
+                  <a:srgbClr val="14324A"/>
+                </a:solidFill>
+                <a:latin typeface="Calibri"/>
+              </a:rPr>
+              <a:t>One database connection awaits a read grant.</a:t>
+            </a:r>
+          </a:p>
+        </p:txBody>
+      </p:sp>
+      <p:cxnSp>
+        <p:nvCxnSpPr>
+          <p:cNvPr id="18" name="Connector 17"/>
+          <p:cNvCxnSpPr/>
+          <p:nvPr/>
+        </p:nvCxnSpPr>
+        <p:spPr>
+          <a:xfrm>
+            <a:off x="594360" y="5582412"/>
+            <a:ext cx="11002975" cy="0"/>
+          </a:xfrm>
+          <a:prstGeom prst="line">
+            <a:avLst/>
+          </a:prstGeom>
+          <a:ln w="9525">
+            <a:solidFill>
+              <a:srgbClr val="D3DCE4"/>
+            </a:solidFill>
+          </a:ln>
+        </p:spPr>
+        <p:style>
+          <a:lnRef idx="2">
+            <a:schemeClr val="accent1"/>
+          </a:lnRef>
+          <a:fillRef idx="0">
+            <a:schemeClr val="accent1"/>
+          </a:fillRef>
+          <a:effectRef idx="1">
+            <a:schemeClr val="accent1"/>
+          </a:effectRef>
+          <a:fontRef idx="minor">
+            <a:schemeClr val="tx1"/>
+          </a:fontRef>
+        </p:style>
+      </p:cxnSp>
+      <p:sp>
+        <p:nvSpPr>
+          <p:cNvPr id="19" name="TextBox 18"/>
+          <p:cNvSpPr txBox="1"/>
+          <p:nvPr/>
+        </p:nvSpPr>
+        <p:spPr>
+          <a:xfrm>
             <a:off x="594360" y="6069787"/>
             <a:ext cx="5409590" cy="376732"/>
           </a:xfrm>
@@ -38103,7 +39049,7 @@
       </p:sp>
       <p:sp>
         <p:nvSpPr>
-          <p:cNvPr id="17" name="TextBox 16"/>
+          <p:cNvPr id="20" name="TextBox 19"/>
           <p:cNvSpPr txBox="1"/>
           <p:nvPr/>
         </p:nvSpPr>
@@ -38138,7 +39084,7 @@
       </p:sp>
       <p:sp>
         <p:nvSpPr>
-          <p:cNvPr id="18" name="TextBox 17"/>
+          <p:cNvPr id="21" name="TextBox 20"/>
           <p:cNvSpPr txBox="1"/>
           <p:nvPr/>
         </p:nvSpPr>
@@ -38743,7 +39689,7 @@
                 </a:solidFill>
                 <a:latin typeface="Calibri"/>
               </a:rPr>
-              <a:t>WHAT TO DO FIRST</a:t>
+              <a:t>EVIDENCE BY NAME</a:t>
             </a:r>
           </a:p>
         </p:txBody>
@@ -38778,539 +39724,582 @@
                 </a:solidFill>
                 <a:latin typeface="Cambria"/>
               </a:rPr>
-              <a:t>Validate the object-store economics first, then close the gaps, then prepare one product</a:t>
-            </a:r>
-          </a:p>
-        </p:txBody>
-      </p:sp>
-      <p:sp>
-        <p:nvSpPr>
-          <p:cNvPr id="4" name="TextBox 3"/>
-          <p:cNvSpPr txBox="1"/>
-          <p:nvPr/>
-        </p:nvSpPr>
-        <p:spPr>
-          <a:xfrm>
-            <a:off x="594360" y="1920240"/>
-            <a:ext cx="640080" cy="754380"/>
-          </a:xfrm>
-          <a:prstGeom prst="rect">
-            <a:avLst/>
-          </a:prstGeom>
-          <a:noFill/>
-        </p:spPr>
-        <p:txBody>
-          <a:bodyPr wrap="square" lIns="0" rIns="0" tIns="0" bIns="0" anchor="t">
+              <a:t>Who wrote this pack — model roles by task strength</a:t>
+            </a:r>
+          </a:p>
+        </p:txBody>
+      </p:sp>
+      <p:graphicFrame>
+        <p:nvGraphicFramePr>
+          <p:cNvPr id="4" name="Table 3"/>
+          <p:cNvGraphicFramePr>
+            <a:graphicFrameLocks noGrp="1"/>
+          </p:cNvGraphicFramePr>
+          <p:nvPr/>
+        </p:nvGraphicFramePr>
+        <p:xfrm>
+          <a:off x="594360" y="1920240"/>
+          <a:ext cx="11002973" cy="1920240"/>
+        </p:xfrm>
+        <a:graphic>
+          <a:graphicData uri="http://schemas.openxmlformats.org/drawingml/2006/table">
+            <a:tbl>
+              <a:tblPr firstRow="1" bandRow="1">
+                <a:tableStyleId>{5C22544A-7EE6-4342-B048-85BDC9FD1C3A}</a:tableStyleId>
+              </a:tblPr>
+              <a:tblGrid>
+                <a:gridCol w="1770593"/>
+                <a:gridCol w="2150006"/>
+                <a:gridCol w="1770593"/>
+                <a:gridCol w="5311781"/>
+              </a:tblGrid>
+              <a:tr h="384048">
+                <a:tc>
+                  <a:txBody>
+                    <a:bodyPr wrap="square"/>
+                    <a:lstStyle/>
+                    <a:p>
+                      <a:pPr algn="l"/>
+                      <a:r>
+                        <a:rPr sz="1300" b="1">
+                          <a:solidFill>
+                            <a:srgbClr val="14324A"/>
+                          </a:solidFill>
+                          <a:latin typeface="Calibri"/>
+                        </a:rPr>
+                        <a:t>Role</a:t>
+                      </a:r>
+                    </a:p>
+                  </a:txBody>
+                  <a:tcPr marL="54864" marR="54864" marT="27432" marB="27432">
+                    <a:solidFill>
+                      <a:srgbClr val="E8EEF3"/>
+                    </a:solidFill>
+                  </a:tcPr>
+                </a:tc>
+                <a:tc>
+                  <a:txBody>
+                    <a:bodyPr wrap="square"/>
+                    <a:lstStyle/>
+                    <a:p>
+                      <a:pPr algn="l"/>
+                      <a:r>
+                        <a:rPr sz="1300" b="1">
+                          <a:solidFill>
+                            <a:srgbClr val="14324A"/>
+                          </a:solidFill>
+                          <a:latin typeface="Calibri"/>
+                        </a:rPr>
+                        <a:t>Model</a:t>
+                      </a:r>
+                    </a:p>
+                  </a:txBody>
+                  <a:tcPr marL="54864" marR="54864" marT="27432" marB="27432">
+                    <a:solidFill>
+                      <a:srgbClr val="E8EEF3"/>
+                    </a:solidFill>
+                  </a:tcPr>
+                </a:tc>
+                <a:tc>
+                  <a:txBody>
+                    <a:bodyPr wrap="square"/>
+                    <a:lstStyle/>
+                    <a:p>
+                      <a:pPr algn="l"/>
+                      <a:r>
+                        <a:rPr sz="1300" b="1">
+                          <a:solidFill>
+                            <a:srgbClr val="14324A"/>
+                          </a:solidFill>
+                          <a:latin typeface="Calibri"/>
+                        </a:rPr>
+                        <a:t>Family</a:t>
+                      </a:r>
+                    </a:p>
+                  </a:txBody>
+                  <a:tcPr marL="54864" marR="54864" marT="27432" marB="27432">
+                    <a:solidFill>
+                      <a:srgbClr val="E8EEF3"/>
+                    </a:solidFill>
+                  </a:tcPr>
+                </a:tc>
+                <a:tc>
+                  <a:txBody>
+                    <a:bodyPr wrap="square"/>
+                    <a:lstStyle/>
+                    <a:p>
+                      <a:pPr algn="l"/>
+                      <a:r>
+                        <a:rPr sz="1300" b="1">
+                          <a:solidFill>
+                            <a:srgbClr val="14324A"/>
+                          </a:solidFill>
+                          <a:latin typeface="Calibri"/>
+                        </a:rPr>
+                        <a:t>Job</a:t>
+                      </a:r>
+                    </a:p>
+                  </a:txBody>
+                  <a:tcPr marL="54864" marR="54864" marT="27432" marB="27432">
+                    <a:solidFill>
+                      <a:srgbClr val="E8EEF3"/>
+                    </a:solidFill>
+                  </a:tcPr>
+                </a:tc>
+              </a:tr>
+              <a:tr h="384048">
+                <a:tc>
+                  <a:txBody>
+                    <a:bodyPr wrap="square"/>
+                    <a:lstStyle/>
+                    <a:p>
+                      <a:pPr algn="l"/>
+                      <a:r>
+                        <a:rPr sz="1300" b="0">
+                          <a:solidFill>
+                            <a:srgbClr val="14324A"/>
+                          </a:solidFill>
+                          <a:latin typeface="Calibri"/>
+                        </a:rPr>
+                        <a:t>assistant</a:t>
+                      </a:r>
+                    </a:p>
+                  </a:txBody>
+                  <a:tcPr marL="54864" marR="54864" marT="27432" marB="27432">
+                    <a:solidFill>
+                      <a:srgbClr val="FFFFFF"/>
+                    </a:solidFill>
+                  </a:tcPr>
+                </a:tc>
+                <a:tc>
+                  <a:txBody>
+                    <a:bodyPr wrap="square"/>
+                    <a:lstStyle/>
+                    <a:p>
+                      <a:pPr algn="l"/>
+                      <a:r>
+                        <a:rPr sz="1300" b="0">
+                          <a:solidFill>
+                            <a:srgbClr val="14324A"/>
+                          </a:solidFill>
+                          <a:latin typeface="Calibri"/>
+                        </a:rPr>
+                        <a:t>gpt-6-astra</a:t>
+                      </a:r>
+                    </a:p>
+                  </a:txBody>
+                  <a:tcPr marL="54864" marR="54864" marT="27432" marB="27432">
+                    <a:solidFill>
+                      <a:srgbClr val="FFFFFF"/>
+                    </a:solidFill>
+                  </a:tcPr>
+                </a:tc>
+                <a:tc>
+                  <a:txBody>
+                    <a:bodyPr wrap="square"/>
+                    <a:lstStyle/>
+                    <a:p>
+                      <a:pPr algn="l"/>
+                      <a:r>
+                        <a:rPr sz="1300" b="0">
+                          <a:solidFill>
+                            <a:srgbClr val="14324A"/>
+                          </a:solidFill>
+                          <a:latin typeface="Calibri"/>
+                        </a:rPr>
+                        <a:t>openai</a:t>
+                      </a:r>
+                    </a:p>
+                  </a:txBody>
+                  <a:tcPr marL="54864" marR="54864" marT="27432" marB="27432">
+                    <a:solidFill>
+                      <a:srgbClr val="FFFFFF"/>
+                    </a:solidFill>
+                  </a:tcPr>
+                </a:tc>
+                <a:tc>
+                  <a:txBody>
+                    <a:bodyPr wrap="square"/>
+                    <a:lstStyle/>
+                    <a:p>
+                      <a:pPr algn="l"/>
+                      <a:r>
+                        <a:rPr sz="1300" b="0">
+                          <a:solidFill>
+                            <a:srgbClr val="14324A"/>
+                          </a:solidFill>
+                          <a:latin typeface="Calibri"/>
+                        </a:rPr>
+                        <a:t>planning collaborator in Train Models: reads the run record, plans the next bounded step, proposes one action</a:t>
+                      </a:r>
+                    </a:p>
+                  </a:txBody>
+                  <a:tcPr marL="54864" marR="54864" marT="27432" marB="27432">
+                    <a:solidFill>
+                      <a:srgbClr val="FFFFFF"/>
+                    </a:solidFill>
+                  </a:tcPr>
+                </a:tc>
+              </a:tr>
+              <a:tr h="384048">
+                <a:tc>
+                  <a:txBody>
+                    <a:bodyPr wrap="square"/>
+                    <a:lstStyle/>
+                    <a:p>
+                      <a:pPr algn="l"/>
+                      <a:r>
+                        <a:rPr sz="1300" b="0">
+                          <a:solidFill>
+                            <a:srgbClr val="14324A"/>
+                          </a:solidFill>
+                          <a:latin typeface="Calibri"/>
+                        </a:rPr>
+                        <a:t>planner</a:t>
+                      </a:r>
+                    </a:p>
+                  </a:txBody>
+                  <a:tcPr marL="54864" marR="54864" marT="27432" marB="27432">
+                    <a:solidFill>
+                      <a:srgbClr val="FFFFFF"/>
+                    </a:solidFill>
+                  </a:tcPr>
+                </a:tc>
+                <a:tc>
+                  <a:txBody>
+                    <a:bodyPr wrap="square"/>
+                    <a:lstStyle/>
+                    <a:p>
+                      <a:pPr algn="l"/>
+                      <a:r>
+                        <a:rPr sz="1300" b="0">
+                          <a:solidFill>
+                            <a:srgbClr val="14324A"/>
+                          </a:solidFill>
+                          <a:latin typeface="Calibri"/>
+                        </a:rPr>
+                        <a:t>gpt-6-astra</a:t>
+                      </a:r>
+                    </a:p>
+                  </a:txBody>
+                  <a:tcPr marL="54864" marR="54864" marT="27432" marB="27432">
+                    <a:solidFill>
+                      <a:srgbClr val="FFFFFF"/>
+                    </a:solidFill>
+                  </a:tcPr>
+                </a:tc>
+                <a:tc>
+                  <a:txBody>
+                    <a:bodyPr wrap="square"/>
+                    <a:lstStyle/>
+                    <a:p>
+                      <a:pPr algn="l"/>
+                      <a:r>
+                        <a:rPr sz="1300" b="0">
+                          <a:solidFill>
+                            <a:srgbClr val="14324A"/>
+                          </a:solidFill>
+                          <a:latin typeface="Calibri"/>
+                        </a:rPr>
+                        <a:t>openai</a:t>
+                      </a:r>
+                    </a:p>
+                  </a:txBody>
+                  <a:tcPr marL="54864" marR="54864" marT="27432" marB="27432">
+                    <a:solidFill>
+                      <a:srgbClr val="FFFFFF"/>
+                    </a:solidFill>
+                  </a:tcPr>
+                </a:tc>
+                <a:tc>
+                  <a:txBody>
+                    <a:bodyPr wrap="square"/>
+                    <a:lstStyle/>
+                    <a:p>
+                      <a:pPr algn="l"/>
+                      <a:r>
+                        <a:rPr sz="1300" b="0">
+                          <a:solidFill>
+                            <a:srgbClr val="14324A"/>
+                          </a:solidFill>
+                          <a:latin typeface="Calibri"/>
+                        </a:rPr>
+                        <a:t>plans and orchestrates multi-step work (document story, measurement order, task decomposition)</a:t>
+                      </a:r>
+                    </a:p>
+                  </a:txBody>
+                  <a:tcPr marL="54864" marR="54864" marT="27432" marB="27432">
+                    <a:solidFill>
+                      <a:srgbClr val="FFFFFF"/>
+                    </a:solidFill>
+                  </a:tcPr>
+                </a:tc>
+              </a:tr>
+              <a:tr h="384048">
+                <a:tc>
+                  <a:txBody>
+                    <a:bodyPr wrap="square"/>
+                    <a:lstStyle/>
+                    <a:p>
+                      <a:pPr algn="l"/>
+                      <a:r>
+                        <a:rPr sz="1300" b="0">
+                          <a:solidFill>
+                            <a:srgbClr val="14324A"/>
+                          </a:solidFill>
+                          <a:latin typeface="Calibri"/>
+                        </a:rPr>
+                        <a:t>reviewer</a:t>
+                      </a:r>
+                    </a:p>
+                  </a:txBody>
+                  <a:tcPr marL="54864" marR="54864" marT="27432" marB="27432">
+                    <a:solidFill>
+                      <a:srgbClr val="FFFFFF"/>
+                    </a:solidFill>
+                  </a:tcPr>
+                </a:tc>
+                <a:tc>
+                  <a:txBody>
+                    <a:bodyPr wrap="square"/>
+                    <a:lstStyle/>
+                    <a:p>
+                      <a:pPr algn="l"/>
+                      <a:r>
+                        <a:rPr sz="1300" b="0">
+                          <a:solidFill>
+                            <a:srgbClr val="14324A"/>
+                          </a:solidFill>
+                          <a:latin typeface="Calibri"/>
+                        </a:rPr>
+                        <a:t>claude-fable-5-1</a:t>
+                      </a:r>
+                    </a:p>
+                  </a:txBody>
+                  <a:tcPr marL="54864" marR="54864" marT="27432" marB="27432">
+                    <a:solidFill>
+                      <a:srgbClr val="FFFFFF"/>
+                    </a:solidFill>
+                  </a:tcPr>
+                </a:tc>
+                <a:tc>
+                  <a:txBody>
+                    <a:bodyPr wrap="square"/>
+                    <a:lstStyle/>
+                    <a:p>
+                      <a:pPr algn="l"/>
+                      <a:r>
+                        <a:rPr sz="1300" b="0">
+                          <a:solidFill>
+                            <a:srgbClr val="14324A"/>
+                          </a:solidFill>
+                          <a:latin typeface="Calibri"/>
+                        </a:rPr>
+                        <a:t>anthropic</a:t>
+                      </a:r>
+                    </a:p>
+                  </a:txBody>
+                  <a:tcPr marL="54864" marR="54864" marT="27432" marB="27432">
+                    <a:solidFill>
+                      <a:srgbClr val="FFFFFF"/>
+                    </a:solidFill>
+                  </a:tcPr>
+                </a:tc>
+                <a:tc>
+                  <a:txBody>
+                    <a:bodyPr wrap="square"/>
+                    <a:lstStyle/>
+                    <a:p>
+                      <a:pPr algn="l"/>
+                      <a:r>
+                        <a:rPr sz="1300" b="0">
+                          <a:solidFill>
+                            <a:srgbClr val="14324A"/>
+                          </a:solidFill>
+                          <a:latin typeface="Calibri"/>
+                        </a:rPr>
+                        <a:t>independent review of complex outputs against source evidence and acceptance criteria; a different family from the planner</a:t>
+                      </a:r>
+                    </a:p>
+                  </a:txBody>
+                  <a:tcPr marL="54864" marR="54864" marT="27432" marB="27432">
+                    <a:solidFill>
+                      <a:srgbClr val="FFFFFF"/>
+                    </a:solidFill>
+                  </a:tcPr>
+                </a:tc>
+              </a:tr>
+              <a:tr h="384048">
+                <a:tc>
+                  <a:txBody>
+                    <a:bodyPr wrap="square"/>
+                    <a:lstStyle/>
+                    <a:p>
+                      <a:pPr algn="l"/>
+                      <a:r>
+                        <a:rPr sz="1300" b="0">
+                          <a:solidFill>
+                            <a:srgbClr val="14324A"/>
+                          </a:solidFill>
+                          <a:latin typeface="Calibri"/>
+                        </a:rPr>
+                        <a:t>writer</a:t>
+                      </a:r>
+                    </a:p>
+                  </a:txBody>
+                  <a:tcPr marL="54864" marR="54864" marT="27432" marB="27432">
+                    <a:solidFill>
+                      <a:srgbClr val="FFFFFF"/>
+                    </a:solidFill>
+                  </a:tcPr>
+                </a:tc>
+                <a:tc>
+                  <a:txBody>
+                    <a:bodyPr wrap="square"/>
+                    <a:lstStyle/>
+                    <a:p>
+                      <a:pPr algn="l"/>
+                      <a:r>
+                        <a:rPr sz="1300" b="0">
+                          <a:solidFill>
+                            <a:srgbClr val="14324A"/>
+                          </a:solidFill>
+                          <a:latin typeface="Calibri"/>
+                        </a:rPr>
+                        <a:t>claude-sonnet-5-5</a:t>
+                      </a:r>
+                    </a:p>
+                  </a:txBody>
+                  <a:tcPr marL="54864" marR="54864" marT="27432" marB="27432">
+                    <a:solidFill>
+                      <a:srgbClr val="FFFFFF"/>
+                    </a:solidFill>
+                  </a:tcPr>
+                </a:tc>
+                <a:tc>
+                  <a:txBody>
+                    <a:bodyPr wrap="square"/>
+                    <a:lstStyle/>
+                    <a:p>
+                      <a:pPr algn="l"/>
+                      <a:r>
+                        <a:rPr sz="1300" b="0">
+                          <a:solidFill>
+                            <a:srgbClr val="14324A"/>
+                          </a:solidFill>
+                          <a:latin typeface="Calibri"/>
+                        </a:rPr>
+                        <a:t>anthropic</a:t>
+                      </a:r>
+                    </a:p>
+                  </a:txBody>
+                  <a:tcPr marL="54864" marR="54864" marT="27432" marB="27432">
+                    <a:solidFill>
+                      <a:srgbClr val="FFFFFF"/>
+                    </a:solidFill>
+                  </a:tcPr>
+                </a:tc>
+                <a:tc>
+                  <a:txBody>
+                    <a:bodyPr wrap="square"/>
+                    <a:lstStyle/>
+                    <a:p>
+                      <a:pPr algn="l"/>
+                      <a:r>
+                        <a:rPr sz="1300" b="0">
+                          <a:solidFill>
+                            <a:srgbClr val="14324A"/>
+                          </a:solidFill>
+                          <a:latin typeface="Calibri"/>
+                        </a:rPr>
+                        <a:t>writes every sentence the reader sees from evidence tokens under the content-manager gate</a:t>
+                      </a:r>
+                    </a:p>
+                  </a:txBody>
+                  <a:tcPr marL="54864" marR="54864" marT="27432" marB="27432">
+                    <a:solidFill>
+                      <a:srgbClr val="FFFFFF"/>
+                    </a:solidFill>
+                  </a:tcPr>
+                </a:tc>
+              </a:tr>
+            </a:tbl>
+          </a:graphicData>
+        </a:graphic>
+      </p:graphicFrame>
+      <p:sp>
+        <p:nvSpPr>
+          <p:cNvPr id="5" name="TextBox 4"/>
+          <p:cNvSpPr txBox="1"/>
+          <p:nvPr/>
+        </p:nvSpPr>
+        <p:spPr>
+          <a:xfrm>
+            <a:off x="594360" y="4937760"/>
+            <a:ext cx="11002975" cy="376732"/>
+          </a:xfrm>
+          <a:prstGeom prst="rect">
+            <a:avLst/>
+          </a:prstGeom>
+          <a:noFill/>
+        </p:spPr>
+        <p:txBody>
+          <a:bodyPr wrap="square" lIns="0" rIns="0" tIns="0" bIns="0" anchor="b">
             <a:spAutoFit/>
           </a:bodyPr>
           <a:lstStyle/>
           <a:p>
             <a:pPr algn="l"/>
             <a:r>
-              <a:rPr sz="2600" b="0" i="0">
+              <a:rPr sz="1400" b="0" i="1">
                 <a:solidFill>
                   <a:srgbClr val="E8772E"/>
                 </a:solidFill>
+                <a:latin typeface="Calibri"/>
+              </a:rPr>
+              <a:t>Planner and reviewer come from different model families so the review does not share the planner's blind spots; every call crosses the Shield chokepoint.</a:t>
+            </a:r>
+          </a:p>
+        </p:txBody>
+      </p:sp>
+      <p:sp>
+        <p:nvSpPr>
+          <p:cNvPr id="6" name="TextBox 5"/>
+          <p:cNvSpPr txBox="1"/>
+          <p:nvPr/>
+        </p:nvSpPr>
+        <p:spPr>
+          <a:xfrm>
+            <a:off x="594360" y="5692140"/>
+            <a:ext cx="11002975" cy="376732"/>
+          </a:xfrm>
+          <a:prstGeom prst="rect">
+            <a:avLst/>
+          </a:prstGeom>
+          <a:noFill/>
+        </p:spPr>
+        <p:txBody>
+          <a:bodyPr wrap="square" lIns="0" rIns="0" tIns="0" bIns="0" anchor="b">
+            <a:spAutoFit/>
+          </a:bodyPr>
+          <a:lstStyle/>
+          <a:p>
+            <a:pPr algn="l"/>
+            <a:r>
+              <a:rPr sz="1000" b="0" i="0">
+                <a:solidFill>
+                  <a:srgbClr val="70879A"/>
+                </a:solidFill>
                 <a:latin typeface="Courier New"/>
               </a:rPr>
-              <a:t>01</a:t>
-            </a:r>
-          </a:p>
-        </p:txBody>
-      </p:sp>
-      <p:sp>
-        <p:nvSpPr>
-          <p:cNvPr id="5" name="TextBox 4"/>
-          <p:cNvSpPr txBox="1"/>
-          <p:nvPr/>
-        </p:nvSpPr>
-        <p:spPr>
-          <a:xfrm>
-            <a:off x="1417320" y="1993392"/>
-            <a:ext cx="10180015" cy="662940"/>
-          </a:xfrm>
-          <a:prstGeom prst="rect">
-            <a:avLst/>
-          </a:prstGeom>
-          <a:noFill/>
-        </p:spPr>
-        <p:txBody>
-          <a:bodyPr wrap="square" lIns="0" rIns="0" tIns="0" bIns="0" anchor="t">
-            <a:spAutoFit/>
-          </a:bodyPr>
-          <a:lstStyle/>
-          <a:p>
-            <a:pPr algn="l"/>
-            <a:r>
-              <a:rPr sz="1400" b="0" i="0">
-                <a:solidFill>
-                  <a:srgbClr val="14324A"/>
-                </a:solidFill>
-                <a:latin typeface="Calibri"/>
-              </a:rPr>
-              <a:t>First, test archive tiering on the 41.9 TiB of write-inactive buckets. Check read patterns and retrieval fees against the 1,174.4 USD monthly upper bound.</a:t>
-            </a:r>
-          </a:p>
-        </p:txBody>
-      </p:sp>
-      <p:cxnSp>
-        <p:nvCxnSpPr>
-          <p:cNvPr id="6" name="Connector 5"/>
-          <p:cNvCxnSpPr/>
-          <p:nvPr/>
-        </p:nvCxnSpPr>
-        <p:spPr>
-          <a:xfrm>
-            <a:off x="594360" y="2564891"/>
-            <a:ext cx="11002975" cy="0"/>
-          </a:xfrm>
-          <a:prstGeom prst="line">
-            <a:avLst/>
-          </a:prstGeom>
-          <a:ln w="9525">
-            <a:solidFill>
-              <a:srgbClr val="D3DCE4"/>
-            </a:solidFill>
-          </a:ln>
-        </p:spPr>
-        <p:style>
-          <a:lnRef idx="2">
-            <a:schemeClr val="accent1"/>
-          </a:lnRef>
-          <a:fillRef idx="0">
-            <a:schemeClr val="accent1"/>
-          </a:fillRef>
-          <a:effectRef idx="1">
-            <a:schemeClr val="accent1"/>
-          </a:effectRef>
-          <a:fontRef idx="minor">
-            <a:schemeClr val="tx1"/>
-          </a:fontRef>
-        </p:style>
-      </p:cxnSp>
+              <a:t>[measured]  Receipt R09: Model role assignments evaluated 2026-10-02: integration model catalogue plus published task benchmarks reviewed on the day; planner/reviewer families kept distinct so the review does not share the planner's blind spots. Not claimed: no independent head-to-head benchmark was run on owner data; assignments are disclosed configuration, re-evaluated when a role under-performs on its own gate</a:t>
+            </a:r>
+          </a:p>
+        </p:txBody>
+      </p:sp>
       <p:sp>
         <p:nvSpPr>
           <p:cNvPr id="7" name="TextBox 6"/>
-          <p:cNvSpPr txBox="1"/>
-          <p:nvPr/>
-        </p:nvSpPr>
-        <p:spPr>
-          <a:xfrm>
-            <a:off x="594360" y="2674620"/>
-            <a:ext cx="640080" cy="754380"/>
-          </a:xfrm>
-          <a:prstGeom prst="rect">
-            <a:avLst/>
-          </a:prstGeom>
-          <a:noFill/>
-        </p:spPr>
-        <p:txBody>
-          <a:bodyPr wrap="square" lIns="0" rIns="0" tIns="0" bIns="0" anchor="t">
-            <a:spAutoFit/>
-          </a:bodyPr>
-          <a:lstStyle/>
-          <a:p>
-            <a:pPr algn="l"/>
-            <a:r>
-              <a:rPr sz="2600" b="0" i="0">
-                <a:solidFill>
-                  <a:srgbClr val="E8772E"/>
-                </a:solidFill>
-                <a:latin typeface="Courier New"/>
-              </a:rPr>
-              <a:t>02</a:t>
-            </a:r>
-          </a:p>
-        </p:txBody>
-      </p:sp>
-      <p:sp>
-        <p:nvSpPr>
-          <p:cNvPr id="8" name="TextBox 7"/>
-          <p:cNvSpPr txBox="1"/>
-          <p:nvPr/>
-        </p:nvSpPr>
-        <p:spPr>
-          <a:xfrm>
-            <a:off x="1417320" y="2747772"/>
-            <a:ext cx="10180015" cy="662940"/>
-          </a:xfrm>
-          <a:prstGeom prst="rect">
-            <a:avLst/>
-          </a:prstGeom>
-          <a:noFill/>
-        </p:spPr>
-        <p:txBody>
-          <a:bodyPr wrap="square" lIns="0" rIns="0" tIns="0" bIns="0" anchor="t">
-            <a:spAutoFit/>
-          </a:bodyPr>
-          <a:lstStyle/>
-          <a:p>
-            <a:pPr algn="l"/>
-            <a:r>
-              <a:rPr sz="1400" b="0" i="0">
-                <a:solidFill>
-                  <a:srgbClr val="14324A"/>
-                </a:solidFill>
-                <a:latin typeface="Calibri"/>
-              </a:rPr>
-              <a:t>Second, confirm the 7.7 TiB of duplicate candidates by content hash. Remove nothing before then.</a:t>
-            </a:r>
-          </a:p>
-        </p:txBody>
-      </p:sp>
-      <p:cxnSp>
-        <p:nvCxnSpPr>
-          <p:cNvPr id="9" name="Connector 8"/>
-          <p:cNvCxnSpPr/>
-          <p:nvPr/>
-        </p:nvCxnSpPr>
-        <p:spPr>
-          <a:xfrm>
-            <a:off x="594360" y="3319272"/>
-            <a:ext cx="11002975" cy="0"/>
-          </a:xfrm>
-          <a:prstGeom prst="line">
-            <a:avLst/>
-          </a:prstGeom>
-          <a:ln w="9525">
-            <a:solidFill>
-              <a:srgbClr val="D3DCE4"/>
-            </a:solidFill>
-          </a:ln>
-        </p:spPr>
-        <p:style>
-          <a:lnRef idx="2">
-            <a:schemeClr val="accent1"/>
-          </a:lnRef>
-          <a:fillRef idx="0">
-            <a:schemeClr val="accent1"/>
-          </a:fillRef>
-          <a:effectRef idx="1">
-            <a:schemeClr val="accent1"/>
-          </a:effectRef>
-          <a:fontRef idx="minor">
-            <a:schemeClr val="tx1"/>
-          </a:fontRef>
-        </p:style>
-      </p:cxnSp>
-      <p:sp>
-        <p:nvSpPr>
-          <p:cNvPr id="10" name="TextBox 9"/>
-          <p:cNvSpPr txBox="1"/>
-          <p:nvPr/>
-        </p:nvSpPr>
-        <p:spPr>
-          <a:xfrm>
-            <a:off x="594360" y="3429000"/>
-            <a:ext cx="640080" cy="754380"/>
-          </a:xfrm>
-          <a:prstGeom prst="rect">
-            <a:avLst/>
-          </a:prstGeom>
-          <a:noFill/>
-        </p:spPr>
-        <p:txBody>
-          <a:bodyPr wrap="square" lIns="0" rIns="0" tIns="0" bIns="0" anchor="t">
-            <a:spAutoFit/>
-          </a:bodyPr>
-          <a:lstStyle/>
-          <a:p>
-            <a:pPr algn="l"/>
-            <a:r>
-              <a:rPr sz="2600" b="0" i="0">
-                <a:solidFill>
-                  <a:srgbClr val="E8772E"/>
-                </a:solidFill>
-                <a:latin typeface="Courier New"/>
-              </a:rPr>
-              <a:t>03</a:t>
-            </a:r>
-          </a:p>
-        </p:txBody>
-      </p:sp>
-      <p:sp>
-        <p:nvSpPr>
-          <p:cNvPr id="11" name="TextBox 10"/>
-          <p:cNvSpPr txBox="1"/>
-          <p:nvPr/>
-        </p:nvSpPr>
-        <p:spPr>
-          <a:xfrm>
-            <a:off x="1417320" y="3502152"/>
-            <a:ext cx="10180015" cy="662940"/>
-          </a:xfrm>
-          <a:prstGeom prst="rect">
-            <a:avLst/>
-          </a:prstGeom>
-          <a:noFill/>
-        </p:spPr>
-        <p:txBody>
-          <a:bodyPr wrap="square" lIns="0" rIns="0" tIns="0" bIns="0" anchor="t">
-            <a:spAutoFit/>
-          </a:bodyPr>
-          <a:lstStyle/>
-          <a:p>
-            <a:pPr algn="l"/>
-            <a:r>
-              <a:rPr sz="1400" b="0" i="0">
-                <a:solidFill>
-                  <a:srgbClr val="14324A"/>
-                </a:solidFill>
-                <a:latin typeface="Calibri"/>
-              </a:rPr>
-              <a:t>Third, reconcile the 40 unreadable buckets and fingerprint the 43.6 TiB of file shares.</a:t>
-            </a:r>
-          </a:p>
-        </p:txBody>
-      </p:sp>
-      <p:cxnSp>
-        <p:nvCxnSpPr>
-          <p:cNvPr id="12" name="Connector 11"/>
-          <p:cNvCxnSpPr/>
-          <p:nvPr/>
-        </p:nvCxnSpPr>
-        <p:spPr>
-          <a:xfrm>
-            <a:off x="594360" y="4073652"/>
-            <a:ext cx="11002975" cy="0"/>
-          </a:xfrm>
-          <a:prstGeom prst="line">
-            <a:avLst/>
-          </a:prstGeom>
-          <a:ln w="9525">
-            <a:solidFill>
-              <a:srgbClr val="D3DCE4"/>
-            </a:solidFill>
-          </a:ln>
-        </p:spPr>
-        <p:style>
-          <a:lnRef idx="2">
-            <a:schemeClr val="accent1"/>
-          </a:lnRef>
-          <a:fillRef idx="0">
-            <a:schemeClr val="accent1"/>
-          </a:fillRef>
-          <a:effectRef idx="1">
-            <a:schemeClr val="accent1"/>
-          </a:effectRef>
-          <a:fontRef idx="minor">
-            <a:schemeClr val="tx1"/>
-          </a:fontRef>
-        </p:style>
-      </p:cxnSp>
-      <p:sp>
-        <p:nvSpPr>
-          <p:cNvPr id="13" name="TextBox 12"/>
-          <p:cNvSpPr txBox="1"/>
-          <p:nvPr/>
-        </p:nvSpPr>
-        <p:spPr>
-          <a:xfrm>
-            <a:off x="594360" y="4183379"/>
-            <a:ext cx="640080" cy="754380"/>
-          </a:xfrm>
-          <a:prstGeom prst="rect">
-            <a:avLst/>
-          </a:prstGeom>
-          <a:noFill/>
-        </p:spPr>
-        <p:txBody>
-          <a:bodyPr wrap="square" lIns="0" rIns="0" tIns="0" bIns="0" anchor="t">
-            <a:spAutoFit/>
-          </a:bodyPr>
-          <a:lstStyle/>
-          <a:p>
-            <a:pPr algn="l"/>
-            <a:r>
-              <a:rPr sz="2600" b="0" i="0">
-                <a:solidFill>
-                  <a:srgbClr val="E8772E"/>
-                </a:solidFill>
-                <a:latin typeface="Courier New"/>
-              </a:rPr>
-              <a:t>04</a:t>
-            </a:r>
-          </a:p>
-        </p:txBody>
-      </p:sp>
-      <p:sp>
-        <p:nvSpPr>
-          <p:cNvPr id="14" name="TextBox 13"/>
-          <p:cNvSpPr txBox="1"/>
-          <p:nvPr/>
-        </p:nvSpPr>
-        <p:spPr>
-          <a:xfrm>
-            <a:off x="1417320" y="4256531"/>
-            <a:ext cx="10180015" cy="662940"/>
-          </a:xfrm>
-          <a:prstGeom prst="rect">
-            <a:avLst/>
-          </a:prstGeom>
-          <a:noFill/>
-        </p:spPr>
-        <p:txBody>
-          <a:bodyPr wrap="square" lIns="0" rIns="0" tIns="0" bIns="0" anchor="t">
-            <a:spAutoFit/>
-          </a:bodyPr>
-          <a:lstStyle/>
-          <a:p>
-            <a:pPr algn="l"/>
-            <a:r>
-              <a:rPr sz="1400" b="0" i="0">
-                <a:solidFill>
-                  <a:srgbClr val="14324A"/>
-                </a:solidFill>
-                <a:latin typeface="Calibri"/>
-              </a:rPr>
-              <a:t>Fourth, prepare one shortlisted product by aggregation or de-identification, with a buyer-side review.</a:t>
-            </a:r>
-          </a:p>
-        </p:txBody>
-      </p:sp>
-      <p:cxnSp>
-        <p:nvCxnSpPr>
-          <p:cNvPr id="15" name="Connector 14"/>
-          <p:cNvCxnSpPr/>
-          <p:nvPr/>
-        </p:nvCxnSpPr>
-        <p:spPr>
-          <a:xfrm>
-            <a:off x="594360" y="4828031"/>
-            <a:ext cx="11002975" cy="0"/>
-          </a:xfrm>
-          <a:prstGeom prst="line">
-            <a:avLst/>
-          </a:prstGeom>
-          <a:ln w="9525">
-            <a:solidFill>
-              <a:srgbClr val="D3DCE4"/>
-            </a:solidFill>
-          </a:ln>
-        </p:spPr>
-        <p:style>
-          <a:lnRef idx="2">
-            <a:schemeClr val="accent1"/>
-          </a:lnRef>
-          <a:fillRef idx="0">
-            <a:schemeClr val="accent1"/>
-          </a:fillRef>
-          <a:effectRef idx="1">
-            <a:schemeClr val="accent1"/>
-          </a:effectRef>
-          <a:fontRef idx="minor">
-            <a:schemeClr val="tx1"/>
-          </a:fontRef>
-        </p:style>
-      </p:cxnSp>
-      <p:sp>
-        <p:nvSpPr>
-          <p:cNvPr id="16" name="TextBox 15"/>
-          <p:cNvSpPr txBox="1"/>
-          <p:nvPr/>
-        </p:nvSpPr>
-        <p:spPr>
-          <a:xfrm>
-            <a:off x="594360" y="4937760"/>
-            <a:ext cx="640080" cy="754380"/>
-          </a:xfrm>
-          <a:prstGeom prst="rect">
-            <a:avLst/>
-          </a:prstGeom>
-          <a:noFill/>
-        </p:spPr>
-        <p:txBody>
-          <a:bodyPr wrap="square" lIns="0" rIns="0" tIns="0" bIns="0" anchor="t">
-            <a:spAutoFit/>
-          </a:bodyPr>
-          <a:lstStyle/>
-          <a:p>
-            <a:pPr algn="l"/>
-            <a:r>
-              <a:rPr sz="2600" b="0" i="0">
-                <a:solidFill>
-                  <a:srgbClr val="E8772E"/>
-                </a:solidFill>
-                <a:latin typeface="Courier New"/>
-              </a:rPr>
-              <a:t>05</a:t>
-            </a:r>
-          </a:p>
-        </p:txBody>
-      </p:sp>
-      <p:sp>
-        <p:nvSpPr>
-          <p:cNvPr id="17" name="TextBox 16"/>
-          <p:cNvSpPr txBox="1"/>
-          <p:nvPr/>
-        </p:nvSpPr>
-        <p:spPr>
-          <a:xfrm>
-            <a:off x="1417320" y="5010912"/>
-            <a:ext cx="10180015" cy="662940"/>
-          </a:xfrm>
-          <a:prstGeom prst="rect">
-            <a:avLst/>
-          </a:prstGeom>
-          <a:noFill/>
-        </p:spPr>
-        <p:txBody>
-          <a:bodyPr wrap="square" lIns="0" rIns="0" tIns="0" bIns="0" anchor="t">
-            <a:spAutoFit/>
-          </a:bodyPr>
-          <a:lstStyle/>
-          <a:p>
-            <a:pPr algn="l"/>
-            <a:r>
-              <a:rPr sz="1400" b="0" i="0">
-                <a:solidFill>
-                  <a:srgbClr val="14324A"/>
-                </a:solidFill>
-                <a:latin typeface="Calibri"/>
-              </a:rPr>
-              <a:t>Keep database cleanup of about 15.2 GiB as a separate, narrower workstream.</a:t>
-            </a:r>
-          </a:p>
-        </p:txBody>
-      </p:sp>
-      <p:cxnSp>
-        <p:nvCxnSpPr>
-          <p:cNvPr id="18" name="Connector 17"/>
-          <p:cNvCxnSpPr/>
-          <p:nvPr/>
-        </p:nvCxnSpPr>
-        <p:spPr>
-          <a:xfrm>
-            <a:off x="594360" y="5582412"/>
-            <a:ext cx="11002975" cy="0"/>
-          </a:xfrm>
-          <a:prstGeom prst="line">
-            <a:avLst/>
-          </a:prstGeom>
-          <a:ln w="9525">
-            <a:solidFill>
-              <a:srgbClr val="D3DCE4"/>
-            </a:solidFill>
-          </a:ln>
-        </p:spPr>
-        <p:style>
-          <a:lnRef idx="2">
-            <a:schemeClr val="accent1"/>
-          </a:lnRef>
-          <a:fillRef idx="0">
-            <a:schemeClr val="accent1"/>
-          </a:fillRef>
-          <a:effectRef idx="1">
-            <a:schemeClr val="accent1"/>
-          </a:effectRef>
-          <a:fontRef idx="minor">
-            <a:schemeClr val="tx1"/>
-          </a:fontRef>
-        </p:style>
-      </p:cxnSp>
-      <p:sp>
-        <p:nvSpPr>
-          <p:cNvPr id="19" name="TextBox 18"/>
           <p:cNvSpPr txBox="1"/>
           <p:nvPr/>
         </p:nvSpPr>
@@ -39345,7 +40334,7 @@
       </p:sp>
       <p:sp>
         <p:nvSpPr>
-          <p:cNvPr id="20" name="TextBox 19"/>
+          <p:cNvPr id="8" name="TextBox 7"/>
           <p:cNvSpPr txBox="1"/>
           <p:nvPr/>
         </p:nvSpPr>
@@ -39380,7 +40369,7 @@
       </p:sp>
       <p:sp>
         <p:nvSpPr>
-          <p:cNvPr id="21" name="TextBox 20"/>
+          <p:cNvPr id="9" name="TextBox 8"/>
           <p:cNvSpPr txBox="1"/>
           <p:nvPr/>
         </p:nvSpPr>
@@ -39469,7 +40458,7 @@
                 </a:solidFill>
                 <a:latin typeface="Calibri"/>
               </a:rPr>
-              <a:t>LIMITS OF THE EVIDENCE</a:t>
+              <a:t>WHAT TO DO FIRST</a:t>
             </a:r>
           </a:p>
         </p:txBody>
@@ -39504,7 +40493,7 @@
                 </a:solidFill>
                 <a:latin typeface="Cambria"/>
               </a:rPr>
-              <a:t>Coverage, unreadable inventory and estimate quality limit how far the figures can be pushed</a:t>
+              <a:t>Verify cold data first, close the gaps, then prepare two products</a:t>
             </a:r>
           </a:p>
         </p:txBody>
@@ -39574,7 +40563,7 @@
                 </a:solidFill>
                 <a:latin typeface="Calibri"/>
               </a:rPr>
-              <a:t>Only 638 of 1006 tables were measured. Do not extend the sampled 71.8% personal-data marker share to the whole estate.</a:t>
+              <a:t>First, check read use and retrieval fees on 43 cold buckets before tiering; up to 986.5 USD a month.</a:t>
             </a:r>
           </a:p>
         </p:txBody>
@@ -39679,7 +40668,7 @@
                 </a:solidFill>
                 <a:latin typeface="Calibri"/>
               </a:rPr>
-              <a:t>40 buckets are unreadable, so their contents are unknown. Duplicate bytes of 7.7 TiB are candidates only.</a:t>
+              <a:t>Second, hash 7.7 TiB of duplicate candidates before removal; up to 180.3 USD a month.</a:t>
             </a:r>
           </a:p>
         </p:txBody>
@@ -39784,7 +40773,7 @@
                 </a:solidFill>
                 <a:latin typeface="Calibri"/>
               </a:rPr>
-              <a:t>The 1,174.4 USD monthly figure is a list-price upper bound. It excludes retrieval fees and is not the owner's invoice.</a:t>
+              <a:t>Third, reconcile 40 unreadable buckets and fingerprint 43.6 TiB of file shares.</a:t>
             </a:r>
           </a:p>
         </p:txBody>
@@ -39889,7 +40878,7 @@
                 </a:solidFill>
                 <a:latin typeface="Calibri"/>
               </a:rPr>
-              <a:t>Audio and transcript readings are model readings, not human labels, and workbench overlap with the staged corpus is unmeasured.</a:t>
+              <a:t>Fourth, prepare reference data and the content catalogue; database cleanup is bounded by 15.2 GiB.</a:t>
             </a:r>
           </a:p>
         </p:txBody>
@@ -40090,7 +41079,7 @@
                 </a:solidFill>
                 <a:latin typeface="Calibri"/>
               </a:rPr>
-              <a:t>COVERAGE AND LIMITS</a:t>
+              <a:t>WHAT WE CANNOT YET SAY</a:t>
             </a:r>
           </a:p>
         </p:txBody>
@@ -40125,7 +41114,7 @@
                 </a:solidFill>
                 <a:latin typeface="Cambria"/>
               </a:rPr>
-              <a:t>What this pack covers, what it cannot say, and what would close each gap</a:t>
+              <a:t>Savings, coverage and privacy conclusions carry limits that specific checks would close</a:t>
             </a:r>
           </a:p>
         </p:txBody>
@@ -40139,7 +41128,7 @@
         <p:spPr>
           <a:xfrm>
             <a:off x="594360" y="1920240"/>
-            <a:ext cx="11002975" cy="822960"/>
+            <a:ext cx="640080" cy="754380"/>
           </a:xfrm>
           <a:prstGeom prst="rect">
             <a:avLst/>
@@ -40154,143 +41143,61 @@
           <a:p>
             <a:pPr algn="l"/>
             <a:r>
+              <a:rPr sz="2600" b="0" i="0">
+                <a:solidFill>
+                  <a:srgbClr val="E8772E"/>
+                </a:solidFill>
+                <a:latin typeface="Courier New"/>
+              </a:rPr>
+              <a:t>01</a:t>
+            </a:r>
+          </a:p>
+        </p:txBody>
+      </p:sp>
+      <p:sp>
+        <p:nvSpPr>
+          <p:cNvPr id="5" name="TextBox 4"/>
+          <p:cNvSpPr txBox="1"/>
+          <p:nvPr/>
+        </p:nvSpPr>
+        <p:spPr>
+          <a:xfrm>
+            <a:off x="1417320" y="1993392"/>
+            <a:ext cx="10180015" cy="662940"/>
+          </a:xfrm>
+          <a:prstGeom prst="rect">
+            <a:avLst/>
+          </a:prstGeom>
+          <a:noFill/>
+        </p:spPr>
+        <p:txBody>
+          <a:bodyPr wrap="square" lIns="0" rIns="0" tIns="0" bIns="0" anchor="t">
+            <a:spAutoFit/>
+          </a:bodyPr>
+          <a:lstStyle/>
+          <a:p>
+            <a:pPr algn="l"/>
+            <a:r>
               <a:rPr sz="1400" b="0" i="0">
                 <a:solidFill>
                   <a:srgbClr val="14324A"/>
                 </a:solidFill>
                 <a:latin typeface="Calibri"/>
               </a:rPr>
-              <a:t>COVERS</a:t>
-            </a:r>
-          </a:p>
-          <a:p>
-            <a:pPr algn="l"/>
-            <a:r>
-              <a:rPr sz="1400" b="0" i="0">
-                <a:solidFill>
-                  <a:srgbClr val="14324A"/>
-                </a:solidFill>
-                <a:latin typeface="Calibri"/>
-              </a:rPr>
-              <a:t>The admitted estate as measured by census eij-1b359b3cbd2e: 20 databases, 1,006 tables (351.3 GiB), the object store, the file shares, the staged language corpus read by both GPUs and the written-word databases read as aggregates. No row value, script or transcript text is in this pack.</a:t>
-            </a:r>
-          </a:p>
-        </p:txBody>
-      </p:sp>
-      <p:sp>
-        <p:nvSpPr>
-          <p:cNvPr id="5" name="TextBox 4"/>
-          <p:cNvSpPr txBox="1"/>
-          <p:nvPr/>
-        </p:nvSpPr>
-        <p:spPr>
-          <a:xfrm>
-            <a:off x="594360" y="2834640"/>
-            <a:ext cx="3545738" cy="274320"/>
-          </a:xfrm>
-          <a:prstGeom prst="rect">
-            <a:avLst/>
-          </a:prstGeom>
-          <a:noFill/>
-        </p:spPr>
-        <p:txBody>
-          <a:bodyPr wrap="square" lIns="0" rIns="0" tIns="0" bIns="0" anchor="t">
-            <a:spAutoFit/>
-          </a:bodyPr>
-          <a:lstStyle/>
-          <a:p>
-            <a:pPr algn="l"/>
-            <a:r>
-              <a:rPr sz="1100" b="1" i="0">
-                <a:solidFill>
-                  <a:srgbClr val="70879A"/>
-                </a:solidFill>
-                <a:latin typeface="Calibri"/>
-              </a:rPr>
-              <a:t>CANNOT SAY</a:t>
-            </a:r>
-          </a:p>
-        </p:txBody>
-      </p:sp>
-      <p:sp>
-        <p:nvSpPr>
-          <p:cNvPr id="6" name="TextBox 5"/>
-          <p:cNvSpPr txBox="1"/>
-          <p:nvPr/>
-        </p:nvSpPr>
-        <p:spPr>
-          <a:xfrm>
-            <a:off x="4322978" y="2834640"/>
-            <a:ext cx="3545738" cy="274320"/>
-          </a:xfrm>
-          <a:prstGeom prst="rect">
-            <a:avLst/>
-          </a:prstGeom>
-          <a:noFill/>
-        </p:spPr>
-        <p:txBody>
-          <a:bodyPr wrap="square" lIns="0" rIns="0" tIns="0" bIns="0" anchor="t">
-            <a:spAutoFit/>
-          </a:bodyPr>
-          <a:lstStyle/>
-          <a:p>
-            <a:pPr algn="l"/>
-            <a:r>
-              <a:rPr sz="1100" b="1" i="0">
-                <a:solidFill>
-                  <a:srgbClr val="70879A"/>
-                </a:solidFill>
-                <a:latin typeface="Calibri"/>
-              </a:rPr>
-              <a:t>WHY</a:t>
-            </a:r>
-          </a:p>
-        </p:txBody>
-      </p:sp>
-      <p:sp>
-        <p:nvSpPr>
-          <p:cNvPr id="7" name="TextBox 6"/>
-          <p:cNvSpPr txBox="1"/>
-          <p:nvPr/>
-        </p:nvSpPr>
-        <p:spPr>
-          <a:xfrm>
-            <a:off x="8051596" y="2834640"/>
-            <a:ext cx="3545738" cy="274320"/>
-          </a:xfrm>
-          <a:prstGeom prst="rect">
-            <a:avLst/>
-          </a:prstGeom>
-          <a:noFill/>
-        </p:spPr>
-        <p:txBody>
-          <a:bodyPr wrap="square" lIns="0" rIns="0" tIns="0" bIns="0" anchor="t">
-            <a:spAutoFit/>
-          </a:bodyPr>
-          <a:lstStyle/>
-          <a:p>
-            <a:pPr algn="l"/>
-            <a:r>
-              <a:rPr sz="1100" b="1" i="0">
-                <a:solidFill>
-                  <a:srgbClr val="70879A"/>
-                </a:solidFill>
-                <a:latin typeface="Calibri"/>
-              </a:rPr>
-              <a:t>WHAT WOULD CLOSE IT</a:t>
+              <a:t>Database ratios rest on 638 of 1006 tables.</a:t>
             </a:r>
           </a:p>
         </p:txBody>
       </p:sp>
       <p:cxnSp>
         <p:nvCxnSpPr>
-          <p:cNvPr id="8" name="Connector 7"/>
+          <p:cNvPr id="6" name="Connector 5"/>
           <p:cNvCxnSpPr/>
           <p:nvPr/>
         </p:nvCxnSpPr>
         <p:spPr>
           <a:xfrm>
-            <a:off x="594360" y="3127248"/>
+            <a:off x="594360" y="2564891"/>
             <a:ext cx="11002975" cy="0"/>
           </a:xfrm>
           <a:prstGeom prst="line">
@@ -40298,7 +41205,7 @@
           </a:prstGeom>
           <a:ln w="9525">
             <a:solidFill>
-              <a:srgbClr val="14324A"/>
+              <a:srgbClr val="D3DCE4"/>
             </a:solidFill>
           </a:ln>
         </p:spPr>
@@ -40319,52 +41226,109 @@
       </p:cxnSp>
       <p:sp>
         <p:nvSpPr>
-          <p:cNvPr id="9" name="Rectangle 8"/>
-          <p:cNvSpPr/>
-          <p:nvPr/>
-        </p:nvSpPr>
-        <p:spPr>
-          <a:xfrm>
-            <a:off x="594360" y="3246120"/>
-            <a:ext cx="11002975" cy="786384"/>
-          </a:xfrm>
-          <a:prstGeom prst="rect">
-            <a:avLst/>
-          </a:prstGeom>
-          <a:pattFill>
-            <a:fgClr>
-              <a:srgbClr val="E8EEF3"/>
-            </a:fgClr>
-            <a:bgClr>
-              <a:srgbClr val="FFFFFF"/>
-            </a:bgClr>
-          </a:pattFill>
-          <a:ln>
-            <a:noFill/>
+          <p:cNvPr id="7" name="TextBox 6"/>
+          <p:cNvSpPr txBox="1"/>
+          <p:nvPr/>
+        </p:nvSpPr>
+        <p:spPr>
+          <a:xfrm>
+            <a:off x="594360" y="2674620"/>
+            <a:ext cx="640080" cy="754380"/>
+          </a:xfrm>
+          <a:prstGeom prst="rect">
+            <a:avLst/>
+          </a:prstGeom>
+          <a:noFill/>
+        </p:spPr>
+        <p:txBody>
+          <a:bodyPr wrap="square" lIns="0" rIns="0" tIns="0" bIns="0" anchor="t">
+            <a:spAutoFit/>
+          </a:bodyPr>
+          <a:lstStyle/>
+          <a:p>
+            <a:pPr algn="l"/>
+            <a:r>
+              <a:rPr sz="2600" b="0" i="0">
+                <a:solidFill>
+                  <a:srgbClr val="E8772E"/>
+                </a:solidFill>
+                <a:latin typeface="Courier New"/>
+              </a:rPr>
+              <a:t>02</a:t>
+            </a:r>
+          </a:p>
+        </p:txBody>
+      </p:sp>
+      <p:sp>
+        <p:nvSpPr>
+          <p:cNvPr id="8" name="TextBox 7"/>
+          <p:cNvSpPr txBox="1"/>
+          <p:nvPr/>
+        </p:nvSpPr>
+        <p:spPr>
+          <a:xfrm>
+            <a:off x="1417320" y="2747772"/>
+            <a:ext cx="10180015" cy="662940"/>
+          </a:xfrm>
+          <a:prstGeom prst="rect">
+            <a:avLst/>
+          </a:prstGeom>
+          <a:noFill/>
+        </p:spPr>
+        <p:txBody>
+          <a:bodyPr wrap="square" lIns="0" rIns="0" tIns="0" bIns="0" anchor="t">
+            <a:spAutoFit/>
+          </a:bodyPr>
+          <a:lstStyle/>
+          <a:p>
+            <a:pPr algn="l"/>
+            <a:r>
+              <a:rPr sz="1400" b="0" i="0">
+                <a:solidFill>
+                  <a:srgbClr val="14324A"/>
+                </a:solidFill>
+                <a:latin typeface="Calibri"/>
+              </a:rPr>
+              <a:t>Personal-data markers appear in 71.8% of sampled rows; absence of a marker is not absence of personal data.</a:t>
+            </a:r>
+          </a:p>
+        </p:txBody>
+      </p:sp>
+      <p:cxnSp>
+        <p:nvCxnSpPr>
+          <p:cNvPr id="9" name="Connector 8"/>
+          <p:cNvCxnSpPr/>
+          <p:nvPr/>
+        </p:nvCxnSpPr>
+        <p:spPr>
+          <a:xfrm>
+            <a:off x="594360" y="3319272"/>
+            <a:ext cx="11002975" cy="0"/>
+          </a:xfrm>
+          <a:prstGeom prst="line">
+            <a:avLst/>
+          </a:prstGeom>
+          <a:ln w="9525">
+            <a:solidFill>
+              <a:srgbClr val="D3DCE4"/>
+            </a:solidFill>
           </a:ln>
         </p:spPr>
         <p:style>
-          <a:lnRef idx="1">
+          <a:lnRef idx="2">
             <a:schemeClr val="accent1"/>
           </a:lnRef>
-          <a:fillRef idx="3">
+          <a:fillRef idx="0">
             <a:schemeClr val="accent1"/>
           </a:fillRef>
-          <a:effectRef idx="2">
+          <a:effectRef idx="1">
             <a:schemeClr val="accent1"/>
           </a:effectRef>
           <a:fontRef idx="minor">
-            <a:schemeClr val="lt1"/>
+            <a:schemeClr val="tx1"/>
           </a:fontRef>
         </p:style>
-        <p:txBody>
-          <a:bodyPr rtlCol="0" anchor="ctr"/>
-          <a:lstStyle/>
-          <a:p>
-            <a:pPr algn="ctr"/>
-          </a:p>
-        </p:txBody>
-      </p:sp>
+      </p:cxnSp>
       <p:sp>
         <p:nvSpPr>
           <p:cNvPr id="10" name="TextBox 9"/>
@@ -40373,8 +41337,8 @@
         </p:nvSpPr>
         <p:spPr>
           <a:xfrm>
-            <a:off x="667512" y="3319272"/>
-            <a:ext cx="3399434" cy="658368"/>
+            <a:off x="594360" y="3429000"/>
+            <a:ext cx="640080" cy="754380"/>
           </a:xfrm>
           <a:prstGeom prst="rect">
             <a:avLst/>
@@ -40389,132 +41353,119 @@
           <a:p>
             <a:pPr algn="l"/>
             <a:r>
-              <a:rPr sz="1300" b="0" i="0">
+              <a:rPr sz="2600" b="0" i="0">
+                <a:solidFill>
+                  <a:srgbClr val="E8772E"/>
+                </a:solidFill>
+                <a:latin typeface="Courier New"/>
+              </a:rPr>
+              <a:t>03</a:t>
+            </a:r>
+          </a:p>
+        </p:txBody>
+      </p:sp>
+      <p:sp>
+        <p:nvSpPr>
+          <p:cNvPr id="11" name="TextBox 10"/>
+          <p:cNvSpPr txBox="1"/>
+          <p:nvPr/>
+        </p:nvSpPr>
+        <p:spPr>
+          <a:xfrm>
+            <a:off x="1417320" y="3502152"/>
+            <a:ext cx="10180015" cy="662940"/>
+          </a:xfrm>
+          <a:prstGeom prst="rect">
+            <a:avLst/>
+          </a:prstGeom>
+          <a:noFill/>
+        </p:spPr>
+        <p:txBody>
+          <a:bodyPr wrap="square" lIns="0" rIns="0" tIns="0" bIns="0" anchor="t">
+            <a:spAutoFit/>
+          </a:bodyPr>
+          <a:lstStyle/>
+          <a:p>
+            <a:pPr algn="l"/>
+            <a:r>
+              <a:rPr sz="1400" b="0" i="0">
                 <a:solidFill>
                   <a:srgbClr val="14324A"/>
                 </a:solidFill>
                 <a:latin typeface="Calibri"/>
               </a:rPr>
-              <a:t>Duplicate, damage, empty-field and PII ratios on sampled tables</a:t>
-            </a:r>
-          </a:p>
-        </p:txBody>
-      </p:sp>
-      <p:sp>
-        <p:nvSpPr>
-          <p:cNvPr id="11" name="TextBox 10"/>
-          <p:cNvSpPr txBox="1"/>
-          <p:nvPr/>
-        </p:nvSpPr>
-        <p:spPr>
-          <a:xfrm>
-            <a:off x="4396130" y="3319272"/>
-            <a:ext cx="3399434" cy="658368"/>
-          </a:xfrm>
-          <a:prstGeom prst="rect">
-            <a:avLst/>
-          </a:prstGeom>
-          <a:noFill/>
-        </p:spPr>
-        <p:txBody>
-          <a:bodyPr wrap="square" lIns="0" rIns="0" tIns="0" bIns="0" anchor="t">
-            <a:spAutoFit/>
-          </a:bodyPr>
-          <a:lstStyle/>
-          <a:p>
-            <a:pPr algn="l"/>
-            <a:r>
-              <a:rPr sz="1300" b="0" i="0">
-                <a:solidFill>
-                  <a:srgbClr val="14324A"/>
-                </a:solidFill>
-                <a:latin typeface="Calibri"/>
-              </a:rPr>
-              <a:t>complete passes where the table allowed it, stratified samples elsewhere</a:t>
-            </a:r>
-          </a:p>
-        </p:txBody>
-      </p:sp>
-      <p:sp>
-        <p:nvSpPr>
-          <p:cNvPr id="12" name="TextBox 11"/>
-          <p:cNvSpPr txBox="1"/>
-          <p:nvPr/>
-        </p:nvSpPr>
-        <p:spPr>
-          <a:xfrm>
-            <a:off x="8124748" y="3319272"/>
-            <a:ext cx="3399434" cy="658368"/>
-          </a:xfrm>
-          <a:prstGeom prst="rect">
-            <a:avLst/>
-          </a:prstGeom>
-          <a:noFill/>
-        </p:spPr>
-        <p:txBody>
-          <a:bodyPr wrap="square" lIns="0" rIns="0" tIns="0" bIns="0" anchor="t">
-            <a:spAutoFit/>
-          </a:bodyPr>
-          <a:lstStyle/>
-          <a:p>
-            <a:pPr algn="l"/>
-            <a:r>
-              <a:rPr sz="1300" b="0" i="0">
-                <a:solidFill>
-                  <a:srgbClr val="14324A"/>
-                </a:solidFill>
-                <a:latin typeface="Calibri"/>
-              </a:rPr>
-              <a:t>a complete-pass census on the sampled tables</a:t>
-            </a:r>
-          </a:p>
-        </p:txBody>
-      </p:sp>
-      <p:sp>
-        <p:nvSpPr>
-          <p:cNvPr id="13" name="Rectangle 12"/>
-          <p:cNvSpPr/>
-          <p:nvPr/>
-        </p:nvSpPr>
-        <p:spPr>
-          <a:xfrm>
-            <a:off x="594360" y="4123944"/>
-            <a:ext cx="11002975" cy="786384"/>
-          </a:xfrm>
-          <a:prstGeom prst="rect">
-            <a:avLst/>
-          </a:prstGeom>
-          <a:pattFill>
-            <a:fgClr>
-              <a:srgbClr val="E8EEF3"/>
-            </a:fgClr>
-            <a:bgClr>
-              <a:srgbClr val="FFFFFF"/>
-            </a:bgClr>
-          </a:pattFill>
-          <a:ln>
-            <a:noFill/>
+              <a:t>The 7.7 TiB of duplicates are candidates until content hashing confirms them.</a:t>
+            </a:r>
+          </a:p>
+        </p:txBody>
+      </p:sp>
+      <p:cxnSp>
+        <p:nvCxnSpPr>
+          <p:cNvPr id="12" name="Connector 11"/>
+          <p:cNvCxnSpPr/>
+          <p:nvPr/>
+        </p:nvCxnSpPr>
+        <p:spPr>
+          <a:xfrm>
+            <a:off x="594360" y="4073652"/>
+            <a:ext cx="11002975" cy="0"/>
+          </a:xfrm>
+          <a:prstGeom prst="line">
+            <a:avLst/>
+          </a:prstGeom>
+          <a:ln w="9525">
+            <a:solidFill>
+              <a:srgbClr val="D3DCE4"/>
+            </a:solidFill>
           </a:ln>
         </p:spPr>
         <p:style>
-          <a:lnRef idx="1">
+          <a:lnRef idx="2">
             <a:schemeClr val="accent1"/>
           </a:lnRef>
-          <a:fillRef idx="3">
+          <a:fillRef idx="0">
             <a:schemeClr val="accent1"/>
           </a:fillRef>
-          <a:effectRef idx="2">
+          <a:effectRef idx="1">
             <a:schemeClr val="accent1"/>
           </a:effectRef>
           <a:fontRef idx="minor">
-            <a:schemeClr val="lt1"/>
+            <a:schemeClr val="tx1"/>
           </a:fontRef>
         </p:style>
-        <p:txBody>
-          <a:bodyPr rtlCol="0" anchor="ctr"/>
-          <a:lstStyle/>
-          <a:p>
-            <a:pPr algn="ctr"/>
+      </p:cxnSp>
+      <p:sp>
+        <p:nvSpPr>
+          <p:cNvPr id="13" name="TextBox 12"/>
+          <p:cNvSpPr txBox="1"/>
+          <p:nvPr/>
+        </p:nvSpPr>
+        <p:spPr>
+          <a:xfrm>
+            <a:off x="594360" y="4183379"/>
+            <a:ext cx="640080" cy="754380"/>
+          </a:xfrm>
+          <a:prstGeom prst="rect">
+            <a:avLst/>
+          </a:prstGeom>
+          <a:noFill/>
+        </p:spPr>
+        <p:txBody>
+          <a:bodyPr wrap="square" lIns="0" rIns="0" tIns="0" bIns="0" anchor="t">
+            <a:spAutoFit/>
+          </a:bodyPr>
+          <a:lstStyle/>
+          <a:p>
+            <a:pPr algn="l"/>
+            <a:r>
+              <a:rPr sz="2600" b="0" i="0">
+                <a:solidFill>
+                  <a:srgbClr val="E8772E"/>
+                </a:solidFill>
+                <a:latin typeface="Courier New"/>
+              </a:rPr>
+              <a:t>04</a:t>
+            </a:r>
           </a:p>
         </p:txBody>
       </p:sp>
@@ -40526,8 +41477,8 @@
         </p:nvSpPr>
         <p:spPr>
           <a:xfrm>
-            <a:off x="667512" y="4197096"/>
-            <a:ext cx="3399434" cy="658368"/>
+            <a:off x="1417320" y="4256531"/>
+            <a:ext cx="10180015" cy="662940"/>
           </a:xfrm>
           <a:prstGeom prst="rect">
             <a:avLst/>
@@ -40542,145 +41493,62 @@
           <a:p>
             <a:pPr algn="l"/>
             <a:r>
-              <a:rPr sz="1300" b="0" i="0">
+              <a:rPr sz="1400" b="0" i="0">
                 <a:solidFill>
                   <a:srgbClr val="14324A"/>
                 </a:solidFill>
                 <a:latin typeface="Calibri"/>
               </a:rPr>
-              <a:t>Semantic similarity between candidate datasets and the market</a:t>
-            </a:r>
-          </a:p>
-        </p:txBody>
-      </p:sp>
-      <p:sp>
-        <p:nvSpPr>
-          <p:cNvPr id="15" name="TextBox 14"/>
-          <p:cNvSpPr txBox="1"/>
-          <p:nvPr/>
-        </p:nvSpPr>
-        <p:spPr>
-          <a:xfrm>
-            <a:off x="4396130" y="4197096"/>
-            <a:ext cx="3399434" cy="658368"/>
-          </a:xfrm>
-          <a:prstGeom prst="rect">
-            <a:avLst/>
-          </a:prstGeom>
-          <a:noFill/>
-        </p:spPr>
-        <p:txBody>
-          <a:bodyPr wrap="square" lIns="0" rIns="0" tIns="0" bIns="0" anchor="t">
-            <a:spAutoFit/>
-          </a:bodyPr>
-          <a:lstStyle/>
-          <a:p>
-            <a:pPr algn="l"/>
-            <a:r>
-              <a:rPr sz="1300" b="0" i="0">
-                <a:solidFill>
-                  <a:srgbClr val="14324A"/>
-                </a:solidFill>
-                <a:latin typeface="Calibri"/>
-              </a:rPr>
-              <a:t>not measured; candidates are dimensional readiness only</a:t>
-            </a:r>
-          </a:p>
-        </p:txBody>
-      </p:sp>
-      <p:sp>
-        <p:nvSpPr>
-          <p:cNvPr id="16" name="TextBox 15"/>
-          <p:cNvSpPr txBox="1"/>
-          <p:nvPr/>
-        </p:nvSpPr>
-        <p:spPr>
-          <a:xfrm>
-            <a:off x="8124748" y="4197096"/>
-            <a:ext cx="3399434" cy="658368"/>
-          </a:xfrm>
-          <a:prstGeom prst="rect">
-            <a:avLst/>
-          </a:prstGeom>
-          <a:noFill/>
-        </p:spPr>
-        <p:txBody>
-          <a:bodyPr wrap="square" lIns="0" rIns="0" tIns="0" bIns="0" anchor="t">
-            <a:spAutoFit/>
-          </a:bodyPr>
-          <a:lstStyle/>
-          <a:p>
-            <a:pPr algn="l"/>
-            <a:r>
-              <a:rPr sz="1300" b="0" i="0">
-                <a:solidFill>
-                  <a:srgbClr val="14324A"/>
-                </a:solidFill>
-                <a:latin typeface="Calibri"/>
-              </a:rPr>
-              <a:t>a buyer-side review of each candidate against its intended use</a:t>
-            </a:r>
-          </a:p>
-        </p:txBody>
-      </p:sp>
-      <p:sp>
-        <p:nvSpPr>
-          <p:cNvPr id="17" name="Rectangle 16"/>
-          <p:cNvSpPr/>
-          <p:nvPr/>
-        </p:nvSpPr>
-        <p:spPr>
-          <a:xfrm>
-            <a:off x="594360" y="5001768"/>
-            <a:ext cx="11002975" cy="786384"/>
-          </a:xfrm>
-          <a:prstGeom prst="rect">
-            <a:avLst/>
-          </a:prstGeom>
-          <a:pattFill>
-            <a:fgClr>
-              <a:srgbClr val="E8EEF3"/>
-            </a:fgClr>
-            <a:bgClr>
-              <a:srgbClr val="FFFFFF"/>
-            </a:bgClr>
-          </a:pattFill>
-          <a:ln>
-            <a:noFill/>
+              <a:t>The 1,174.4 USD figure is a list-price upper bound, and cold bytes may still be read.</a:t>
+            </a:r>
+          </a:p>
+        </p:txBody>
+      </p:sp>
+      <p:cxnSp>
+        <p:nvCxnSpPr>
+          <p:cNvPr id="15" name="Connector 14"/>
+          <p:cNvCxnSpPr/>
+          <p:nvPr/>
+        </p:nvCxnSpPr>
+        <p:spPr>
+          <a:xfrm>
+            <a:off x="594360" y="4828031"/>
+            <a:ext cx="11002975" cy="0"/>
+          </a:xfrm>
+          <a:prstGeom prst="line">
+            <a:avLst/>
+          </a:prstGeom>
+          <a:ln w="9525">
+            <a:solidFill>
+              <a:srgbClr val="D3DCE4"/>
+            </a:solidFill>
           </a:ln>
         </p:spPr>
         <p:style>
-          <a:lnRef idx="1">
+          <a:lnRef idx="2">
             <a:schemeClr val="accent1"/>
           </a:lnRef>
-          <a:fillRef idx="3">
+          <a:fillRef idx="0">
             <a:schemeClr val="accent1"/>
           </a:fillRef>
-          <a:effectRef idx="2">
+          <a:effectRef idx="1">
             <a:schemeClr val="accent1"/>
           </a:effectRef>
           <a:fontRef idx="minor">
-            <a:schemeClr val="lt1"/>
+            <a:schemeClr val="tx1"/>
           </a:fontRef>
         </p:style>
-        <p:txBody>
-          <a:bodyPr rtlCol="0" anchor="ctr"/>
-          <a:lstStyle/>
-          <a:p>
-            <a:pPr algn="ctr"/>
-          </a:p>
-        </p:txBody>
-      </p:sp>
-      <p:sp>
-        <p:nvSpPr>
-          <p:cNvPr id="18" name="TextBox 17"/>
-          <p:cNvSpPr txBox="1"/>
-          <p:nvPr/>
-        </p:nvSpPr>
-        <p:spPr>
-          <a:xfrm>
-            <a:off x="667512" y="5074920"/>
-            <a:ext cx="3399434" cy="658368"/>
+      </p:cxnSp>
+      <p:sp>
+        <p:nvSpPr>
+          <p:cNvPr id="16" name="TextBox 15"/>
+          <p:cNvSpPr txBox="1"/>
+          <p:nvPr/>
+        </p:nvSpPr>
+        <p:spPr>
+          <a:xfrm>
+            <a:off x="594360" y="4937760"/>
+            <a:ext cx="640080" cy="754380"/>
           </a:xfrm>
           <a:prstGeom prst="rect">
             <a:avLst/>
@@ -40695,702 +41563,90 @@
           <a:p>
             <a:pPr algn="l"/>
             <a:r>
-              <a:rPr sz="1300" b="0" i="0">
+              <a:rPr sz="2600" b="0" i="0">
+                <a:solidFill>
+                  <a:srgbClr val="E8772E"/>
+                </a:solidFill>
+                <a:latin typeface="Courier New"/>
+              </a:rPr>
+              <a:t>05</a:t>
+            </a:r>
+          </a:p>
+        </p:txBody>
+      </p:sp>
+      <p:sp>
+        <p:nvSpPr>
+          <p:cNvPr id="17" name="TextBox 16"/>
+          <p:cNvSpPr txBox="1"/>
+          <p:nvPr/>
+        </p:nvSpPr>
+        <p:spPr>
+          <a:xfrm>
+            <a:off x="1417320" y="5010912"/>
+            <a:ext cx="10180015" cy="662940"/>
+          </a:xfrm>
+          <a:prstGeom prst="rect">
+            <a:avLst/>
+          </a:prstGeom>
+          <a:noFill/>
+        </p:spPr>
+        <p:txBody>
+          <a:bodyPr wrap="square" lIns="0" rIns="0" tIns="0" bIns="0" anchor="t">
+            <a:spAutoFit/>
+          </a:bodyPr>
+          <a:lstStyle/>
+          <a:p>
+            <a:pPr algn="l"/>
+            <a:r>
+              <a:rPr sz="1400" b="0" i="0">
                 <a:solidFill>
                   <a:srgbClr val="14324A"/>
                 </a:solidFill>
                 <a:latin typeface="Calibri"/>
               </a:rPr>
-              <a:t>Connection artists_app</a:t>
-            </a:r>
-          </a:p>
-        </p:txBody>
-      </p:sp>
-      <p:sp>
-        <p:nvSpPr>
-          <p:cNvPr id="19" name="TextBox 18"/>
-          <p:cNvSpPr txBox="1"/>
-          <p:nvPr/>
-        </p:nvSpPr>
-        <p:spPr>
-          <a:xfrm>
-            <a:off x="4396130" y="5074920"/>
-            <a:ext cx="3399434" cy="658368"/>
-          </a:xfrm>
-          <a:prstGeom prst="rect">
-            <a:avLst/>
-          </a:prstGeom>
-          <a:noFill/>
-        </p:spPr>
-        <p:txBody>
-          <a:bodyPr wrap="square" lIns="0" rIns="0" tIns="0" bIns="0" anchor="t">
-            <a:spAutoFit/>
-          </a:bodyPr>
-          <a:lstStyle/>
-          <a:p>
-            <a:pPr algn="l"/>
-            <a:r>
-              <a:rPr sz="1300" b="0" i="0">
-                <a:solidFill>
-                  <a:srgbClr val="14324A"/>
-                </a:solidFill>
-                <a:latin typeface="Calibri"/>
-              </a:rPr>
-              <a:t>could not be read (MySQL GRANT pending)</a:t>
-            </a:r>
-          </a:p>
-        </p:txBody>
-      </p:sp>
-      <p:sp>
-        <p:nvSpPr>
-          <p:cNvPr id="20" name="TextBox 19"/>
-          <p:cNvSpPr txBox="1"/>
-          <p:nvPr/>
-        </p:nvSpPr>
-        <p:spPr>
-          <a:xfrm>
-            <a:off x="8124748" y="5074920"/>
-            <a:ext cx="3399434" cy="658368"/>
-          </a:xfrm>
-          <a:prstGeom prst="rect">
-            <a:avLst/>
-          </a:prstGeom>
-          <a:noFill/>
-        </p:spPr>
-        <p:txBody>
-          <a:bodyPr wrap="square" lIns="0" rIns="0" tIns="0" bIns="0" anchor="t">
-            <a:spAutoFit/>
-          </a:bodyPr>
-          <a:lstStyle/>
-          <a:p>
-            <a:pPr algn="l"/>
-            <a:r>
-              <a:rPr sz="1300" b="0" i="0">
-                <a:solidFill>
-                  <a:srgbClr val="14324A"/>
-                </a:solidFill>
-                <a:latin typeface="Calibri"/>
-              </a:rPr>
-              <a:t>owner grants read access; re-census</a:t>
-            </a:r>
-          </a:p>
-        </p:txBody>
-      </p:sp>
-      <p:sp>
-        <p:nvSpPr>
-          <p:cNvPr id="21" name="Rectangle 20"/>
-          <p:cNvSpPr/>
-          <p:nvPr/>
-        </p:nvSpPr>
-        <p:spPr>
-          <a:xfrm>
-            <a:off x="594360" y="5879592"/>
-            <a:ext cx="11002975" cy="786384"/>
-          </a:xfrm>
-          <a:prstGeom prst="rect">
-            <a:avLst/>
-          </a:prstGeom>
-          <a:pattFill>
-            <a:fgClr>
-              <a:srgbClr val="E8EEF3"/>
-            </a:fgClr>
-            <a:bgClr>
-              <a:srgbClr val="FFFFFF"/>
-            </a:bgClr>
-          </a:pattFill>
-          <a:ln>
-            <a:noFill/>
+              <a:t>Language, noise and intelligibility were not human-verified.</a:t>
+            </a:r>
+          </a:p>
+        </p:txBody>
+      </p:sp>
+      <p:cxnSp>
+        <p:nvCxnSpPr>
+          <p:cNvPr id="18" name="Connector 17"/>
+          <p:cNvCxnSpPr/>
+          <p:nvPr/>
+        </p:nvCxnSpPr>
+        <p:spPr>
+          <a:xfrm>
+            <a:off x="594360" y="5582412"/>
+            <a:ext cx="11002975" cy="0"/>
+          </a:xfrm>
+          <a:prstGeom prst="line">
+            <a:avLst/>
+          </a:prstGeom>
+          <a:ln w="9525">
+            <a:solidFill>
+              <a:srgbClr val="D3DCE4"/>
+            </a:solidFill>
           </a:ln>
         </p:spPr>
         <p:style>
-          <a:lnRef idx="1">
+          <a:lnRef idx="2">
             <a:schemeClr val="accent1"/>
           </a:lnRef>
-          <a:fillRef idx="3">
+          <a:fillRef idx="0">
             <a:schemeClr val="accent1"/>
           </a:fillRef>
-          <a:effectRef idx="2">
+          <a:effectRef idx="1">
             <a:schemeClr val="accent1"/>
           </a:effectRef>
           <a:fontRef idx="minor">
-            <a:schemeClr val="lt1"/>
+            <a:schemeClr val="tx1"/>
           </a:fontRef>
         </p:style>
-        <p:txBody>
-          <a:bodyPr rtlCol="0" anchor="ctr"/>
-          <a:lstStyle/>
-          <a:p>
-            <a:pPr algn="ctr"/>
-          </a:p>
-        </p:txBody>
-      </p:sp>
-      <p:sp>
-        <p:nvSpPr>
-          <p:cNvPr id="22" name="TextBox 21"/>
-          <p:cNvSpPr txBox="1"/>
-          <p:nvPr/>
-        </p:nvSpPr>
-        <p:spPr>
-          <a:xfrm>
-            <a:off x="667512" y="5952744"/>
-            <a:ext cx="3399434" cy="658368"/>
-          </a:xfrm>
-          <a:prstGeom prst="rect">
-            <a:avLst/>
-          </a:prstGeom>
-          <a:noFill/>
-        </p:spPr>
-        <p:txBody>
-          <a:bodyPr wrap="square" lIns="0" rIns="0" tIns="0" bIns="0" anchor="t">
-            <a:spAutoFit/>
-          </a:bodyPr>
-          <a:lstStyle/>
-          <a:p>
-            <a:pPr algn="l"/>
-            <a:r>
-              <a:rPr sz="1300" b="0" i="0">
-                <a:solidFill>
-                  <a:srgbClr val="14324A"/>
-                </a:solidFill>
-                <a:latin typeface="Calibri"/>
-              </a:rPr>
-              <a:t>NAS duplication</a:t>
-            </a:r>
-          </a:p>
-        </p:txBody>
-      </p:sp>
-      <p:sp>
-        <p:nvSpPr>
-          <p:cNvPr id="23" name="TextBox 22"/>
-          <p:cNvSpPr txBox="1"/>
-          <p:nvPr/>
-        </p:nvSpPr>
-        <p:spPr>
-          <a:xfrm>
-            <a:off x="4396130" y="5952744"/>
-            <a:ext cx="3399434" cy="658368"/>
-          </a:xfrm>
-          <a:prstGeom prst="rect">
-            <a:avLst/>
-          </a:prstGeom>
-          <a:noFill/>
-        </p:spPr>
-        <p:txBody>
-          <a:bodyPr wrap="square" lIns="0" rIns="0" tIns="0" bIns="0" anchor="t">
-            <a:spAutoFit/>
-          </a:bodyPr>
-          <a:lstStyle/>
-          <a:p>
-            <a:pPr algn="l"/>
-            <a:r>
-              <a:rPr sz="1300" b="0" i="0">
-                <a:solidFill>
-                  <a:srgbClr val="14324A"/>
-                </a:solidFill>
-                <a:latin typeface="Calibri"/>
-              </a:rPr>
-              <a:t>the enumeration recorded sizes and dates, not content fingerprints</a:t>
-            </a:r>
-          </a:p>
-        </p:txBody>
-      </p:sp>
-      <p:sp>
-        <p:nvSpPr>
-          <p:cNvPr id="24" name="TextBox 23"/>
-          <p:cNvSpPr txBox="1"/>
-          <p:nvPr/>
-        </p:nvSpPr>
-        <p:spPr>
-          <a:xfrm>
-            <a:off x="8124748" y="5952744"/>
-            <a:ext cx="3399434" cy="658368"/>
-          </a:xfrm>
-          <a:prstGeom prst="rect">
-            <a:avLst/>
-          </a:prstGeom>
-          <a:noFill/>
-        </p:spPr>
-        <p:txBody>
-          <a:bodyPr wrap="square" lIns="0" rIns="0" tIns="0" bIns="0" anchor="t">
-            <a:spAutoFit/>
-          </a:bodyPr>
-          <a:lstStyle/>
-          <a:p>
-            <a:pPr algn="l"/>
-            <a:r>
-              <a:rPr sz="1300" b="0" i="0">
-                <a:solidFill>
-                  <a:srgbClr val="14324A"/>
-                </a:solidFill>
-                <a:latin typeface="Calibri"/>
-              </a:rPr>
-              <a:t>a fingerprinting pass over the NAS shares</a:t>
-            </a:r>
-          </a:p>
-        </p:txBody>
-      </p:sp>
-      <p:sp>
-        <p:nvSpPr>
-          <p:cNvPr id="25" name="Rectangle 24"/>
-          <p:cNvSpPr/>
-          <p:nvPr/>
-        </p:nvSpPr>
-        <p:spPr>
-          <a:xfrm>
-            <a:off x="594360" y="6757416"/>
-            <a:ext cx="11002975" cy="786384"/>
-          </a:xfrm>
-          <a:prstGeom prst="rect">
-            <a:avLst/>
-          </a:prstGeom>
-          <a:pattFill>
-            <a:fgClr>
-              <a:srgbClr val="E8EEF3"/>
-            </a:fgClr>
-            <a:bgClr>
-              <a:srgbClr val="FFFFFF"/>
-            </a:bgClr>
-          </a:pattFill>
-          <a:ln>
-            <a:noFill/>
-          </a:ln>
-        </p:spPr>
-        <p:style>
-          <a:lnRef idx="1">
-            <a:schemeClr val="accent1"/>
-          </a:lnRef>
-          <a:fillRef idx="3">
-            <a:schemeClr val="accent1"/>
-          </a:fillRef>
-          <a:effectRef idx="2">
-            <a:schemeClr val="accent1"/>
-          </a:effectRef>
-          <a:fontRef idx="minor">
-            <a:schemeClr val="lt1"/>
-          </a:fontRef>
-        </p:style>
-        <p:txBody>
-          <a:bodyPr rtlCol="0" anchor="ctr"/>
-          <a:lstStyle/>
-          <a:p>
-            <a:pPr algn="ctr"/>
-          </a:p>
-        </p:txBody>
-      </p:sp>
-      <p:sp>
-        <p:nvSpPr>
-          <p:cNvPr id="26" name="TextBox 25"/>
-          <p:cNvSpPr txBox="1"/>
-          <p:nvPr/>
-        </p:nvSpPr>
-        <p:spPr>
-          <a:xfrm>
-            <a:off x="667512" y="6830568"/>
-            <a:ext cx="3399434" cy="658368"/>
-          </a:xfrm>
-          <a:prstGeom prst="rect">
-            <a:avLst/>
-          </a:prstGeom>
-          <a:noFill/>
-        </p:spPr>
-        <p:txBody>
-          <a:bodyPr wrap="square" lIns="0" rIns="0" tIns="0" bIns="0" anchor="t">
-            <a:spAutoFit/>
-          </a:bodyPr>
-          <a:lstStyle/>
-          <a:p>
-            <a:pPr algn="l"/>
-            <a:r>
-              <a:rPr sz="1300" b="0" i="0">
-                <a:solidFill>
-                  <a:srgbClr val="14324A"/>
-                </a:solidFill>
-                <a:latin typeface="Calibri"/>
-              </a:rPr>
-              <a:t>40 of 106 OBS buckets</a:t>
-            </a:r>
-          </a:p>
-        </p:txBody>
-      </p:sp>
-      <p:sp>
-        <p:nvSpPr>
-          <p:cNvPr id="27" name="TextBox 26"/>
-          <p:cNvSpPr txBox="1"/>
-          <p:nvPr/>
-        </p:nvSpPr>
-        <p:spPr>
-          <a:xfrm>
-            <a:off x="4396130" y="6830568"/>
-            <a:ext cx="3399434" cy="658368"/>
-          </a:xfrm>
-          <a:prstGeom prst="rect">
-            <a:avLst/>
-          </a:prstGeom>
-          <a:noFill/>
-        </p:spPr>
-        <p:txBody>
-          <a:bodyPr wrap="square" lIns="0" rIns="0" tIns="0" bIns="0" anchor="t">
-            <a:spAutoFit/>
-          </a:bodyPr>
-          <a:lstStyle/>
-          <a:p>
-            <a:pPr algn="l"/>
-            <a:r>
-              <a:rPr sz="1300" b="0" i="0">
-                <a:solidFill>
-                  <a:srgbClr val="14324A"/>
-                </a:solidFill>
-                <a:latin typeface="Calibri"/>
-              </a:rPr>
-              <a:t>unreachable (NoSuchBucket / client errors)</a:t>
-            </a:r>
-          </a:p>
-        </p:txBody>
-      </p:sp>
-      <p:sp>
-        <p:nvSpPr>
-          <p:cNvPr id="28" name="TextBox 27"/>
-          <p:cNvSpPr txBox="1"/>
-          <p:nvPr/>
-        </p:nvSpPr>
-        <p:spPr>
-          <a:xfrm>
-            <a:off x="8124748" y="6830568"/>
-            <a:ext cx="3399434" cy="658368"/>
-          </a:xfrm>
-          <a:prstGeom prst="rect">
-            <a:avLst/>
-          </a:prstGeom>
-          <a:noFill/>
-        </p:spPr>
-        <p:txBody>
-          <a:bodyPr wrap="square" lIns="0" rIns="0" tIns="0" bIns="0" anchor="t">
-            <a:spAutoFit/>
-          </a:bodyPr>
-          <a:lstStyle/>
-          <a:p>
-            <a:pPr algn="l"/>
-            <a:r>
-              <a:rPr sz="1300" b="0" i="0">
-                <a:solidFill>
-                  <a:srgbClr val="14324A"/>
-                </a:solidFill>
-                <a:latin typeface="Calibri"/>
-              </a:rPr>
-              <a:t>bucket inventory reconciled with the provider</a:t>
-            </a:r>
-          </a:p>
-        </p:txBody>
-      </p:sp>
-      <p:sp>
-        <p:nvSpPr>
-          <p:cNvPr id="29" name="Rectangle 28"/>
-          <p:cNvSpPr/>
-          <p:nvPr/>
-        </p:nvSpPr>
-        <p:spPr>
-          <a:xfrm>
-            <a:off x="594360" y="7635240"/>
-            <a:ext cx="11002975" cy="786384"/>
-          </a:xfrm>
-          <a:prstGeom prst="rect">
-            <a:avLst/>
-          </a:prstGeom>
-          <a:pattFill>
-            <a:fgClr>
-              <a:srgbClr val="E8EEF3"/>
-            </a:fgClr>
-            <a:bgClr>
-              <a:srgbClr val="FFFFFF"/>
-            </a:bgClr>
-          </a:pattFill>
-          <a:ln>
-            <a:noFill/>
-          </a:ln>
-        </p:spPr>
-        <p:style>
-          <a:lnRef idx="1">
-            <a:schemeClr val="accent1"/>
-          </a:lnRef>
-          <a:fillRef idx="3">
-            <a:schemeClr val="accent1"/>
-          </a:fillRef>
-          <a:effectRef idx="2">
-            <a:schemeClr val="accent1"/>
-          </a:effectRef>
-          <a:fontRef idx="minor">
-            <a:schemeClr val="lt1"/>
-          </a:fontRef>
-        </p:style>
-        <p:txBody>
-          <a:bodyPr rtlCol="0" anchor="ctr"/>
-          <a:lstStyle/>
-          <a:p>
-            <a:pPr algn="ctr"/>
-          </a:p>
-        </p:txBody>
-      </p:sp>
-      <p:sp>
-        <p:nvSpPr>
-          <p:cNvPr id="30" name="TextBox 29"/>
-          <p:cNvSpPr txBox="1"/>
-          <p:nvPr/>
-        </p:nvSpPr>
-        <p:spPr>
-          <a:xfrm>
-            <a:off x="667512" y="7708392"/>
-            <a:ext cx="3399434" cy="658368"/>
-          </a:xfrm>
-          <a:prstGeom prst="rect">
-            <a:avLst/>
-          </a:prstGeom>
-          <a:noFill/>
-        </p:spPr>
-        <p:txBody>
-          <a:bodyPr wrap="square" lIns="0" rIns="0" tIns="0" bIns="0" anchor="t">
-            <a:spAutoFit/>
-          </a:bodyPr>
-          <a:lstStyle/>
-          <a:p>
-            <a:pPr algn="l"/>
-            <a:r>
-              <a:rPr sz="1300" b="0" i="0">
-                <a:solidFill>
-                  <a:srgbClr val="14324A"/>
-                </a:solidFill>
-                <a:latin typeface="Calibri"/>
-              </a:rPr>
-              <a:t>Language of each news script</a:t>
-            </a:r>
-          </a:p>
-        </p:txBody>
-      </p:sp>
-      <p:sp>
-        <p:nvSpPr>
-          <p:cNvPr id="31" name="TextBox 30"/>
-          <p:cNvSpPr txBox="1"/>
-          <p:nvPr/>
-        </p:nvSpPr>
-        <p:spPr>
-          <a:xfrm>
-            <a:off x="4396130" y="7708392"/>
-            <a:ext cx="3399434" cy="658368"/>
-          </a:xfrm>
-          <a:prstGeom prst="rect">
-            <a:avLst/>
-          </a:prstGeom>
-          <a:noFill/>
-        </p:spPr>
-        <p:txBody>
-          <a:bodyPr wrap="square" lIns="0" rIns="0" tIns="0" bIns="0" anchor="t">
-            <a:spAutoFit/>
-          </a:bodyPr>
-          <a:lstStyle/>
-          <a:p>
-            <a:pPr algn="l"/>
-            <a:r>
-              <a:rPr sz="1300" b="0" i="0">
-                <a:solidFill>
-                  <a:srgbClr val="14324A"/>
-                </a:solidFill>
-                <a:latin typeface="Calibri"/>
-              </a:rPr>
-              <a:t>the scripts were counted and sized, not read; the language shown is the station's broadcast language from the estate's own table</a:t>
-            </a:r>
-          </a:p>
-        </p:txBody>
-      </p:sp>
-      <p:sp>
-        <p:nvSpPr>
-          <p:cNvPr id="32" name="TextBox 31"/>
-          <p:cNvSpPr txBox="1"/>
-          <p:nvPr/>
-        </p:nvSpPr>
-        <p:spPr>
-          <a:xfrm>
-            <a:off x="8124748" y="7708392"/>
-            <a:ext cx="3399434" cy="658368"/>
-          </a:xfrm>
-          <a:prstGeom prst="rect">
-            <a:avLst/>
-          </a:prstGeom>
-          <a:noFill/>
-        </p:spPr>
-        <p:txBody>
-          <a:bodyPr wrap="square" lIns="0" rIns="0" tIns="0" bIns="0" anchor="t">
-            <a:spAutoFit/>
-          </a:bodyPr>
-          <a:lstStyle/>
-          <a:p>
-            <a:pPr algn="l"/>
-            <a:r>
-              <a:rPr sz="1300" b="0" i="0">
-                <a:solidFill>
-                  <a:srgbClr val="14324A"/>
-                </a:solidFill>
-                <a:latin typeface="Calibri"/>
-              </a:rPr>
-              <a:t>a text-model pass over the script column under the same aggregate-only seam</a:t>
-            </a:r>
-          </a:p>
-        </p:txBody>
-      </p:sp>
-      <p:sp>
-        <p:nvSpPr>
-          <p:cNvPr id="33" name="Rectangle 32"/>
-          <p:cNvSpPr/>
-          <p:nvPr/>
-        </p:nvSpPr>
-        <p:spPr>
-          <a:xfrm>
-            <a:off x="594360" y="8513063"/>
-            <a:ext cx="11002975" cy="786384"/>
-          </a:xfrm>
-          <a:prstGeom prst="rect">
-            <a:avLst/>
-          </a:prstGeom>
-          <a:pattFill>
-            <a:fgClr>
-              <a:srgbClr val="E8EEF3"/>
-            </a:fgClr>
-            <a:bgClr>
-              <a:srgbClr val="FFFFFF"/>
-            </a:bgClr>
-          </a:pattFill>
-          <a:ln>
-            <a:noFill/>
-          </a:ln>
-        </p:spPr>
-        <p:style>
-          <a:lnRef idx="1">
-            <a:schemeClr val="accent1"/>
-          </a:lnRef>
-          <a:fillRef idx="3">
-            <a:schemeClr val="accent1"/>
-          </a:fillRef>
-          <a:effectRef idx="2">
-            <a:schemeClr val="accent1"/>
-          </a:effectRef>
-          <a:fontRef idx="minor">
-            <a:schemeClr val="lt1"/>
-          </a:fontRef>
-        </p:style>
-        <p:txBody>
-          <a:bodyPr rtlCol="0" anchor="ctr"/>
-          <a:lstStyle/>
-          <a:p>
-            <a:pPr algn="ctr"/>
-          </a:p>
-        </p:txBody>
-      </p:sp>
-      <p:sp>
-        <p:nvSpPr>
-          <p:cNvPr id="34" name="TextBox 33"/>
-          <p:cNvSpPr txBox="1"/>
-          <p:nvPr/>
-        </p:nvSpPr>
-        <p:spPr>
-          <a:xfrm>
-            <a:off x="667512" y="8586215"/>
-            <a:ext cx="3399434" cy="658368"/>
-          </a:xfrm>
-          <a:prstGeom prst="rect">
-            <a:avLst/>
-          </a:prstGeom>
-          <a:noFill/>
-        </p:spPr>
-        <p:txBody>
-          <a:bodyPr wrap="square" lIns="0" rIns="0" tIns="0" bIns="0" anchor="t">
-            <a:spAutoFit/>
-          </a:bodyPr>
-          <a:lstStyle/>
-          <a:p>
-            <a:pPr algn="l"/>
-            <a:r>
-              <a:rPr sz="1300" b="0" i="0">
-                <a:solidFill>
-                  <a:srgbClr val="14324A"/>
-                </a:solidFill>
-                <a:latin typeface="Calibri"/>
-              </a:rPr>
-              <a:t>Overlap between the workbench recordings and the staged corpus</a:t>
-            </a:r>
-          </a:p>
-        </p:txBody>
-      </p:sp>
-      <p:sp>
-        <p:nvSpPr>
-          <p:cNvPr id="35" name="TextBox 34"/>
-          <p:cNvSpPr txBox="1"/>
-          <p:nvPr/>
-        </p:nvSpPr>
-        <p:spPr>
-          <a:xfrm>
-            <a:off x="4396130" y="8586215"/>
-            <a:ext cx="3399434" cy="658368"/>
-          </a:xfrm>
-          <a:prstGeom prst="rect">
-            <a:avLst/>
-          </a:prstGeom>
-          <a:noFill/>
-        </p:spPr>
-        <p:txBody>
-          <a:bodyPr wrap="square" lIns="0" rIns="0" tIns="0" bIns="0" anchor="t">
-            <a:spAutoFit/>
-          </a:bodyPr>
-          <a:lstStyle/>
-          <a:p>
-            <a:pPr algn="l"/>
-            <a:r>
-              <a:rPr sz="1300" b="0" i="0">
-                <a:solidFill>
-                  <a:srgbClr val="14324A"/>
-                </a:solidFill>
-                <a:latin typeface="Calibri"/>
-              </a:rPr>
-              <a:t>both inventories were counted on their own; no file-level join was made</a:t>
-            </a:r>
-          </a:p>
-        </p:txBody>
-      </p:sp>
-      <p:sp>
-        <p:nvSpPr>
-          <p:cNvPr id="36" name="TextBox 35"/>
-          <p:cNvSpPr txBox="1"/>
-          <p:nvPr/>
-        </p:nvSpPr>
-        <p:spPr>
-          <a:xfrm>
-            <a:off x="8124748" y="8586215"/>
-            <a:ext cx="3399434" cy="658368"/>
-          </a:xfrm>
-          <a:prstGeom prst="rect">
-            <a:avLst/>
-          </a:prstGeom>
-          <a:noFill/>
-        </p:spPr>
-        <p:txBody>
-          <a:bodyPr wrap="square" lIns="0" rIns="0" tIns="0" bIns="0" anchor="t">
-            <a:spAutoFit/>
-          </a:bodyPr>
-          <a:lstStyle/>
-          <a:p>
-            <a:pPr algn="l"/>
-            <a:r>
-              <a:rPr sz="1300" b="0" i="0">
-                <a:solidFill>
-                  <a:srgbClr val="14324A"/>
-                </a:solidFill>
-                <a:latin typeface="Calibri"/>
-              </a:rPr>
-              <a:t>a hash join of workbench file locations against the staged corpus paths</a:t>
-            </a:r>
-          </a:p>
-        </p:txBody>
-      </p:sp>
-      <p:sp>
-        <p:nvSpPr>
-          <p:cNvPr id="37" name="TextBox 36"/>
+      </p:cxnSp>
+      <p:sp>
+        <p:nvSpPr>
+          <p:cNvPr id="19" name="TextBox 18"/>
           <p:cNvSpPr txBox="1"/>
           <p:nvPr/>
         </p:nvSpPr>
@@ -41425,7 +41681,7 @@
       </p:sp>
       <p:sp>
         <p:nvSpPr>
-          <p:cNvPr id="38" name="TextBox 37"/>
+          <p:cNvPr id="20" name="TextBox 19"/>
           <p:cNvSpPr txBox="1"/>
           <p:nvPr/>
         </p:nvSpPr>
@@ -41460,7 +41716,7 @@
       </p:sp>
       <p:sp>
         <p:nvSpPr>
-          <p:cNvPr id="39" name="TextBox 38"/>
+          <p:cNvPr id="21" name="TextBox 20"/>
           <p:cNvSpPr txBox="1"/>
           <p:nvPr/>
         </p:nvSpPr>
@@ -41549,7 +41805,7 @@
                 </a:solidFill>
                 <a:latin typeface="Calibri"/>
               </a:rPr>
-              <a:t>APPENDIX</a:t>
+              <a:t>COVERAGE AND LIMITS</a:t>
             </a:r>
           </a:p>
         </p:txBody>
@@ -41584,7 +41840,7 @@
                 </a:solidFill>
                 <a:latin typeface="Cambria"/>
               </a:rPr>
-              <a:t>Exhibit index with receipts</a:t>
+              <a:t>What this pack covers, what it cannot say, and what would close each gap</a:t>
             </a:r>
           </a:p>
         </p:txBody>
@@ -41598,7 +41854,7 @@
         <p:spPr>
           <a:xfrm>
             <a:off x="594360" y="1920240"/>
-            <a:ext cx="822960" cy="502920"/>
+            <a:ext cx="11002975" cy="822960"/>
           </a:xfrm>
           <a:prstGeom prst="rect">
             <a:avLst/>
@@ -41613,13 +41869,25 @@
           <a:p>
             <a:pPr algn="l"/>
             <a:r>
-              <a:rPr sz="1400" b="1" i="0">
-                <a:solidFill>
-                  <a:srgbClr val="E8772E"/>
-                </a:solidFill>
-                <a:latin typeface="Courier New"/>
-              </a:rPr>
-              <a:t>R01</a:t>
+              <a:rPr sz="1400" b="0" i="0">
+                <a:solidFill>
+                  <a:srgbClr val="14324A"/>
+                </a:solidFill>
+                <a:latin typeface="Calibri"/>
+              </a:rPr>
+              <a:t>COVERS</a:t>
+            </a:r>
+          </a:p>
+          <a:p>
+            <a:pPr algn="l"/>
+            <a:r>
+              <a:rPr sz="1400" b="0" i="0">
+                <a:solidFill>
+                  <a:srgbClr val="14324A"/>
+                </a:solidFill>
+                <a:latin typeface="Calibri"/>
+              </a:rPr>
+              <a:t>The admitted estate as measured by census eij-1b359b3cbd2e: 20 databases, 1,006 tables (351.3 GiB), the object store, the file shares, the staged language corpus read by both GPUs and the written-word databases read as aggregates. No row value, script or transcript text is in this pack.</a:t>
             </a:r>
           </a:p>
         </p:txBody>
@@ -41632,8 +41900,8 @@
         </p:nvSpPr>
         <p:spPr>
           <a:xfrm>
-            <a:off x="1508760" y="1920240"/>
-            <a:ext cx="10088575" cy="502920"/>
+            <a:off x="594360" y="2834640"/>
+            <a:ext cx="3545738" cy="274320"/>
           </a:xfrm>
           <a:prstGeom prst="rect">
             <a:avLst/>
@@ -41648,26 +41916,96 @@
           <a:p>
             <a:pPr algn="l"/>
             <a:r>
-              <a:rPr sz="1300" b="0" i="0">
-                <a:solidFill>
-                  <a:srgbClr val="14324A"/>
+              <a:rPr sz="1100" b="1" i="0">
+                <a:solidFill>
+                  <a:srgbClr val="70879A"/>
                 </a:solidFill>
                 <a:latin typeface="Calibri"/>
               </a:rPr>
-              <a:t>Estate intelligence census eij-1b359b3cbd2e, digest-verified report (measured 2026-09-29), headline aggregates and per-database measures</a:t>
+              <a:t>CANNOT SAY</a:t>
+            </a:r>
+          </a:p>
+        </p:txBody>
+      </p:sp>
+      <p:sp>
+        <p:nvSpPr>
+          <p:cNvPr id="6" name="TextBox 5"/>
+          <p:cNvSpPr txBox="1"/>
+          <p:nvPr/>
+        </p:nvSpPr>
+        <p:spPr>
+          <a:xfrm>
+            <a:off x="4322978" y="2834640"/>
+            <a:ext cx="3545738" cy="274320"/>
+          </a:xfrm>
+          <a:prstGeom prst="rect">
+            <a:avLst/>
+          </a:prstGeom>
+          <a:noFill/>
+        </p:spPr>
+        <p:txBody>
+          <a:bodyPr wrap="square" lIns="0" rIns="0" tIns="0" bIns="0" anchor="t">
+            <a:spAutoFit/>
+          </a:bodyPr>
+          <a:lstStyle/>
+          <a:p>
+            <a:pPr algn="l"/>
+            <a:r>
+              <a:rPr sz="1100" b="1" i="0">
+                <a:solidFill>
+                  <a:srgbClr val="70879A"/>
+                </a:solidFill>
+                <a:latin typeface="Calibri"/>
+              </a:rPr>
+              <a:t>WHY</a:t>
+            </a:r>
+          </a:p>
+        </p:txBody>
+      </p:sp>
+      <p:sp>
+        <p:nvSpPr>
+          <p:cNvPr id="7" name="TextBox 6"/>
+          <p:cNvSpPr txBox="1"/>
+          <p:nvPr/>
+        </p:nvSpPr>
+        <p:spPr>
+          <a:xfrm>
+            <a:off x="8051596" y="2834640"/>
+            <a:ext cx="3545738" cy="274320"/>
+          </a:xfrm>
+          <a:prstGeom prst="rect">
+            <a:avLst/>
+          </a:prstGeom>
+          <a:noFill/>
+        </p:spPr>
+        <p:txBody>
+          <a:bodyPr wrap="square" lIns="0" rIns="0" tIns="0" bIns="0" anchor="t">
+            <a:spAutoFit/>
+          </a:bodyPr>
+          <a:lstStyle/>
+          <a:p>
+            <a:pPr algn="l"/>
+            <a:r>
+              <a:rPr sz="1100" b="1" i="0">
+                <a:solidFill>
+                  <a:srgbClr val="70879A"/>
+                </a:solidFill>
+                <a:latin typeface="Calibri"/>
+              </a:rPr>
+              <a:t>WHAT WOULD CLOSE IT</a:t>
             </a:r>
           </a:p>
         </p:txBody>
       </p:sp>
       <p:cxnSp>
         <p:nvCxnSpPr>
-          <p:cNvPr id="6" name="Connector 5"/>
+          <p:cNvPr id="8" name="Connector 7"/>
           <p:cNvCxnSpPr/>
           <p:nvPr/>
         </p:nvCxnSpPr>
         <p:spPr>
           <a:xfrm>
-            <a:off x="594360" y="2441448"/>
+            <a:off x="594360" y="3127248"/>
             <a:ext cx="11002975" cy="0"/>
           </a:xfrm>
           <a:prstGeom prst="line">
@@ -41675,7 +42013,7 @@
           </a:prstGeom>
           <a:ln w="9525">
             <a:solidFill>
-              <a:srgbClr val="D3DCE4"/>
+              <a:srgbClr val="14324A"/>
             </a:solidFill>
           </a:ln>
         </p:spPr>
@@ -41696,13 +42034,1285 @@
       </p:cxnSp>
       <p:sp>
         <p:nvSpPr>
-          <p:cNvPr id="7" name="TextBox 6"/>
-          <p:cNvSpPr txBox="1"/>
-          <p:nvPr/>
-        </p:nvSpPr>
-        <p:spPr>
-          <a:xfrm>
-            <a:off x="594360" y="2560320"/>
+          <p:cNvPr id="9" name="Rectangle 8"/>
+          <p:cNvSpPr/>
+          <p:nvPr/>
+        </p:nvSpPr>
+        <p:spPr>
+          <a:xfrm>
+            <a:off x="594360" y="3246120"/>
+            <a:ext cx="11002975" cy="786384"/>
+          </a:xfrm>
+          <a:prstGeom prst="rect">
+            <a:avLst/>
+          </a:prstGeom>
+          <a:pattFill>
+            <a:fgClr>
+              <a:srgbClr val="E8EEF3"/>
+            </a:fgClr>
+            <a:bgClr>
+              <a:srgbClr val="FFFFFF"/>
+            </a:bgClr>
+          </a:pattFill>
+          <a:ln>
+            <a:noFill/>
+          </a:ln>
+        </p:spPr>
+        <p:style>
+          <a:lnRef idx="1">
+            <a:schemeClr val="accent1"/>
+          </a:lnRef>
+          <a:fillRef idx="3">
+            <a:schemeClr val="accent1"/>
+          </a:fillRef>
+          <a:effectRef idx="2">
+            <a:schemeClr val="accent1"/>
+          </a:effectRef>
+          <a:fontRef idx="minor">
+            <a:schemeClr val="lt1"/>
+          </a:fontRef>
+        </p:style>
+        <p:txBody>
+          <a:bodyPr rtlCol="0" anchor="ctr"/>
+          <a:lstStyle/>
+          <a:p>
+            <a:pPr algn="ctr"/>
+          </a:p>
+        </p:txBody>
+      </p:sp>
+      <p:sp>
+        <p:nvSpPr>
+          <p:cNvPr id="10" name="TextBox 9"/>
+          <p:cNvSpPr txBox="1"/>
+          <p:nvPr/>
+        </p:nvSpPr>
+        <p:spPr>
+          <a:xfrm>
+            <a:off x="667512" y="3319272"/>
+            <a:ext cx="3399434" cy="658368"/>
+          </a:xfrm>
+          <a:prstGeom prst="rect">
+            <a:avLst/>
+          </a:prstGeom>
+          <a:noFill/>
+        </p:spPr>
+        <p:txBody>
+          <a:bodyPr wrap="square" lIns="0" rIns="0" tIns="0" bIns="0" anchor="t">
+            <a:spAutoFit/>
+          </a:bodyPr>
+          <a:lstStyle/>
+          <a:p>
+            <a:pPr algn="l"/>
+            <a:r>
+              <a:rPr sz="1300" b="0" i="0">
+                <a:solidFill>
+                  <a:srgbClr val="14324A"/>
+                </a:solidFill>
+                <a:latin typeface="Calibri"/>
+              </a:rPr>
+              <a:t>Duplicate, damage, empty-field and PII ratios on sampled tables</a:t>
+            </a:r>
+          </a:p>
+        </p:txBody>
+      </p:sp>
+      <p:sp>
+        <p:nvSpPr>
+          <p:cNvPr id="11" name="TextBox 10"/>
+          <p:cNvSpPr txBox="1"/>
+          <p:nvPr/>
+        </p:nvSpPr>
+        <p:spPr>
+          <a:xfrm>
+            <a:off x="4396130" y="3319272"/>
+            <a:ext cx="3399434" cy="658368"/>
+          </a:xfrm>
+          <a:prstGeom prst="rect">
+            <a:avLst/>
+          </a:prstGeom>
+          <a:noFill/>
+        </p:spPr>
+        <p:txBody>
+          <a:bodyPr wrap="square" lIns="0" rIns="0" tIns="0" bIns="0" anchor="t">
+            <a:spAutoFit/>
+          </a:bodyPr>
+          <a:lstStyle/>
+          <a:p>
+            <a:pPr algn="l"/>
+            <a:r>
+              <a:rPr sz="1300" b="0" i="0">
+                <a:solidFill>
+                  <a:srgbClr val="14324A"/>
+                </a:solidFill>
+                <a:latin typeface="Calibri"/>
+              </a:rPr>
+              <a:t>complete passes where the table allowed it, stratified samples elsewhere</a:t>
+            </a:r>
+          </a:p>
+        </p:txBody>
+      </p:sp>
+      <p:sp>
+        <p:nvSpPr>
+          <p:cNvPr id="12" name="TextBox 11"/>
+          <p:cNvSpPr txBox="1"/>
+          <p:nvPr/>
+        </p:nvSpPr>
+        <p:spPr>
+          <a:xfrm>
+            <a:off x="8124748" y="3319272"/>
+            <a:ext cx="3399434" cy="658368"/>
+          </a:xfrm>
+          <a:prstGeom prst="rect">
+            <a:avLst/>
+          </a:prstGeom>
+          <a:noFill/>
+        </p:spPr>
+        <p:txBody>
+          <a:bodyPr wrap="square" lIns="0" rIns="0" tIns="0" bIns="0" anchor="t">
+            <a:spAutoFit/>
+          </a:bodyPr>
+          <a:lstStyle/>
+          <a:p>
+            <a:pPr algn="l"/>
+            <a:r>
+              <a:rPr sz="1300" b="0" i="0">
+                <a:solidFill>
+                  <a:srgbClr val="14324A"/>
+                </a:solidFill>
+                <a:latin typeface="Calibri"/>
+              </a:rPr>
+              <a:t>a complete-pass census on the sampled tables</a:t>
+            </a:r>
+          </a:p>
+        </p:txBody>
+      </p:sp>
+      <p:sp>
+        <p:nvSpPr>
+          <p:cNvPr id="13" name="Rectangle 12"/>
+          <p:cNvSpPr/>
+          <p:nvPr/>
+        </p:nvSpPr>
+        <p:spPr>
+          <a:xfrm>
+            <a:off x="594360" y="4123944"/>
+            <a:ext cx="11002975" cy="786384"/>
+          </a:xfrm>
+          <a:prstGeom prst="rect">
+            <a:avLst/>
+          </a:prstGeom>
+          <a:pattFill>
+            <a:fgClr>
+              <a:srgbClr val="E8EEF3"/>
+            </a:fgClr>
+            <a:bgClr>
+              <a:srgbClr val="FFFFFF"/>
+            </a:bgClr>
+          </a:pattFill>
+          <a:ln>
+            <a:noFill/>
+          </a:ln>
+        </p:spPr>
+        <p:style>
+          <a:lnRef idx="1">
+            <a:schemeClr val="accent1"/>
+          </a:lnRef>
+          <a:fillRef idx="3">
+            <a:schemeClr val="accent1"/>
+          </a:fillRef>
+          <a:effectRef idx="2">
+            <a:schemeClr val="accent1"/>
+          </a:effectRef>
+          <a:fontRef idx="minor">
+            <a:schemeClr val="lt1"/>
+          </a:fontRef>
+        </p:style>
+        <p:txBody>
+          <a:bodyPr rtlCol="0" anchor="ctr"/>
+          <a:lstStyle/>
+          <a:p>
+            <a:pPr algn="ctr"/>
+          </a:p>
+        </p:txBody>
+      </p:sp>
+      <p:sp>
+        <p:nvSpPr>
+          <p:cNvPr id="14" name="TextBox 13"/>
+          <p:cNvSpPr txBox="1"/>
+          <p:nvPr/>
+        </p:nvSpPr>
+        <p:spPr>
+          <a:xfrm>
+            <a:off x="667512" y="4197096"/>
+            <a:ext cx="3399434" cy="658368"/>
+          </a:xfrm>
+          <a:prstGeom prst="rect">
+            <a:avLst/>
+          </a:prstGeom>
+          <a:noFill/>
+        </p:spPr>
+        <p:txBody>
+          <a:bodyPr wrap="square" lIns="0" rIns="0" tIns="0" bIns="0" anchor="t">
+            <a:spAutoFit/>
+          </a:bodyPr>
+          <a:lstStyle/>
+          <a:p>
+            <a:pPr algn="l"/>
+            <a:r>
+              <a:rPr sz="1300" b="0" i="0">
+                <a:solidFill>
+                  <a:srgbClr val="14324A"/>
+                </a:solidFill>
+                <a:latin typeface="Calibri"/>
+              </a:rPr>
+              <a:t>Semantic similarity between candidate datasets and the market</a:t>
+            </a:r>
+          </a:p>
+        </p:txBody>
+      </p:sp>
+      <p:sp>
+        <p:nvSpPr>
+          <p:cNvPr id="15" name="TextBox 14"/>
+          <p:cNvSpPr txBox="1"/>
+          <p:nvPr/>
+        </p:nvSpPr>
+        <p:spPr>
+          <a:xfrm>
+            <a:off x="4396130" y="4197096"/>
+            <a:ext cx="3399434" cy="658368"/>
+          </a:xfrm>
+          <a:prstGeom prst="rect">
+            <a:avLst/>
+          </a:prstGeom>
+          <a:noFill/>
+        </p:spPr>
+        <p:txBody>
+          <a:bodyPr wrap="square" lIns="0" rIns="0" tIns="0" bIns="0" anchor="t">
+            <a:spAutoFit/>
+          </a:bodyPr>
+          <a:lstStyle/>
+          <a:p>
+            <a:pPr algn="l"/>
+            <a:r>
+              <a:rPr sz="1300" b="0" i="0">
+                <a:solidFill>
+                  <a:srgbClr val="14324A"/>
+                </a:solidFill>
+                <a:latin typeface="Calibri"/>
+              </a:rPr>
+              <a:t>not measured; candidates are dimensional readiness only</a:t>
+            </a:r>
+          </a:p>
+        </p:txBody>
+      </p:sp>
+      <p:sp>
+        <p:nvSpPr>
+          <p:cNvPr id="16" name="TextBox 15"/>
+          <p:cNvSpPr txBox="1"/>
+          <p:nvPr/>
+        </p:nvSpPr>
+        <p:spPr>
+          <a:xfrm>
+            <a:off x="8124748" y="4197096"/>
+            <a:ext cx="3399434" cy="658368"/>
+          </a:xfrm>
+          <a:prstGeom prst="rect">
+            <a:avLst/>
+          </a:prstGeom>
+          <a:noFill/>
+        </p:spPr>
+        <p:txBody>
+          <a:bodyPr wrap="square" lIns="0" rIns="0" tIns="0" bIns="0" anchor="t">
+            <a:spAutoFit/>
+          </a:bodyPr>
+          <a:lstStyle/>
+          <a:p>
+            <a:pPr algn="l"/>
+            <a:r>
+              <a:rPr sz="1300" b="0" i="0">
+                <a:solidFill>
+                  <a:srgbClr val="14324A"/>
+                </a:solidFill>
+                <a:latin typeface="Calibri"/>
+              </a:rPr>
+              <a:t>a buyer-side review of each candidate against its intended use</a:t>
+            </a:r>
+          </a:p>
+        </p:txBody>
+      </p:sp>
+      <p:sp>
+        <p:nvSpPr>
+          <p:cNvPr id="17" name="Rectangle 16"/>
+          <p:cNvSpPr/>
+          <p:nvPr/>
+        </p:nvSpPr>
+        <p:spPr>
+          <a:xfrm>
+            <a:off x="594360" y="5001768"/>
+            <a:ext cx="11002975" cy="786384"/>
+          </a:xfrm>
+          <a:prstGeom prst="rect">
+            <a:avLst/>
+          </a:prstGeom>
+          <a:pattFill>
+            <a:fgClr>
+              <a:srgbClr val="E8EEF3"/>
+            </a:fgClr>
+            <a:bgClr>
+              <a:srgbClr val="FFFFFF"/>
+            </a:bgClr>
+          </a:pattFill>
+          <a:ln>
+            <a:noFill/>
+          </a:ln>
+        </p:spPr>
+        <p:style>
+          <a:lnRef idx="1">
+            <a:schemeClr val="accent1"/>
+          </a:lnRef>
+          <a:fillRef idx="3">
+            <a:schemeClr val="accent1"/>
+          </a:fillRef>
+          <a:effectRef idx="2">
+            <a:schemeClr val="accent1"/>
+          </a:effectRef>
+          <a:fontRef idx="minor">
+            <a:schemeClr val="lt1"/>
+          </a:fontRef>
+        </p:style>
+        <p:txBody>
+          <a:bodyPr rtlCol="0" anchor="ctr"/>
+          <a:lstStyle/>
+          <a:p>
+            <a:pPr algn="ctr"/>
+          </a:p>
+        </p:txBody>
+      </p:sp>
+      <p:sp>
+        <p:nvSpPr>
+          <p:cNvPr id="18" name="TextBox 17"/>
+          <p:cNvSpPr txBox="1"/>
+          <p:nvPr/>
+        </p:nvSpPr>
+        <p:spPr>
+          <a:xfrm>
+            <a:off x="667512" y="5074920"/>
+            <a:ext cx="3399434" cy="658368"/>
+          </a:xfrm>
+          <a:prstGeom prst="rect">
+            <a:avLst/>
+          </a:prstGeom>
+          <a:noFill/>
+        </p:spPr>
+        <p:txBody>
+          <a:bodyPr wrap="square" lIns="0" rIns="0" tIns="0" bIns="0" anchor="t">
+            <a:spAutoFit/>
+          </a:bodyPr>
+          <a:lstStyle/>
+          <a:p>
+            <a:pPr algn="l"/>
+            <a:r>
+              <a:rPr sz="1300" b="0" i="0">
+                <a:solidFill>
+                  <a:srgbClr val="14324A"/>
+                </a:solidFill>
+                <a:latin typeface="Calibri"/>
+              </a:rPr>
+              <a:t>Connection artists_app</a:t>
+            </a:r>
+          </a:p>
+        </p:txBody>
+      </p:sp>
+      <p:sp>
+        <p:nvSpPr>
+          <p:cNvPr id="19" name="TextBox 18"/>
+          <p:cNvSpPr txBox="1"/>
+          <p:nvPr/>
+        </p:nvSpPr>
+        <p:spPr>
+          <a:xfrm>
+            <a:off x="4396130" y="5074920"/>
+            <a:ext cx="3399434" cy="658368"/>
+          </a:xfrm>
+          <a:prstGeom prst="rect">
+            <a:avLst/>
+          </a:prstGeom>
+          <a:noFill/>
+        </p:spPr>
+        <p:txBody>
+          <a:bodyPr wrap="square" lIns="0" rIns="0" tIns="0" bIns="0" anchor="t">
+            <a:spAutoFit/>
+          </a:bodyPr>
+          <a:lstStyle/>
+          <a:p>
+            <a:pPr algn="l"/>
+            <a:r>
+              <a:rPr sz="1300" b="0" i="0">
+                <a:solidFill>
+                  <a:srgbClr val="14324A"/>
+                </a:solidFill>
+                <a:latin typeface="Calibri"/>
+              </a:rPr>
+              <a:t>could not be read (MySQL GRANT pending)</a:t>
+            </a:r>
+          </a:p>
+        </p:txBody>
+      </p:sp>
+      <p:sp>
+        <p:nvSpPr>
+          <p:cNvPr id="20" name="TextBox 19"/>
+          <p:cNvSpPr txBox="1"/>
+          <p:nvPr/>
+        </p:nvSpPr>
+        <p:spPr>
+          <a:xfrm>
+            <a:off x="8124748" y="5074920"/>
+            <a:ext cx="3399434" cy="658368"/>
+          </a:xfrm>
+          <a:prstGeom prst="rect">
+            <a:avLst/>
+          </a:prstGeom>
+          <a:noFill/>
+        </p:spPr>
+        <p:txBody>
+          <a:bodyPr wrap="square" lIns="0" rIns="0" tIns="0" bIns="0" anchor="t">
+            <a:spAutoFit/>
+          </a:bodyPr>
+          <a:lstStyle/>
+          <a:p>
+            <a:pPr algn="l"/>
+            <a:r>
+              <a:rPr sz="1300" b="0" i="0">
+                <a:solidFill>
+                  <a:srgbClr val="14324A"/>
+                </a:solidFill>
+                <a:latin typeface="Calibri"/>
+              </a:rPr>
+              <a:t>owner grants read access; re-census</a:t>
+            </a:r>
+          </a:p>
+        </p:txBody>
+      </p:sp>
+      <p:sp>
+        <p:nvSpPr>
+          <p:cNvPr id="21" name="Rectangle 20"/>
+          <p:cNvSpPr/>
+          <p:nvPr/>
+        </p:nvSpPr>
+        <p:spPr>
+          <a:xfrm>
+            <a:off x="594360" y="5879592"/>
+            <a:ext cx="11002975" cy="786384"/>
+          </a:xfrm>
+          <a:prstGeom prst="rect">
+            <a:avLst/>
+          </a:prstGeom>
+          <a:pattFill>
+            <a:fgClr>
+              <a:srgbClr val="E8EEF3"/>
+            </a:fgClr>
+            <a:bgClr>
+              <a:srgbClr val="FFFFFF"/>
+            </a:bgClr>
+          </a:pattFill>
+          <a:ln>
+            <a:noFill/>
+          </a:ln>
+        </p:spPr>
+        <p:style>
+          <a:lnRef idx="1">
+            <a:schemeClr val="accent1"/>
+          </a:lnRef>
+          <a:fillRef idx="3">
+            <a:schemeClr val="accent1"/>
+          </a:fillRef>
+          <a:effectRef idx="2">
+            <a:schemeClr val="accent1"/>
+          </a:effectRef>
+          <a:fontRef idx="minor">
+            <a:schemeClr val="lt1"/>
+          </a:fontRef>
+        </p:style>
+        <p:txBody>
+          <a:bodyPr rtlCol="0" anchor="ctr"/>
+          <a:lstStyle/>
+          <a:p>
+            <a:pPr algn="ctr"/>
+          </a:p>
+        </p:txBody>
+      </p:sp>
+      <p:sp>
+        <p:nvSpPr>
+          <p:cNvPr id="22" name="TextBox 21"/>
+          <p:cNvSpPr txBox="1"/>
+          <p:nvPr/>
+        </p:nvSpPr>
+        <p:spPr>
+          <a:xfrm>
+            <a:off x="667512" y="5952744"/>
+            <a:ext cx="3399434" cy="658368"/>
+          </a:xfrm>
+          <a:prstGeom prst="rect">
+            <a:avLst/>
+          </a:prstGeom>
+          <a:noFill/>
+        </p:spPr>
+        <p:txBody>
+          <a:bodyPr wrap="square" lIns="0" rIns="0" tIns="0" bIns="0" anchor="t">
+            <a:spAutoFit/>
+          </a:bodyPr>
+          <a:lstStyle/>
+          <a:p>
+            <a:pPr algn="l"/>
+            <a:r>
+              <a:rPr sz="1300" b="0" i="0">
+                <a:solidFill>
+                  <a:srgbClr val="14324A"/>
+                </a:solidFill>
+                <a:latin typeface="Calibri"/>
+              </a:rPr>
+              <a:t>NAS duplication</a:t>
+            </a:r>
+          </a:p>
+        </p:txBody>
+      </p:sp>
+      <p:sp>
+        <p:nvSpPr>
+          <p:cNvPr id="23" name="TextBox 22"/>
+          <p:cNvSpPr txBox="1"/>
+          <p:nvPr/>
+        </p:nvSpPr>
+        <p:spPr>
+          <a:xfrm>
+            <a:off x="4396130" y="5952744"/>
+            <a:ext cx="3399434" cy="658368"/>
+          </a:xfrm>
+          <a:prstGeom prst="rect">
+            <a:avLst/>
+          </a:prstGeom>
+          <a:noFill/>
+        </p:spPr>
+        <p:txBody>
+          <a:bodyPr wrap="square" lIns="0" rIns="0" tIns="0" bIns="0" anchor="t">
+            <a:spAutoFit/>
+          </a:bodyPr>
+          <a:lstStyle/>
+          <a:p>
+            <a:pPr algn="l"/>
+            <a:r>
+              <a:rPr sz="1300" b="0" i="0">
+                <a:solidFill>
+                  <a:srgbClr val="14324A"/>
+                </a:solidFill>
+                <a:latin typeface="Calibri"/>
+              </a:rPr>
+              <a:t>the enumeration recorded sizes and dates, not content fingerprints</a:t>
+            </a:r>
+          </a:p>
+        </p:txBody>
+      </p:sp>
+      <p:sp>
+        <p:nvSpPr>
+          <p:cNvPr id="24" name="TextBox 23"/>
+          <p:cNvSpPr txBox="1"/>
+          <p:nvPr/>
+        </p:nvSpPr>
+        <p:spPr>
+          <a:xfrm>
+            <a:off x="8124748" y="5952744"/>
+            <a:ext cx="3399434" cy="658368"/>
+          </a:xfrm>
+          <a:prstGeom prst="rect">
+            <a:avLst/>
+          </a:prstGeom>
+          <a:noFill/>
+        </p:spPr>
+        <p:txBody>
+          <a:bodyPr wrap="square" lIns="0" rIns="0" tIns="0" bIns="0" anchor="t">
+            <a:spAutoFit/>
+          </a:bodyPr>
+          <a:lstStyle/>
+          <a:p>
+            <a:pPr algn="l"/>
+            <a:r>
+              <a:rPr sz="1300" b="0" i="0">
+                <a:solidFill>
+                  <a:srgbClr val="14324A"/>
+                </a:solidFill>
+                <a:latin typeface="Calibri"/>
+              </a:rPr>
+              <a:t>a fingerprinting pass over the NAS shares</a:t>
+            </a:r>
+          </a:p>
+        </p:txBody>
+      </p:sp>
+      <p:sp>
+        <p:nvSpPr>
+          <p:cNvPr id="25" name="Rectangle 24"/>
+          <p:cNvSpPr/>
+          <p:nvPr/>
+        </p:nvSpPr>
+        <p:spPr>
+          <a:xfrm>
+            <a:off x="594360" y="6757416"/>
+            <a:ext cx="11002975" cy="786384"/>
+          </a:xfrm>
+          <a:prstGeom prst="rect">
+            <a:avLst/>
+          </a:prstGeom>
+          <a:pattFill>
+            <a:fgClr>
+              <a:srgbClr val="E8EEF3"/>
+            </a:fgClr>
+            <a:bgClr>
+              <a:srgbClr val="FFFFFF"/>
+            </a:bgClr>
+          </a:pattFill>
+          <a:ln>
+            <a:noFill/>
+          </a:ln>
+        </p:spPr>
+        <p:style>
+          <a:lnRef idx="1">
+            <a:schemeClr val="accent1"/>
+          </a:lnRef>
+          <a:fillRef idx="3">
+            <a:schemeClr val="accent1"/>
+          </a:fillRef>
+          <a:effectRef idx="2">
+            <a:schemeClr val="accent1"/>
+          </a:effectRef>
+          <a:fontRef idx="minor">
+            <a:schemeClr val="lt1"/>
+          </a:fontRef>
+        </p:style>
+        <p:txBody>
+          <a:bodyPr rtlCol="0" anchor="ctr"/>
+          <a:lstStyle/>
+          <a:p>
+            <a:pPr algn="ctr"/>
+          </a:p>
+        </p:txBody>
+      </p:sp>
+      <p:sp>
+        <p:nvSpPr>
+          <p:cNvPr id="26" name="TextBox 25"/>
+          <p:cNvSpPr txBox="1"/>
+          <p:nvPr/>
+        </p:nvSpPr>
+        <p:spPr>
+          <a:xfrm>
+            <a:off x="667512" y="6830568"/>
+            <a:ext cx="3399434" cy="658368"/>
+          </a:xfrm>
+          <a:prstGeom prst="rect">
+            <a:avLst/>
+          </a:prstGeom>
+          <a:noFill/>
+        </p:spPr>
+        <p:txBody>
+          <a:bodyPr wrap="square" lIns="0" rIns="0" tIns="0" bIns="0" anchor="t">
+            <a:spAutoFit/>
+          </a:bodyPr>
+          <a:lstStyle/>
+          <a:p>
+            <a:pPr algn="l"/>
+            <a:r>
+              <a:rPr sz="1300" b="0" i="0">
+                <a:solidFill>
+                  <a:srgbClr val="14324A"/>
+                </a:solidFill>
+                <a:latin typeface="Calibri"/>
+              </a:rPr>
+              <a:t>40 of 106 OBS buckets</a:t>
+            </a:r>
+          </a:p>
+        </p:txBody>
+      </p:sp>
+      <p:sp>
+        <p:nvSpPr>
+          <p:cNvPr id="27" name="TextBox 26"/>
+          <p:cNvSpPr txBox="1"/>
+          <p:nvPr/>
+        </p:nvSpPr>
+        <p:spPr>
+          <a:xfrm>
+            <a:off x="4396130" y="6830568"/>
+            <a:ext cx="3399434" cy="658368"/>
+          </a:xfrm>
+          <a:prstGeom prst="rect">
+            <a:avLst/>
+          </a:prstGeom>
+          <a:noFill/>
+        </p:spPr>
+        <p:txBody>
+          <a:bodyPr wrap="square" lIns="0" rIns="0" tIns="0" bIns="0" anchor="t">
+            <a:spAutoFit/>
+          </a:bodyPr>
+          <a:lstStyle/>
+          <a:p>
+            <a:pPr algn="l"/>
+            <a:r>
+              <a:rPr sz="1300" b="0" i="0">
+                <a:solidFill>
+                  <a:srgbClr val="14324A"/>
+                </a:solidFill>
+                <a:latin typeface="Calibri"/>
+              </a:rPr>
+              <a:t>unreachable (NoSuchBucket / client errors)</a:t>
+            </a:r>
+          </a:p>
+        </p:txBody>
+      </p:sp>
+      <p:sp>
+        <p:nvSpPr>
+          <p:cNvPr id="28" name="TextBox 27"/>
+          <p:cNvSpPr txBox="1"/>
+          <p:nvPr/>
+        </p:nvSpPr>
+        <p:spPr>
+          <a:xfrm>
+            <a:off x="8124748" y="6830568"/>
+            <a:ext cx="3399434" cy="658368"/>
+          </a:xfrm>
+          <a:prstGeom prst="rect">
+            <a:avLst/>
+          </a:prstGeom>
+          <a:noFill/>
+        </p:spPr>
+        <p:txBody>
+          <a:bodyPr wrap="square" lIns="0" rIns="0" tIns="0" bIns="0" anchor="t">
+            <a:spAutoFit/>
+          </a:bodyPr>
+          <a:lstStyle/>
+          <a:p>
+            <a:pPr algn="l"/>
+            <a:r>
+              <a:rPr sz="1300" b="0" i="0">
+                <a:solidFill>
+                  <a:srgbClr val="14324A"/>
+                </a:solidFill>
+                <a:latin typeface="Calibri"/>
+              </a:rPr>
+              <a:t>bucket inventory reconciled with the provider</a:t>
+            </a:r>
+          </a:p>
+        </p:txBody>
+      </p:sp>
+      <p:sp>
+        <p:nvSpPr>
+          <p:cNvPr id="29" name="Rectangle 28"/>
+          <p:cNvSpPr/>
+          <p:nvPr/>
+        </p:nvSpPr>
+        <p:spPr>
+          <a:xfrm>
+            <a:off x="594360" y="7635240"/>
+            <a:ext cx="11002975" cy="786384"/>
+          </a:xfrm>
+          <a:prstGeom prst="rect">
+            <a:avLst/>
+          </a:prstGeom>
+          <a:pattFill>
+            <a:fgClr>
+              <a:srgbClr val="E8EEF3"/>
+            </a:fgClr>
+            <a:bgClr>
+              <a:srgbClr val="FFFFFF"/>
+            </a:bgClr>
+          </a:pattFill>
+          <a:ln>
+            <a:noFill/>
+          </a:ln>
+        </p:spPr>
+        <p:style>
+          <a:lnRef idx="1">
+            <a:schemeClr val="accent1"/>
+          </a:lnRef>
+          <a:fillRef idx="3">
+            <a:schemeClr val="accent1"/>
+          </a:fillRef>
+          <a:effectRef idx="2">
+            <a:schemeClr val="accent1"/>
+          </a:effectRef>
+          <a:fontRef idx="minor">
+            <a:schemeClr val="lt1"/>
+          </a:fontRef>
+        </p:style>
+        <p:txBody>
+          <a:bodyPr rtlCol="0" anchor="ctr"/>
+          <a:lstStyle/>
+          <a:p>
+            <a:pPr algn="ctr"/>
+          </a:p>
+        </p:txBody>
+      </p:sp>
+      <p:sp>
+        <p:nvSpPr>
+          <p:cNvPr id="30" name="TextBox 29"/>
+          <p:cNvSpPr txBox="1"/>
+          <p:nvPr/>
+        </p:nvSpPr>
+        <p:spPr>
+          <a:xfrm>
+            <a:off x="667512" y="7708392"/>
+            <a:ext cx="3399434" cy="658368"/>
+          </a:xfrm>
+          <a:prstGeom prst="rect">
+            <a:avLst/>
+          </a:prstGeom>
+          <a:noFill/>
+        </p:spPr>
+        <p:txBody>
+          <a:bodyPr wrap="square" lIns="0" rIns="0" tIns="0" bIns="0" anchor="t">
+            <a:spAutoFit/>
+          </a:bodyPr>
+          <a:lstStyle/>
+          <a:p>
+            <a:pPr algn="l"/>
+            <a:r>
+              <a:rPr sz="1300" b="0" i="0">
+                <a:solidFill>
+                  <a:srgbClr val="14324A"/>
+                </a:solidFill>
+                <a:latin typeface="Calibri"/>
+              </a:rPr>
+              <a:t>Language of each news script</a:t>
+            </a:r>
+          </a:p>
+        </p:txBody>
+      </p:sp>
+      <p:sp>
+        <p:nvSpPr>
+          <p:cNvPr id="31" name="TextBox 30"/>
+          <p:cNvSpPr txBox="1"/>
+          <p:nvPr/>
+        </p:nvSpPr>
+        <p:spPr>
+          <a:xfrm>
+            <a:off x="4396130" y="7708392"/>
+            <a:ext cx="3399434" cy="658368"/>
+          </a:xfrm>
+          <a:prstGeom prst="rect">
+            <a:avLst/>
+          </a:prstGeom>
+          <a:noFill/>
+        </p:spPr>
+        <p:txBody>
+          <a:bodyPr wrap="square" lIns="0" rIns="0" tIns="0" bIns="0" anchor="t">
+            <a:spAutoFit/>
+          </a:bodyPr>
+          <a:lstStyle/>
+          <a:p>
+            <a:pPr algn="l"/>
+            <a:r>
+              <a:rPr sz="1300" b="0" i="0">
+                <a:solidFill>
+                  <a:srgbClr val="14324A"/>
+                </a:solidFill>
+                <a:latin typeface="Calibri"/>
+              </a:rPr>
+              <a:t>the scripts were counted and sized, not read; the language shown is the station's broadcast language from the estate's own table</a:t>
+            </a:r>
+          </a:p>
+        </p:txBody>
+      </p:sp>
+      <p:sp>
+        <p:nvSpPr>
+          <p:cNvPr id="32" name="TextBox 31"/>
+          <p:cNvSpPr txBox="1"/>
+          <p:nvPr/>
+        </p:nvSpPr>
+        <p:spPr>
+          <a:xfrm>
+            <a:off x="8124748" y="7708392"/>
+            <a:ext cx="3399434" cy="658368"/>
+          </a:xfrm>
+          <a:prstGeom prst="rect">
+            <a:avLst/>
+          </a:prstGeom>
+          <a:noFill/>
+        </p:spPr>
+        <p:txBody>
+          <a:bodyPr wrap="square" lIns="0" rIns="0" tIns="0" bIns="0" anchor="t">
+            <a:spAutoFit/>
+          </a:bodyPr>
+          <a:lstStyle/>
+          <a:p>
+            <a:pPr algn="l"/>
+            <a:r>
+              <a:rPr sz="1300" b="0" i="0">
+                <a:solidFill>
+                  <a:srgbClr val="14324A"/>
+                </a:solidFill>
+                <a:latin typeface="Calibri"/>
+              </a:rPr>
+              <a:t>a text-model pass over the script column under the same aggregate-only seam</a:t>
+            </a:r>
+          </a:p>
+        </p:txBody>
+      </p:sp>
+      <p:sp>
+        <p:nvSpPr>
+          <p:cNvPr id="33" name="Rectangle 32"/>
+          <p:cNvSpPr/>
+          <p:nvPr/>
+        </p:nvSpPr>
+        <p:spPr>
+          <a:xfrm>
+            <a:off x="594360" y="8513063"/>
+            <a:ext cx="11002975" cy="786384"/>
+          </a:xfrm>
+          <a:prstGeom prst="rect">
+            <a:avLst/>
+          </a:prstGeom>
+          <a:pattFill>
+            <a:fgClr>
+              <a:srgbClr val="E8EEF3"/>
+            </a:fgClr>
+            <a:bgClr>
+              <a:srgbClr val="FFFFFF"/>
+            </a:bgClr>
+          </a:pattFill>
+          <a:ln>
+            <a:noFill/>
+          </a:ln>
+        </p:spPr>
+        <p:style>
+          <a:lnRef idx="1">
+            <a:schemeClr val="accent1"/>
+          </a:lnRef>
+          <a:fillRef idx="3">
+            <a:schemeClr val="accent1"/>
+          </a:fillRef>
+          <a:effectRef idx="2">
+            <a:schemeClr val="accent1"/>
+          </a:effectRef>
+          <a:fontRef idx="minor">
+            <a:schemeClr val="lt1"/>
+          </a:fontRef>
+        </p:style>
+        <p:txBody>
+          <a:bodyPr rtlCol="0" anchor="ctr"/>
+          <a:lstStyle/>
+          <a:p>
+            <a:pPr algn="ctr"/>
+          </a:p>
+        </p:txBody>
+      </p:sp>
+      <p:sp>
+        <p:nvSpPr>
+          <p:cNvPr id="34" name="TextBox 33"/>
+          <p:cNvSpPr txBox="1"/>
+          <p:nvPr/>
+        </p:nvSpPr>
+        <p:spPr>
+          <a:xfrm>
+            <a:off x="667512" y="8586215"/>
+            <a:ext cx="3399434" cy="658368"/>
+          </a:xfrm>
+          <a:prstGeom prst="rect">
+            <a:avLst/>
+          </a:prstGeom>
+          <a:noFill/>
+        </p:spPr>
+        <p:txBody>
+          <a:bodyPr wrap="square" lIns="0" rIns="0" tIns="0" bIns="0" anchor="t">
+            <a:spAutoFit/>
+          </a:bodyPr>
+          <a:lstStyle/>
+          <a:p>
+            <a:pPr algn="l"/>
+            <a:r>
+              <a:rPr sz="1300" b="0" i="0">
+                <a:solidFill>
+                  <a:srgbClr val="14324A"/>
+                </a:solidFill>
+                <a:latin typeface="Calibri"/>
+              </a:rPr>
+              <a:t>Overlap between the workbench recordings and the staged corpus</a:t>
+            </a:r>
+          </a:p>
+        </p:txBody>
+      </p:sp>
+      <p:sp>
+        <p:nvSpPr>
+          <p:cNvPr id="35" name="TextBox 34"/>
+          <p:cNvSpPr txBox="1"/>
+          <p:nvPr/>
+        </p:nvSpPr>
+        <p:spPr>
+          <a:xfrm>
+            <a:off x="4396130" y="8586215"/>
+            <a:ext cx="3399434" cy="658368"/>
+          </a:xfrm>
+          <a:prstGeom prst="rect">
+            <a:avLst/>
+          </a:prstGeom>
+          <a:noFill/>
+        </p:spPr>
+        <p:txBody>
+          <a:bodyPr wrap="square" lIns="0" rIns="0" tIns="0" bIns="0" anchor="t">
+            <a:spAutoFit/>
+          </a:bodyPr>
+          <a:lstStyle/>
+          <a:p>
+            <a:pPr algn="l"/>
+            <a:r>
+              <a:rPr sz="1300" b="0" i="0">
+                <a:solidFill>
+                  <a:srgbClr val="14324A"/>
+                </a:solidFill>
+                <a:latin typeface="Calibri"/>
+              </a:rPr>
+              <a:t>both inventories were counted on their own; no file-level join was made</a:t>
+            </a:r>
+          </a:p>
+        </p:txBody>
+      </p:sp>
+      <p:sp>
+        <p:nvSpPr>
+          <p:cNvPr id="36" name="TextBox 35"/>
+          <p:cNvSpPr txBox="1"/>
+          <p:nvPr/>
+        </p:nvSpPr>
+        <p:spPr>
+          <a:xfrm>
+            <a:off x="8124748" y="8586215"/>
+            <a:ext cx="3399434" cy="658368"/>
+          </a:xfrm>
+          <a:prstGeom prst="rect">
+            <a:avLst/>
+          </a:prstGeom>
+          <a:noFill/>
+        </p:spPr>
+        <p:txBody>
+          <a:bodyPr wrap="square" lIns="0" rIns="0" tIns="0" bIns="0" anchor="t">
+            <a:spAutoFit/>
+          </a:bodyPr>
+          <a:lstStyle/>
+          <a:p>
+            <a:pPr algn="l"/>
+            <a:r>
+              <a:rPr sz="1300" b="0" i="0">
+                <a:solidFill>
+                  <a:srgbClr val="14324A"/>
+                </a:solidFill>
+                <a:latin typeface="Calibri"/>
+              </a:rPr>
+              <a:t>a hash join of workbench file locations against the staged corpus paths</a:t>
+            </a:r>
+          </a:p>
+        </p:txBody>
+      </p:sp>
+      <p:sp>
+        <p:nvSpPr>
+          <p:cNvPr id="37" name="TextBox 36"/>
+          <p:cNvSpPr txBox="1"/>
+          <p:nvPr/>
+        </p:nvSpPr>
+        <p:spPr>
+          <a:xfrm>
+            <a:off x="594360" y="6069787"/>
+            <a:ext cx="5409590" cy="376732"/>
+          </a:xfrm>
+          <a:prstGeom prst="rect">
+            <a:avLst/>
+          </a:prstGeom>
+          <a:noFill/>
+        </p:spPr>
+        <p:txBody>
+          <a:bodyPr wrap="square" lIns="0" rIns="0" tIns="0" bIns="0" anchor="b">
+            <a:spAutoFit/>
+          </a:bodyPr>
+          <a:lstStyle/>
+          <a:p>
+            <a:pPr algn="l"/>
+            <a:r>
+              <a:rPr sz="1000" b="0" i="0">
+                <a:solidFill>
+                  <a:srgbClr val="70879A"/>
+                </a:solidFill>
+                <a:latin typeface="Calibri"/>
+              </a:rPr>
+              <a:t>EI-eij-1b359b3cbd2e</a:t>
+            </a:r>
+          </a:p>
+        </p:txBody>
+      </p:sp>
+      <p:sp>
+        <p:nvSpPr>
+          <p:cNvPr id="38" name="TextBox 37"/>
+          <p:cNvSpPr txBox="1"/>
+          <p:nvPr/>
+        </p:nvSpPr>
+        <p:spPr>
+          <a:xfrm>
+            <a:off x="6187744" y="6069787"/>
+            <a:ext cx="4477816" cy="376732"/>
+          </a:xfrm>
+          <a:prstGeom prst="rect">
+            <a:avLst/>
+          </a:prstGeom>
+          <a:noFill/>
+        </p:spPr>
+        <p:txBody>
+          <a:bodyPr wrap="square" lIns="0" rIns="0" tIns="0" bIns="0" anchor="b">
+            <a:spAutoFit/>
+          </a:bodyPr>
+          <a:lstStyle/>
+          <a:p>
+            <a:pPr algn="ctr"/>
+            <a:r>
+              <a:rPr sz="1000" b="0" i="0">
+                <a:solidFill>
+                  <a:srgbClr val="70879A"/>
+                </a:solidFill>
+                <a:latin typeface="Calibri"/>
+              </a:rPr>
+              <a:t>Tenant confidential</a:t>
+            </a:r>
+          </a:p>
+        </p:txBody>
+      </p:sp>
+      <p:sp>
+        <p:nvSpPr>
+          <p:cNvPr id="39" name="TextBox 38"/>
+          <p:cNvSpPr txBox="1"/>
+          <p:nvPr/>
+        </p:nvSpPr>
+        <p:spPr>
+          <a:xfrm>
+            <a:off x="10848441" y="6069787"/>
+            <a:ext cx="748893" cy="376732"/>
+          </a:xfrm>
+          <a:prstGeom prst="rect">
+            <a:avLst/>
+          </a:prstGeom>
+          <a:noFill/>
+        </p:spPr>
+        <p:txBody>
+          <a:bodyPr wrap="square" lIns="0" rIns="0" tIns="0" bIns="0" anchor="b">
+            <a:spAutoFit/>
+          </a:bodyPr>
+          <a:lstStyle/>
+          <a:p>
+            <a:pPr algn="r"/>
+            <a:r>
+              <a:rPr sz="1000" b="0" i="0">
+                <a:solidFill>
+                  <a:srgbClr val="70879A"/>
+                </a:solidFill>
+                <a:latin typeface="Courier New"/>
+              </a:rPr>
+              <a:t>53</a:t>
+            </a:r>
+          </a:p>
+        </p:txBody>
+      </p:sp>
+    </p:spTree>
+  </p:cSld>
+  <p:clrMapOvr>
+    <a:masterClrMapping/>
+  </p:clrMapOvr>
+</p:sld>
+</file>
+
+<file path=ppt/slides/slide54.xml><?xml version="1.0" encoding="utf-8"?>
+<p:sld xmlns:a="http://schemas.openxmlformats.org/drawingml/2006/main" xmlns:p="http://schemas.openxmlformats.org/presentationml/2006/main" xmlns:r="http://schemas.openxmlformats.org/officeDocument/2006/relationships">
+  <p:cSld>
+    <p:bg>
+      <p:bgPr>
+        <a:solidFill>
+          <a:srgbClr val="FFFFFF"/>
+        </a:solidFill>
+        <a:effectLst/>
+      </p:bgPr>
+    </p:bg>
+    <p:spTree>
+      <p:nvGrpSpPr>
+        <p:cNvPr id="1" name=""/>
+        <p:cNvGrpSpPr/>
+        <p:nvPr/>
+      </p:nvGrpSpPr>
+      <p:grpSpPr/>
+      <p:sp>
+        <p:nvSpPr>
+          <p:cNvPr id="2" name="TextBox 1"/>
+          <p:cNvSpPr txBox="1"/>
+          <p:nvPr/>
+        </p:nvSpPr>
+        <p:spPr>
+          <a:xfrm>
+            <a:off x="594360" y="411480"/>
+            <a:ext cx="11002975" cy="376732"/>
+          </a:xfrm>
+          <a:prstGeom prst="rect">
+            <a:avLst/>
+          </a:prstGeom>
+          <a:noFill/>
+        </p:spPr>
+        <p:txBody>
+          <a:bodyPr wrap="square" lIns="0" rIns="0" tIns="0" bIns="0" anchor="t">
+            <a:spAutoFit/>
+          </a:bodyPr>
+          <a:lstStyle/>
+          <a:p>
+            <a:pPr algn="l"/>
+            <a:r>
+              <a:rPr sz="1100" b="1" i="0">
+                <a:solidFill>
+                  <a:srgbClr val="70879A"/>
+                </a:solidFill>
+                <a:latin typeface="Calibri"/>
+              </a:rPr>
+              <a:t>APPENDIX</a:t>
+            </a:r>
+          </a:p>
+        </p:txBody>
+      </p:sp>
+      <p:sp>
+        <p:nvSpPr>
+          <p:cNvPr id="3" name="TextBox 2"/>
+          <p:cNvSpPr txBox="1"/>
+          <p:nvPr/>
+        </p:nvSpPr>
+        <p:spPr>
+          <a:xfrm>
+            <a:off x="594360" y="789127"/>
+            <a:ext cx="11002975" cy="1131112"/>
+          </a:xfrm>
+          <a:prstGeom prst="rect">
+            <a:avLst/>
+          </a:prstGeom>
+          <a:noFill/>
+        </p:spPr>
+        <p:txBody>
+          <a:bodyPr wrap="square" lIns="0" rIns="0" tIns="0" bIns="0" anchor="t">
+            <a:spAutoFit/>
+          </a:bodyPr>
+          <a:lstStyle/>
+          <a:p>
+            <a:pPr algn="l"/>
+            <a:r>
+              <a:rPr sz="2600" b="0" i="0">
+                <a:solidFill>
+                  <a:srgbClr val="14324A"/>
+                </a:solidFill>
+                <a:latin typeface="Cambria"/>
+              </a:rPr>
+              <a:t>Exhibit index with receipts</a:t>
+            </a:r>
+          </a:p>
+        </p:txBody>
+      </p:sp>
+      <p:sp>
+        <p:nvSpPr>
+          <p:cNvPr id="4" name="TextBox 3"/>
+          <p:cNvSpPr txBox="1"/>
+          <p:nvPr/>
+        </p:nvSpPr>
+        <p:spPr>
+          <a:xfrm>
+            <a:off x="594360" y="1920240"/>
             <a:ext cx="822960" cy="502920"/>
           </a:xfrm>
           <a:prstGeom prst="rect">
@@ -41724,20 +43334,20 @@
                 </a:solidFill>
                 <a:latin typeface="Courier New"/>
               </a:rPr>
-              <a:t>R02</a:t>
-            </a:r>
-          </a:p>
-        </p:txBody>
-      </p:sp>
-      <p:sp>
-        <p:nvSpPr>
-          <p:cNvPr id="8" name="TextBox 7"/>
-          <p:cNvSpPr txBox="1"/>
-          <p:nvPr/>
-        </p:nvSpPr>
-        <p:spPr>
-          <a:xfrm>
-            <a:off x="1508760" y="2560320"/>
+              <a:t>R01</a:t>
+            </a:r>
+          </a:p>
+        </p:txBody>
+      </p:sp>
+      <p:sp>
+        <p:nvSpPr>
+          <p:cNvPr id="5" name="TextBox 4"/>
+          <p:cNvSpPr txBox="1"/>
+          <p:nvPr/>
+        </p:nvSpPr>
+        <p:spPr>
+          <a:xfrm>
+            <a:off x="1508760" y="1920240"/>
             <a:ext cx="10088575" cy="502920"/>
           </a:xfrm>
           <a:prstGeom prst="rect">
@@ -41759,20 +43369,20 @@
                 </a:solidFill>
                 <a:latin typeface="Calibri"/>
               </a:rPr>
-              <a:t>Estate intelligence census eij-1b359b3cbd2e, cost_strategies priced at reference list prices, not the owner's invoice: Huawei Cloud RDS for MySQL cloud SSD AF-Johannesburg 0.00015 USD/GB-hour x 730 h; OBS Standard 0.023 USD/GB-month</a:t>
+              <a:t>Estate intelligence census eij-1b359b3cbd2e, digest-verified report (measured 2026-09-29), headline aggregates and per-database measures</a:t>
             </a:r>
           </a:p>
         </p:txBody>
       </p:sp>
       <p:cxnSp>
         <p:nvCxnSpPr>
-          <p:cNvPr id="9" name="Connector 8"/>
+          <p:cNvPr id="6" name="Connector 5"/>
           <p:cNvCxnSpPr/>
           <p:nvPr/>
         </p:nvCxnSpPr>
         <p:spPr>
           <a:xfrm>
-            <a:off x="594360" y="3081528"/>
+            <a:off x="594360" y="2441448"/>
             <a:ext cx="11002975" cy="0"/>
           </a:xfrm>
           <a:prstGeom prst="line">
@@ -41801,14 +43411,14 @@
       </p:cxnSp>
       <p:sp>
         <p:nvSpPr>
-          <p:cNvPr id="10" name="TextBox 9"/>
-          <p:cNvSpPr txBox="1"/>
-          <p:nvPr/>
-        </p:nvSpPr>
-        <p:spPr>
-          <a:xfrm>
-            <a:off x="594360" y="3200400"/>
-            <a:ext cx="822960" cy="365760"/>
+          <p:cNvPr id="7" name="TextBox 6"/>
+          <p:cNvSpPr txBox="1"/>
+          <p:nvPr/>
+        </p:nvSpPr>
+        <p:spPr>
+          <a:xfrm>
+            <a:off x="594360" y="2560320"/>
+            <a:ext cx="822960" cy="502920"/>
           </a:xfrm>
           <a:prstGeom prst="rect">
             <a:avLst/>
@@ -41829,21 +43439,21 @@
                 </a:solidFill>
                 <a:latin typeface="Courier New"/>
               </a:rPr>
-              <a:t>R03</a:t>
-            </a:r>
-          </a:p>
-        </p:txBody>
-      </p:sp>
-      <p:sp>
-        <p:nvSpPr>
-          <p:cNvPr id="11" name="TextBox 10"/>
-          <p:cNvSpPr txBox="1"/>
-          <p:nvPr/>
-        </p:nvSpPr>
-        <p:spPr>
-          <a:xfrm>
-            <a:off x="1508760" y="3200400"/>
-            <a:ext cx="10088575" cy="365760"/>
+              <a:t>R02</a:t>
+            </a:r>
+          </a:p>
+        </p:txBody>
+      </p:sp>
+      <p:sp>
+        <p:nvSpPr>
+          <p:cNvPr id="8" name="TextBox 7"/>
+          <p:cNvSpPr txBox="1"/>
+          <p:nvPr/>
+        </p:nvSpPr>
+        <p:spPr>
+          <a:xfrm>
+            <a:off x="1508760" y="2560320"/>
+            <a:ext cx="10088575" cy="502920"/>
           </a:xfrm>
           <a:prstGeom prst="rect">
             <a:avLst/>
@@ -41864,20 +43474,20 @@
                 </a:solidFill>
                 <a:latin typeface="Calibri"/>
               </a:rPr>
-              <a:t>Estate intelligence census eij-1b359b3cbd2e, data_products readiness scoring (dimensions, grades, blockers)</a:t>
+              <a:t>Estate intelligence census eij-1b359b3cbd2e, cost_strategies priced at reference list prices, not the owner's invoice: Huawei Cloud RDS for MySQL cloud SSD AF-Johannesburg 0.00015 USD/GB-hour x 730 h; OBS Standard 0.023 USD/GB-month</a:t>
             </a:r>
           </a:p>
         </p:txBody>
       </p:sp>
       <p:cxnSp>
         <p:nvCxnSpPr>
-          <p:cNvPr id="12" name="Connector 11"/>
+          <p:cNvPr id="9" name="Connector 8"/>
           <p:cNvCxnSpPr/>
           <p:nvPr/>
         </p:nvCxnSpPr>
         <p:spPr>
           <a:xfrm>
-            <a:off x="594360" y="3584448"/>
+            <a:off x="594360" y="3081528"/>
             <a:ext cx="11002975" cy="0"/>
           </a:xfrm>
           <a:prstGeom prst="line">
@@ -41906,13 +43516,13 @@
       </p:cxnSp>
       <p:sp>
         <p:nvSpPr>
-          <p:cNvPr id="13" name="TextBox 12"/>
-          <p:cNvSpPr txBox="1"/>
-          <p:nvPr/>
-        </p:nvSpPr>
-        <p:spPr>
-          <a:xfrm>
-            <a:off x="594360" y="3703320"/>
+          <p:cNvPr id="10" name="TextBox 9"/>
+          <p:cNvSpPr txBox="1"/>
+          <p:nvPr/>
+        </p:nvSpPr>
+        <p:spPr>
+          <a:xfrm>
+            <a:off x="594360" y="3200400"/>
             <a:ext cx="822960" cy="365760"/>
           </a:xfrm>
           <a:prstGeom prst="rect">
@@ -41934,20 +43544,20 @@
                 </a:solidFill>
                 <a:latin typeface="Courier New"/>
               </a:rPr>
-              <a:t>R04</a:t>
-            </a:r>
-          </a:p>
-        </p:txBody>
-      </p:sp>
-      <p:sp>
-        <p:nvSpPr>
-          <p:cNvPr id="14" name="TextBox 13"/>
-          <p:cNvSpPr txBox="1"/>
-          <p:nvPr/>
-        </p:nvSpPr>
-        <p:spPr>
-          <a:xfrm>
-            <a:off x="1508760" y="3703320"/>
+              <a:t>R03</a:t>
+            </a:r>
+          </a:p>
+        </p:txBody>
+      </p:sp>
+      <p:sp>
+        <p:nvSpPr>
+          <p:cNvPr id="11" name="TextBox 10"/>
+          <p:cNvSpPr txBox="1"/>
+          <p:nvPr/>
+        </p:nvSpPr>
+        <p:spPr>
+          <a:xfrm>
+            <a:off x="1508760" y="3200400"/>
             <a:ext cx="10088575" cy="365760"/>
           </a:xfrm>
           <a:prstGeom prst="rect">
@@ -41969,20 +43579,20 @@
                 </a:solidFill>
                 <a:latin typeface="Calibri"/>
               </a:rPr>
-              <a:t>OBS bucket enumeration census run cr-f1415e395361 (22,975,591 objects, 130.3 TiB)</a:t>
+              <a:t>Estate intelligence census eij-1b359b3cbd2e, data_products readiness scoring (dimensions, grades, blockers)</a:t>
             </a:r>
           </a:p>
         </p:txBody>
       </p:sp>
       <p:cxnSp>
         <p:nvCxnSpPr>
-          <p:cNvPr id="15" name="Connector 14"/>
+          <p:cNvPr id="12" name="Connector 11"/>
           <p:cNvCxnSpPr/>
           <p:nvPr/>
         </p:nvCxnSpPr>
         <p:spPr>
           <a:xfrm>
-            <a:off x="594360" y="4087368"/>
+            <a:off x="594360" y="3584448"/>
             <a:ext cx="11002975" cy="0"/>
           </a:xfrm>
           <a:prstGeom prst="line">
@@ -42011,13 +43621,13 @@
       </p:cxnSp>
       <p:sp>
         <p:nvSpPr>
-          <p:cNvPr id="16" name="TextBox 15"/>
-          <p:cNvSpPr txBox="1"/>
-          <p:nvPr/>
-        </p:nvSpPr>
-        <p:spPr>
-          <a:xfrm>
-            <a:off x="594360" y="4206240"/>
+          <p:cNvPr id="13" name="TextBox 12"/>
+          <p:cNvSpPr txBox="1"/>
+          <p:nvPr/>
+        </p:nvSpPr>
+        <p:spPr>
+          <a:xfrm>
+            <a:off x="594360" y="3703320"/>
             <a:ext cx="822960" cy="365760"/>
           </a:xfrm>
           <a:prstGeom prst="rect">
@@ -42039,20 +43649,20 @@
                 </a:solidFill>
                 <a:latin typeface="Courier New"/>
               </a:rPr>
-              <a:t>R05</a:t>
-            </a:r>
-          </a:p>
-        </p:txBody>
-      </p:sp>
-      <p:sp>
-        <p:nvSpPr>
-          <p:cNvPr id="17" name="TextBox 16"/>
-          <p:cNvSpPr txBox="1"/>
-          <p:nvPr/>
-        </p:nvSpPr>
-        <p:spPr>
-          <a:xfrm>
-            <a:off x="1508760" y="4206240"/>
+              <a:t>R04</a:t>
+            </a:r>
+          </a:p>
+        </p:txBody>
+      </p:sp>
+      <p:sp>
+        <p:nvSpPr>
+          <p:cNvPr id="14" name="TextBox 13"/>
+          <p:cNvSpPr txBox="1"/>
+          <p:nvPr/>
+        </p:nvSpPr>
+        <p:spPr>
+          <a:xfrm>
+            <a:off x="1508760" y="3703320"/>
             <a:ext cx="10088575" cy="365760"/>
           </a:xfrm>
           <a:prstGeom prst="rect">
@@ -42074,20 +43684,20 @@
                 </a:solidFill>
                 <a:latin typeface="Calibri"/>
               </a:rPr>
-              <a:t>NAS share enumeration census run cr-cf4eef79995b (1,456,787 files, 43.6 TiB)</a:t>
+              <a:t>OBS bucket enumeration census run cr-f1415e395361 (22,975,591 objects, 130.3 TiB)</a:t>
             </a:r>
           </a:p>
         </p:txBody>
       </p:sp>
       <p:cxnSp>
         <p:nvCxnSpPr>
-          <p:cNvPr id="18" name="Connector 17"/>
+          <p:cNvPr id="15" name="Connector 14"/>
           <p:cNvCxnSpPr/>
           <p:nvPr/>
         </p:nvCxnSpPr>
         <p:spPr>
           <a:xfrm>
-            <a:off x="594360" y="4590288"/>
+            <a:off x="594360" y="4087368"/>
             <a:ext cx="11002975" cy="0"/>
           </a:xfrm>
           <a:prstGeom prst="line">
@@ -42116,14 +43726,14 @@
       </p:cxnSp>
       <p:sp>
         <p:nvSpPr>
-          <p:cNvPr id="19" name="TextBox 18"/>
-          <p:cNvSpPr txBox="1"/>
-          <p:nvPr/>
-        </p:nvSpPr>
-        <p:spPr>
-          <a:xfrm>
-            <a:off x="594360" y="4709160"/>
-            <a:ext cx="822960" cy="502920"/>
+          <p:cNvPr id="16" name="TextBox 15"/>
+          <p:cNvSpPr txBox="1"/>
+          <p:nvPr/>
+        </p:nvSpPr>
+        <p:spPr>
+          <a:xfrm>
+            <a:off x="594360" y="4206240"/>
+            <a:ext cx="822960" cy="365760"/>
           </a:xfrm>
           <a:prstGeom prst="rect">
             <a:avLst/>
@@ -42144,21 +43754,21 @@
                 </a:solidFill>
                 <a:latin typeface="Courier New"/>
               </a:rPr>
-              <a:t>R06</a:t>
-            </a:r>
-          </a:p>
-        </p:txBody>
-      </p:sp>
-      <p:sp>
-        <p:nvSpPr>
-          <p:cNvPr id="20" name="TextBox 19"/>
-          <p:cNvSpPr txBox="1"/>
-          <p:nvPr/>
-        </p:nvSpPr>
-        <p:spPr>
-          <a:xfrm>
-            <a:off x="1508760" y="4709160"/>
-            <a:ext cx="10088575" cy="502920"/>
+              <a:t>R05</a:t>
+            </a:r>
+          </a:p>
+        </p:txBody>
+      </p:sp>
+      <p:sp>
+        <p:nvSpPr>
+          <p:cNvPr id="17" name="TextBox 16"/>
+          <p:cNvSpPr txBox="1"/>
+          <p:nvPr/>
+        </p:nvSpPr>
+        <p:spPr>
+          <a:xfrm>
+            <a:off x="1508760" y="4206240"/>
+            <a:ext cx="10088575" cy="365760"/>
           </a:xfrm>
           <a:prstGeom prst="rect">
             <a:avLst/>
@@ -42179,20 +43789,20 @@
                 </a:solidFill>
                 <a:latin typeface="Calibri"/>
               </a:rPr>
-              <a:t>Estate language reading m9j-9e8fcb46a809 on akki-vm (2 GPUs, 1.034 GPU-h): audio language model lcj-7128593897d4 sha256 5c1feb8497e8…, music detector m9j-686de001bfe7 sha256 0fea3eee0393…; model readings, not human labels</a:t>
+              <a:t>NAS share enumeration census run cr-cf4eef79995b (1,456,787 files, 43.6 TiB)</a:t>
             </a:r>
           </a:p>
         </p:txBody>
       </p:sp>
       <p:cxnSp>
         <p:nvCxnSpPr>
-          <p:cNvPr id="21" name="Connector 20"/>
+          <p:cNvPr id="18" name="Connector 17"/>
           <p:cNvCxnSpPr/>
           <p:nvPr/>
         </p:nvCxnSpPr>
         <p:spPr>
           <a:xfrm>
-            <a:off x="594360" y="5230368"/>
+            <a:off x="594360" y="4590288"/>
             <a:ext cx="11002975" cy="0"/>
           </a:xfrm>
           <a:prstGeom prst="line">
@@ -42221,13 +43831,13 @@
       </p:cxnSp>
       <p:sp>
         <p:nvSpPr>
-          <p:cNvPr id="22" name="TextBox 21"/>
-          <p:cNvSpPr txBox="1"/>
-          <p:nvPr/>
-        </p:nvSpPr>
-        <p:spPr>
-          <a:xfrm>
-            <a:off x="594360" y="5349240"/>
+          <p:cNvPr id="19" name="TextBox 18"/>
+          <p:cNvSpPr txBox="1"/>
+          <p:nvPr/>
+        </p:nvSpPr>
+        <p:spPr>
+          <a:xfrm>
+            <a:off x="594360" y="4709160"/>
             <a:ext cx="822960" cy="502920"/>
           </a:xfrm>
           <a:prstGeom prst="rect">
@@ -42249,20 +43859,20 @@
                 </a:solidFill>
                 <a:latin typeface="Courier New"/>
               </a:rPr>
-              <a:t>R07</a:t>
-            </a:r>
-          </a:p>
-        </p:txBody>
-      </p:sp>
-      <p:sp>
-        <p:nvSpPr>
-          <p:cNvPr id="23" name="TextBox 22"/>
-          <p:cNvSpPr txBox="1"/>
-          <p:nvPr/>
-        </p:nvSpPr>
-        <p:spPr>
-          <a:xfrm>
-            <a:off x="1508760" y="5349240"/>
+              <a:t>R06</a:t>
+            </a:r>
+          </a:p>
+        </p:txBody>
+      </p:sp>
+      <p:sp>
+        <p:nvSpPr>
+          <p:cNvPr id="20" name="TextBox 19"/>
+          <p:cNvSpPr txBox="1"/>
+          <p:nvPr/>
+        </p:nvSpPr>
+        <p:spPr>
+          <a:xfrm>
+            <a:off x="1508760" y="4709160"/>
             <a:ext cx="10088575" cy="502920"/>
           </a:xfrm>
           <a:prstGeom prst="rect">
@@ -42284,20 +43894,20 @@
                 </a:solidFill>
                 <a:latin typeface="Calibri"/>
               </a:rPr>
-              <a:t>Served text language model m9j-74af7cef0a85 readings of the staged transcripts: jobs m9j-8cf6702f8718 (399 transcripts read, 3939 present)</a:t>
+              <a:t>Estate language reading m9j-9e8fcb46a809 on akki-vm (2 GPUs, 1.034 GPU-h): audio language model lcj-7128593897d4 sha256 5c1feb8497e8…, music detector m9j-686de001bfe7 sha256 0fea3eee0393…; model readings, not human labels</a:t>
             </a:r>
           </a:p>
         </p:txBody>
       </p:sp>
       <p:cxnSp>
         <p:nvCxnSpPr>
-          <p:cNvPr id="24" name="Connector 23"/>
+          <p:cNvPr id="21" name="Connector 20"/>
           <p:cNvCxnSpPr/>
           <p:nvPr/>
         </p:nvCxnSpPr>
         <p:spPr>
           <a:xfrm>
-            <a:off x="594360" y="5870448"/>
+            <a:off x="594360" y="5230368"/>
             <a:ext cx="11002975" cy="0"/>
           </a:xfrm>
           <a:prstGeom prst="line">
@@ -42326,14 +43936,14 @@
       </p:cxnSp>
       <p:sp>
         <p:nvSpPr>
-          <p:cNvPr id="25" name="TextBox 24"/>
-          <p:cNvSpPr txBox="1"/>
-          <p:nvPr/>
-        </p:nvSpPr>
-        <p:spPr>
-          <a:xfrm>
-            <a:off x="594360" y="5989320"/>
-            <a:ext cx="822960" cy="905256"/>
+          <p:cNvPr id="22" name="TextBox 21"/>
+          <p:cNvSpPr txBox="1"/>
+          <p:nvPr/>
+        </p:nvSpPr>
+        <p:spPr>
+          <a:xfrm>
+            <a:off x="594360" y="5349240"/>
+            <a:ext cx="822960" cy="502920"/>
           </a:xfrm>
           <a:prstGeom prst="rect">
             <a:avLst/>
@@ -42354,21 +43964,21 @@
                 </a:solidFill>
                 <a:latin typeface="Courier New"/>
               </a:rPr>
-              <a:t>R08</a:t>
-            </a:r>
-          </a:p>
-        </p:txBody>
-      </p:sp>
-      <p:sp>
-        <p:nvSpPr>
-          <p:cNvPr id="26" name="TextBox 25"/>
-          <p:cNvSpPr txBox="1"/>
-          <p:nvPr/>
-        </p:nvSpPr>
-        <p:spPr>
-          <a:xfrm>
-            <a:off x="1508760" y="5989320"/>
-            <a:ext cx="10088575" cy="905256"/>
+              <a:t>R07</a:t>
+            </a:r>
+          </a:p>
+        </p:txBody>
+      </p:sp>
+      <p:sp>
+        <p:nvSpPr>
+          <p:cNvPr id="23" name="TextBox 22"/>
+          <p:cNvSpPr txBox="1"/>
+          <p:nvPr/>
+        </p:nvSpPr>
+        <p:spPr>
+          <a:xfrm>
+            <a:off x="1508760" y="5349240"/>
+            <a:ext cx="10088575" cy="502920"/>
           </a:xfrm>
           <a:prstGeom prst="rect">
             <a:avLst/>
@@ -42389,20 +43999,20 @@
                 </a:solidFill>
                 <a:latin typeface="Calibri"/>
               </a:rPr>
-              <a:t>Aggregate-only database reading etx-81e10befe6e0: news_vault.stories (script, title, date, hour_id) → news_vault.hours (station_id, time, type_id) → news_vault.stations (name); news_vault.news (2022 bulletins); local.uploaded_files (language_id, audio_length, status) ← local.transcripts (file_id, start_time, end_time, transcript) ; local.folder_languages (Language, code, station)</a:t>
+              <a:t>Served text language model m9j-74af7cef0a85 readings of the staged transcripts: jobs m9j-2d43ed6cf567, m9j-8cf6702f8718 (2,245 transcripts read, 3939 present)</a:t>
             </a:r>
           </a:p>
         </p:txBody>
       </p:sp>
       <p:cxnSp>
         <p:nvCxnSpPr>
-          <p:cNvPr id="27" name="Connector 26"/>
+          <p:cNvPr id="24" name="Connector 23"/>
           <p:cNvCxnSpPr/>
           <p:nvPr/>
         </p:nvCxnSpPr>
         <p:spPr>
           <a:xfrm>
-            <a:off x="594360" y="6912864"/>
+            <a:off x="594360" y="5870448"/>
             <a:ext cx="11002975" cy="0"/>
           </a:xfrm>
           <a:prstGeom prst="line">
@@ -42431,7 +44041,217 @@
       </p:cxnSp>
       <p:sp>
         <p:nvSpPr>
+          <p:cNvPr id="25" name="TextBox 24"/>
+          <p:cNvSpPr txBox="1"/>
+          <p:nvPr/>
+        </p:nvSpPr>
+        <p:spPr>
+          <a:xfrm>
+            <a:off x="594360" y="5989320"/>
+            <a:ext cx="822960" cy="905256"/>
+          </a:xfrm>
+          <a:prstGeom prst="rect">
+            <a:avLst/>
+          </a:prstGeom>
+          <a:noFill/>
+        </p:spPr>
+        <p:txBody>
+          <a:bodyPr wrap="square" lIns="0" rIns="0" tIns="0" bIns="0" anchor="t">
+            <a:spAutoFit/>
+          </a:bodyPr>
+          <a:lstStyle/>
+          <a:p>
+            <a:pPr algn="l"/>
+            <a:r>
+              <a:rPr sz="1400" b="1" i="0">
+                <a:solidFill>
+                  <a:srgbClr val="E8772E"/>
+                </a:solidFill>
+                <a:latin typeface="Courier New"/>
+              </a:rPr>
+              <a:t>R08</a:t>
+            </a:r>
+          </a:p>
+        </p:txBody>
+      </p:sp>
+      <p:sp>
+        <p:nvSpPr>
+          <p:cNvPr id="26" name="TextBox 25"/>
+          <p:cNvSpPr txBox="1"/>
+          <p:nvPr/>
+        </p:nvSpPr>
+        <p:spPr>
+          <a:xfrm>
+            <a:off x="1508760" y="5989320"/>
+            <a:ext cx="10088575" cy="905256"/>
+          </a:xfrm>
+          <a:prstGeom prst="rect">
+            <a:avLst/>
+          </a:prstGeom>
+          <a:noFill/>
+        </p:spPr>
+        <p:txBody>
+          <a:bodyPr wrap="square" lIns="0" rIns="0" tIns="0" bIns="0" anchor="t">
+            <a:spAutoFit/>
+          </a:bodyPr>
+          <a:lstStyle/>
+          <a:p>
+            <a:pPr algn="l"/>
+            <a:r>
+              <a:rPr sz="1300" b="0" i="0">
+                <a:solidFill>
+                  <a:srgbClr val="14324A"/>
+                </a:solidFill>
+                <a:latin typeface="Calibri"/>
+              </a:rPr>
+              <a:t>Aggregate-only database reading etx-81e10befe6e0: news_vault.stories (script, title, date, hour_id) → news_vault.hours (station_id, time, type_id) → news_vault.stations (name); news_vault.news (2022 bulletins); local.uploaded_files (language_id, audio_length, status) ← local.transcripts (file_id, start_time, end_time, transcript) ; local.folder_languages (Language, code, station)</a:t>
+            </a:r>
+          </a:p>
+        </p:txBody>
+      </p:sp>
+      <p:cxnSp>
+        <p:nvCxnSpPr>
+          <p:cNvPr id="27" name="Connector 26"/>
+          <p:cNvCxnSpPr/>
+          <p:nvPr/>
+        </p:nvCxnSpPr>
+        <p:spPr>
+          <a:xfrm>
+            <a:off x="594360" y="6912864"/>
+            <a:ext cx="11002975" cy="0"/>
+          </a:xfrm>
+          <a:prstGeom prst="line">
+            <a:avLst/>
+          </a:prstGeom>
+          <a:ln w="9525">
+            <a:solidFill>
+              <a:srgbClr val="D3DCE4"/>
+            </a:solidFill>
+          </a:ln>
+        </p:spPr>
+        <p:style>
+          <a:lnRef idx="2">
+            <a:schemeClr val="accent1"/>
+          </a:lnRef>
+          <a:fillRef idx="0">
+            <a:schemeClr val="accent1"/>
+          </a:fillRef>
+          <a:effectRef idx="1">
+            <a:schemeClr val="accent1"/>
+          </a:effectRef>
+          <a:fontRef idx="minor">
+            <a:schemeClr val="tx1"/>
+          </a:fontRef>
+        </p:style>
+      </p:cxnSp>
+      <p:sp>
+        <p:nvSpPr>
           <p:cNvPr id="28" name="TextBox 27"/>
+          <p:cNvSpPr txBox="1"/>
+          <p:nvPr/>
+        </p:nvSpPr>
+        <p:spPr>
+          <a:xfrm>
+            <a:off x="594360" y="7031736"/>
+            <a:ext cx="822960" cy="905256"/>
+          </a:xfrm>
+          <a:prstGeom prst="rect">
+            <a:avLst/>
+          </a:prstGeom>
+          <a:noFill/>
+        </p:spPr>
+        <p:txBody>
+          <a:bodyPr wrap="square" lIns="0" rIns="0" tIns="0" bIns="0" anchor="t">
+            <a:spAutoFit/>
+          </a:bodyPr>
+          <a:lstStyle/>
+          <a:p>
+            <a:pPr algn="l"/>
+            <a:r>
+              <a:rPr sz="1400" b="1" i="0">
+                <a:solidFill>
+                  <a:srgbClr val="E8772E"/>
+                </a:solidFill>
+                <a:latin typeface="Courier New"/>
+              </a:rPr>
+              <a:t>R09</a:t>
+            </a:r>
+          </a:p>
+        </p:txBody>
+      </p:sp>
+      <p:sp>
+        <p:nvSpPr>
+          <p:cNvPr id="29" name="TextBox 28"/>
+          <p:cNvSpPr txBox="1"/>
+          <p:nvPr/>
+        </p:nvSpPr>
+        <p:spPr>
+          <a:xfrm>
+            <a:off x="1508760" y="7031736"/>
+            <a:ext cx="10088575" cy="905256"/>
+          </a:xfrm>
+          <a:prstGeom prst="rect">
+            <a:avLst/>
+          </a:prstGeom>
+          <a:noFill/>
+        </p:spPr>
+        <p:txBody>
+          <a:bodyPr wrap="square" lIns="0" rIns="0" tIns="0" bIns="0" anchor="t">
+            <a:spAutoFit/>
+          </a:bodyPr>
+          <a:lstStyle/>
+          <a:p>
+            <a:pPr algn="l"/>
+            <a:r>
+              <a:rPr sz="1300" b="0" i="0">
+                <a:solidFill>
+                  <a:srgbClr val="14324A"/>
+                </a:solidFill>
+                <a:latin typeface="Calibri"/>
+              </a:rPr>
+              <a:t>Model role assignments evaluated 2026-10-02: integration model catalogue plus published task benchmarks reviewed on the day; planner/reviewer families kept distinct so the review does not share the planner's blind spots. Not claimed: no independent head-to-head benchmark was run on owner data; assignments are disclosed configuration, re-evaluated when a role under-performs on its own gate</a:t>
+            </a:r>
+          </a:p>
+        </p:txBody>
+      </p:sp>
+      <p:cxnSp>
+        <p:nvCxnSpPr>
+          <p:cNvPr id="30" name="Connector 29"/>
+          <p:cNvCxnSpPr/>
+          <p:nvPr/>
+        </p:nvCxnSpPr>
+        <p:spPr>
+          <a:xfrm>
+            <a:off x="594360" y="7955279"/>
+            <a:ext cx="11002975" cy="0"/>
+          </a:xfrm>
+          <a:prstGeom prst="line">
+            <a:avLst/>
+          </a:prstGeom>
+          <a:ln w="9525">
+            <a:solidFill>
+              <a:srgbClr val="D3DCE4"/>
+            </a:solidFill>
+          </a:ln>
+        </p:spPr>
+        <p:style>
+          <a:lnRef idx="2">
+            <a:schemeClr val="accent1"/>
+          </a:lnRef>
+          <a:fillRef idx="0">
+            <a:schemeClr val="accent1"/>
+          </a:fillRef>
+          <a:effectRef idx="1">
+            <a:schemeClr val="accent1"/>
+          </a:effectRef>
+          <a:fontRef idx="minor">
+            <a:schemeClr val="tx1"/>
+          </a:fontRef>
+        </p:style>
+      </p:cxnSp>
+      <p:sp>
+        <p:nvSpPr>
+          <p:cNvPr id="31" name="TextBox 30"/>
           <p:cNvSpPr txBox="1"/>
           <p:nvPr/>
         </p:nvSpPr>
@@ -42466,7 +44286,7 @@
       </p:sp>
       <p:sp>
         <p:nvSpPr>
-          <p:cNvPr id="29" name="TextBox 28"/>
+          <p:cNvPr id="32" name="TextBox 31"/>
           <p:cNvSpPr txBox="1"/>
           <p:nvPr/>
         </p:nvSpPr>
@@ -42501,7 +44321,7 @@
       </p:sp>
       <p:sp>
         <p:nvSpPr>
-          <p:cNvPr id="30" name="TextBox 29"/>
+          <p:cNvPr id="33" name="TextBox 32"/>
           <p:cNvSpPr txBox="1"/>
           <p:nvPr/>
         </p:nvSpPr>
@@ -42529,7 +44349,7 @@
                 </a:solidFill>
                 <a:latin typeface="Courier New"/>
               </a:rPr>
-              <a:t>53</a:t>
+              <a:t>54</a:t>
             </a:r>
           </a:p>
         </p:txBody>
@@ -42721,7 +44541,7 @@
                 </a:solidFill>
                 <a:latin typeface="Cambria"/>
               </a:rPr>
-              <a:t>The object store and file shares hold almost every byte; databases are a sliver</a:t>
+              <a:t>The object store and file shares hold almost all of the estate; databases are marginal</a:t>
             </a:r>
           </a:p>
         </p:txBody>
@@ -42774,7 +44594,7 @@
                 </a:solidFill>
                 <a:latin typeface="Calibri"/>
               </a:rPr>
-              <a:t>Manage the estate as a whole: databases are small beside 130.3 TiB of objects and 43.6 TiB of file shares.</a:t>
+              <a:t>Cost attention belongs to storage scale; the databases, at 0.3 TiB, matter for reuse value rather than for bytes.</a:t>
             </a:r>
           </a:p>
         </p:txBody>
@@ -43010,7 +44830,7 @@
                 </a:solidFill>
                 <a:latin typeface="Cambria"/>
               </a:rPr>
-              <a:t>One bucket holds most of the object store, so bucket-level decisions carry the weight</a:t>
+              <a:t>One bucket holds 66.2% of the object store, and several of the next largest are cold</a:t>
             </a:r>
           </a:p>
         </p:txBody>
@@ -43063,7 +44883,7 @@
                 </a:solidFill>
                 <a:latin typeface="Calibri"/>
               </a:rPr>
-              <a:t>The largest bucket is 86.3 TiB, which is 66.2% of the object store, so a few decisions move most of the bytes.</a:t>
+              <a:t>Review the largest buckets first, but size alone does not show waste; the table of buckets under review gives each one's last write.</a:t>
             </a:r>
           </a:p>
         </p:txBody>
@@ -43264,7 +45084,7 @@
                 </a:solidFill>
                 <a:latin typeface="Calibri"/>
               </a:rPr>
-              <a:t>WHOLE ESTATE</a:t>
+              <a:t>WHOLE-ESTATE HOLDINGS</a:t>
             </a:r>
           </a:p>
         </p:txBody>
@@ -43299,7 +45119,7 @@
                 </a:solidFill>
                 <a:latin typeface="Cambria"/>
               </a:rPr>
-              <a:t>The estate holds 174.3 TiB and nearly all of it sits outside the databases</a:t>
+              <a:t>The estate holds 174.3 TiB, nearly all of it in object storage and file shares</a:t>
             </a:r>
           </a:p>
         </p:txBody>
@@ -43369,7 +45189,7 @@
                 </a:solidFill>
                 <a:latin typeface="Calibri"/>
               </a:rPr>
-              <a:t>The whole estate holds 174.3 TiB across databases, object store and file shares, all measured.</a:t>
+              <a:t>The object store holds 130.3 TiB, 74.8% of the estate, in 106 buckets and 23.0m objects.</a:t>
             </a:r>
           </a:p>
         </p:txBody>
@@ -43474,7 +45294,7 @@
                 </a:solidFill>
                 <a:latin typeface="Calibri"/>
               </a:rPr>
-              <a:t>The object store holds 130.3 TiB, which is 74.8% of the estate, in 106 buckets and 23.0m objects.</a:t>
+              <a:t>File shares hold 43.6 TiB, 25.0% of the estate, in 16 shares and 1.5m files.</a:t>
             </a:r>
           </a:p>
         </p:txBody>
@@ -43579,7 +45399,7 @@
                 </a:solidFill>
                 <a:latin typeface="Calibri"/>
               </a:rPr>
-              <a:t>File shares hold 43.6 TiB, which is 25.0% of the estate, in 16 shares and 1.5m files.</a:t>
+              <a:t>Databases hold 351.3 GiB, 0.2% of the estate, in 20 databases. Store totals are rounded, not an exact reconciliation.</a:t>
             </a:r>
           </a:p>
         </p:txBody>
@@ -43684,7 +45504,7 @@
                 </a:solidFill>
                 <a:latin typeface="Calibri"/>
               </a:rPr>
-              <a:t>Databases hold 0.3 TiB, which is 0.2%, so database tuning alone cannot change the storage picture.</a:t>
+              <a:t>40 buckets were unreadable, so the object-store figure covers readable buckets only.</a:t>
             </a:r>
           </a:p>
         </p:txBody>
